--- a/Last/LEC/07-3_Transformers.pptx
+++ b/Last/LEC/07-3_Transformers.pptx
@@ -220,7 +220,7 @@
           <a:p>
             <a:fld id="{1D3D302D-D8E5-5146-B626-737F192C3BD3}" type="datetimeFigureOut">
               <a:rPr lang="ru-RU" smtClean="0"/>
-              <a:t>29.08.2025</a:t>
+              <a:t>29.05.2026</a:t>
             </a:fld>
             <a:endParaRPr lang="ru-RU"/>
           </a:p>
@@ -799,10 +799,6 @@
             </a:r>
           </a:p>
           <a:p>
-            <a:r>
-              <a:rPr lang="en" dirty="0"/>
-              <a:t/>
-            </a:r>
             <a:br>
               <a:rPr lang="en" dirty="0"/>
             </a:br>
@@ -1401,7 +1397,7 @@
           <a:lstStyle/>
           <a:p>
             <a:r>
-              <a:rPr lang="en-US" dirty="0" smtClean="0"/>
+              <a:rPr lang="en-US" dirty="0"/>
               <a:t>https://nixtlaverse.nixtla.io/neuralforecast/docs/capabilities/overview.html</a:t>
             </a:r>
             <a:endParaRPr lang="ru-RU" dirty="0"/>
@@ -2045,10 +2041,9 @@
           <a:lstStyle/>
           <a:p>
             <a:r>
-              <a:rPr lang="ru-RU" sz="2800" dirty="0" smtClean="0"/>
+              <a:rPr lang="ru-RU" sz="2800" dirty="0"/>
               <a:t>- Различные головы могут фокусироваться на разных аспектах: - Краткосрочные паттерны - Долгосрочные тренды - Сезонные циклы - Взаимодействия между переменными</a:t>
             </a:r>
-            <a:endParaRPr lang="ru-RU" sz="2800" dirty="0"/>
           </a:p>
         </p:txBody>
       </p:sp>
@@ -2489,7 +2484,7 @@
           <a:p>
             <a:fld id="{A76E1671-358D-4BAB-9EB2-DC8D65251B89}" type="datetimeFigureOut">
               <a:rPr lang="en-US" smtClean="0"/>
-              <a:t>8/29/2025</a:t>
+              <a:t>5/29/26</a:t>
             </a:fld>
             <a:endParaRPr lang="en-US"/>
           </a:p>
@@ -2689,7 +2684,7 @@
           <a:p>
             <a:fld id="{A76E1671-358D-4BAB-9EB2-DC8D65251B89}" type="datetimeFigureOut">
               <a:rPr lang="en-US" smtClean="0"/>
-              <a:t>8/29/2025</a:t>
+              <a:t>5/29/26</a:t>
             </a:fld>
             <a:endParaRPr lang="en-US"/>
           </a:p>
@@ -2899,7 +2894,7 @@
           <a:p>
             <a:fld id="{A76E1671-358D-4BAB-9EB2-DC8D65251B89}" type="datetimeFigureOut">
               <a:rPr lang="en-US" smtClean="0"/>
-              <a:t>8/29/2025</a:t>
+              <a:t>5/29/26</a:t>
             </a:fld>
             <a:endParaRPr lang="en-US"/>
           </a:p>
@@ -3099,7 +3094,7 @@
           <a:p>
             <a:fld id="{A76E1671-358D-4BAB-9EB2-DC8D65251B89}" type="datetimeFigureOut">
               <a:rPr lang="en-US" smtClean="0"/>
-              <a:t>8/29/2025</a:t>
+              <a:t>5/29/26</a:t>
             </a:fld>
             <a:endParaRPr lang="en-US"/>
           </a:p>
@@ -3375,7 +3370,7 @@
           <a:p>
             <a:fld id="{A76E1671-358D-4BAB-9EB2-DC8D65251B89}" type="datetimeFigureOut">
               <a:rPr lang="en-US" smtClean="0"/>
-              <a:t>8/29/2025</a:t>
+              <a:t>5/29/26</a:t>
             </a:fld>
             <a:endParaRPr lang="en-US"/>
           </a:p>
@@ -3643,7 +3638,7 @@
           <a:p>
             <a:fld id="{A76E1671-358D-4BAB-9EB2-DC8D65251B89}" type="datetimeFigureOut">
               <a:rPr lang="en-US" smtClean="0"/>
-              <a:t>8/29/2025</a:t>
+              <a:t>5/29/26</a:t>
             </a:fld>
             <a:endParaRPr lang="en-US"/>
           </a:p>
@@ -4058,7 +4053,7 @@
           <a:p>
             <a:fld id="{A76E1671-358D-4BAB-9EB2-DC8D65251B89}" type="datetimeFigureOut">
               <a:rPr lang="en-US" smtClean="0"/>
-              <a:t>8/29/2025</a:t>
+              <a:t>5/29/26</a:t>
             </a:fld>
             <a:endParaRPr lang="en-US"/>
           </a:p>
@@ -4200,7 +4195,7 @@
           <a:p>
             <a:fld id="{A76E1671-358D-4BAB-9EB2-DC8D65251B89}" type="datetimeFigureOut">
               <a:rPr lang="en-US" smtClean="0"/>
-              <a:t>8/29/2025</a:t>
+              <a:t>5/29/26</a:t>
             </a:fld>
             <a:endParaRPr lang="en-US"/>
           </a:p>
@@ -4313,7 +4308,7 @@
           <a:p>
             <a:fld id="{A76E1671-358D-4BAB-9EB2-DC8D65251B89}" type="datetimeFigureOut">
               <a:rPr lang="en-US" smtClean="0"/>
-              <a:t>8/29/2025</a:t>
+              <a:t>5/29/26</a:t>
             </a:fld>
             <a:endParaRPr lang="en-US"/>
           </a:p>
@@ -4626,7 +4621,7 @@
           <a:p>
             <a:fld id="{A76E1671-358D-4BAB-9EB2-DC8D65251B89}" type="datetimeFigureOut">
               <a:rPr lang="en-US" smtClean="0"/>
-              <a:t>8/29/2025</a:t>
+              <a:t>5/29/26</a:t>
             </a:fld>
             <a:endParaRPr lang="en-US"/>
           </a:p>
@@ -4915,7 +4910,7 @@
           <a:p>
             <a:fld id="{A76E1671-358D-4BAB-9EB2-DC8D65251B89}" type="datetimeFigureOut">
               <a:rPr lang="en-US" smtClean="0"/>
-              <a:t>8/29/2025</a:t>
+              <a:t>5/29/26</a:t>
             </a:fld>
             <a:endParaRPr lang="en-US"/>
           </a:p>
@@ -5158,7 +5153,7 @@
           <a:p>
             <a:fld id="{A76E1671-358D-4BAB-9EB2-DC8D65251B89}" type="datetimeFigureOut">
               <a:rPr lang="en-US" smtClean="0"/>
-              <a:t>8/29/2025</a:t>
+              <a:t>5/29/26</a:t>
             </a:fld>
             <a:endParaRPr lang="en-US"/>
           </a:p>
@@ -5639,13 +5634,6 @@
   <p:clrMapOvr>
     <a:masterClrMapping/>
   </p:clrMapOvr>
-  <p:timing>
-    <p:tnLst>
-      <p:par>
-        <p:cTn id="1" dur="indefinite" restart="never" nodeType="tmRoot"/>
-      </p:par>
-    </p:tnLst>
-  </p:timing>
 </p:sld>
 </file>
 
@@ -5690,18 +5678,17 @@
           <a:p>
             <a:pPr algn="ctr"/>
             <a:r>
-              <a:rPr lang="ru-RU" dirty="0" smtClean="0"/>
+              <a:rPr lang="ru-RU" dirty="0"/>
               <a:t>Идеи перехода от </a:t>
             </a:r>
             <a:r>
-              <a:rPr lang="en-US" dirty="0" smtClean="0"/>
+              <a:rPr lang="en-US" dirty="0"/>
               <a:t>RNN </a:t>
             </a:r>
             <a:r>
-              <a:rPr lang="ru-RU" dirty="0" smtClean="0"/>
+              <a:rPr lang="ru-RU" dirty="0"/>
               <a:t>к авторегрессии</a:t>
             </a:r>
-            <a:endParaRPr lang="ru-RU" dirty="0"/>
           </a:p>
         </p:txBody>
       </p:sp>
@@ -6151,13 +6138,6 @@
   <p:clrMapOvr>
     <a:masterClrMapping/>
   </p:clrMapOvr>
-  <p:timing>
-    <p:tnLst>
-      <p:par>
-        <p:cTn id="1" dur="indefinite" restart="never" nodeType="tmRoot"/>
-      </p:par>
-    </p:tnLst>
-  </p:timing>
 </p:sld>
 </file>
 
@@ -6202,19 +6182,19 @@
           <a:p>
             <a:pPr algn="ctr"/>
             <a:r>
-              <a:rPr lang="ru-RU" b="1" dirty="0" smtClean="0"/>
+              <a:rPr lang="ru-RU" b="1" dirty="0"/>
               <a:t>Идеи архитектуры </a:t>
             </a:r>
             <a:r>
-              <a:rPr lang="ru-RU" b="1" dirty="0" err="1" smtClean="0"/>
+              <a:rPr lang="ru-RU" b="1" dirty="0" err="1"/>
               <a:t>Трансформер</a:t>
             </a:r>
             <a:r>
-              <a:rPr lang="ru-RU" b="1" dirty="0" smtClean="0"/>
+              <a:rPr lang="ru-RU" b="1" dirty="0"/>
               <a:t>. </a:t>
             </a:r>
             <a:r>
-              <a:rPr lang="en-US" b="1" dirty="0" smtClean="0"/>
+              <a:rPr lang="en-US" b="1" dirty="0"/>
               <a:t>Encoder</a:t>
             </a:r>
             <a:endParaRPr lang="ru-RU" b="1" dirty="0"/>
@@ -6247,23 +6227,23 @@
               <a:buNone/>
             </a:pPr>
             <a:r>
-              <a:rPr lang="ru-RU" sz="2200" dirty="0" smtClean="0"/>
+              <a:rPr lang="ru-RU" sz="2200" dirty="0"/>
               <a:t>Входной поток </a:t>
             </a:r>
             <a:r>
-              <a:rPr lang="en-US" sz="2200" dirty="0" smtClean="0"/>
+              <a:rPr lang="en-US" sz="2200" dirty="0"/>
               <a:t>(</a:t>
             </a:r>
             <a:r>
-              <a:rPr lang="en-US" sz="2200" b="1" dirty="0" smtClean="0"/>
+              <a:rPr lang="en-US" sz="2200" b="1" dirty="0"/>
               <a:t>Encoder</a:t>
             </a:r>
             <a:r>
-              <a:rPr lang="en-US" sz="2200" dirty="0" smtClean="0"/>
+              <a:rPr lang="en-US" sz="2200" dirty="0"/>
               <a:t>)</a:t>
             </a:r>
             <a:r>
-              <a:rPr lang="ru-RU" sz="2200" dirty="0" smtClean="0"/>
+              <a:rPr lang="ru-RU" sz="2200" dirty="0"/>
               <a:t>. </a:t>
             </a:r>
             <a:r>
@@ -6274,27 +6254,26 @@
               <a:rPr lang="ru-RU" sz="2200" dirty="0"/>
               <a:t>обработка последовательности  с сохранением порядка без рекуррентных связей</a:t>
             </a:r>
-            <a:endParaRPr lang="ru-RU" sz="2200" dirty="0" smtClean="0"/>
-          </a:p>
-          <a:p>
-            <a:r>
-              <a:rPr lang="en-US" sz="2200" b="1" dirty="0" smtClean="0"/>
+          </a:p>
+          <a:p>
+            <a:r>
+              <a:rPr lang="en-US" sz="2200" b="1" dirty="0"/>
               <a:t>Pathing</a:t>
             </a:r>
             <a:r>
-              <a:rPr lang="en-US" sz="2200" dirty="0" smtClean="0"/>
+              <a:rPr lang="en-US" sz="2200" dirty="0"/>
               <a:t>: </a:t>
             </a:r>
             <a:r>
-              <a:rPr lang="ru-RU" sz="2200" dirty="0" smtClean="0"/>
+              <a:rPr lang="ru-RU" sz="2200" dirty="0"/>
               <a:t>разбиваем входную последовательность на элементы. </a:t>
             </a:r>
             <a:r>
-              <a:rPr lang="ru-RU" sz="2200" b="1" dirty="0" smtClean="0"/>
+              <a:rPr lang="ru-RU" sz="2200" b="1" dirty="0"/>
               <a:t>Цель</a:t>
             </a:r>
             <a:r>
-              <a:rPr lang="ru-RU" sz="2200" dirty="0" smtClean="0"/>
+              <a:rPr lang="ru-RU" sz="2200" dirty="0"/>
               <a:t>: </a:t>
             </a:r>
           </a:p>
@@ -6305,7 +6284,7 @@
               </a:lnSpc>
             </a:pPr>
             <a:r>
-              <a:rPr lang="ru-RU" sz="2200" dirty="0" smtClean="0"/>
+              <a:rPr lang="ru-RU" sz="2200" dirty="0"/>
               <a:t>усреднение (снижение избыточности) </a:t>
             </a:r>
           </a:p>
@@ -6316,15 +6295,15 @@
               </a:lnSpc>
             </a:pPr>
             <a:r>
-              <a:rPr lang="ru-RU" sz="2200" dirty="0" smtClean="0"/>
+              <a:rPr lang="ru-RU" sz="2200" dirty="0"/>
               <a:t>выделить локальные признаки по каждому </a:t>
             </a:r>
             <a:r>
-              <a:rPr lang="en-US" sz="2200" dirty="0" smtClean="0"/>
+              <a:rPr lang="en-US" sz="2200" dirty="0"/>
               <a:t>path</a:t>
             </a:r>
             <a:r>
-              <a:rPr lang="ru-RU" sz="2200" dirty="0" smtClean="0"/>
+              <a:rPr lang="ru-RU" sz="2200" dirty="0"/>
               <a:t>.</a:t>
             </a:r>
           </a:p>
@@ -6335,42 +6314,42 @@
               </a:lnSpc>
             </a:pPr>
             <a:r>
-              <a:rPr lang="ru-RU" sz="2200" dirty="0" smtClean="0"/>
+              <a:rPr lang="ru-RU" sz="2200" dirty="0"/>
               <a:t>могут быть разные интерпретации </a:t>
             </a:r>
             <a:r>
-              <a:rPr lang="ru-RU" sz="2200" dirty="0" err="1" smtClean="0"/>
+              <a:rPr lang="ru-RU" sz="2200" dirty="0" err="1"/>
               <a:t>патча</a:t>
             </a:r>
-            <a:endParaRPr lang="en-US" sz="2200" dirty="0" smtClean="0"/>
-          </a:p>
-          <a:p>
-            <a:r>
-              <a:rPr lang="en-US" sz="2200" b="1" dirty="0" smtClean="0"/>
+            <a:endParaRPr lang="en-US" sz="2200" dirty="0"/>
+          </a:p>
+          <a:p>
+            <a:r>
+              <a:rPr lang="en-US" sz="2200" b="1" dirty="0"/>
               <a:t>Embedding</a:t>
             </a:r>
             <a:r>
-              <a:rPr lang="en-US" sz="2200" dirty="0" smtClean="0"/>
+              <a:rPr lang="en-US" sz="2200" dirty="0"/>
               <a:t> (input layer)</a:t>
             </a:r>
             <a:r>
-              <a:rPr lang="ru-RU" sz="2200" dirty="0" smtClean="0"/>
+              <a:rPr lang="ru-RU" sz="2200" dirty="0"/>
               <a:t>: встраивание, представление </a:t>
             </a:r>
             <a:r>
-              <a:rPr lang="ru-RU" sz="2200" dirty="0" err="1" smtClean="0"/>
+              <a:rPr lang="ru-RU" sz="2200" dirty="0" err="1"/>
               <a:t>патча</a:t>
             </a:r>
             <a:r>
-              <a:rPr lang="ru-RU" sz="2200" dirty="0" smtClean="0"/>
+              <a:rPr lang="ru-RU" sz="2200" dirty="0"/>
               <a:t> многомерным массивом. </a:t>
             </a:r>
             <a:r>
-              <a:rPr lang="ru-RU" sz="2200" b="1" dirty="0" smtClean="0"/>
+              <a:rPr lang="ru-RU" sz="2200" b="1" dirty="0"/>
               <a:t>Цель</a:t>
             </a:r>
             <a:r>
-              <a:rPr lang="ru-RU" sz="2200" dirty="0" smtClean="0"/>
+              <a:rPr lang="ru-RU" sz="2200" dirty="0"/>
               <a:t>:</a:t>
             </a:r>
           </a:p>
@@ -6381,7 +6360,7 @@
               </a:lnSpc>
             </a:pPr>
             <a:r>
-              <a:rPr lang="ru-RU" sz="2200" dirty="0" smtClean="0"/>
+              <a:rPr lang="ru-RU" sz="2200" dirty="0"/>
               <a:t>Модель сама учит какое представление признаков лучше.</a:t>
             </a:r>
           </a:p>
@@ -6393,25 +6372,17 @@
             </a:pPr>
             <a:r>
               <a:rPr lang="ru-RU" sz="2200" dirty="0"/>
-              <a:t>Более содержательное пространство признаков</a:t>
-            </a:r>
-            <a:r>
-              <a:rPr lang="ru-RU" sz="2200" dirty="0" smtClean="0"/>
-              <a:t>.</a:t>
-            </a:r>
-          </a:p>
-          <a:p>
-            <a:r>
-              <a:rPr lang="en-US" sz="2200" b="1" dirty="0" smtClean="0"/>
+              <a:t>Более содержательное пространство признаков.</a:t>
+            </a:r>
+          </a:p>
+          <a:p>
+            <a:r>
+              <a:rPr lang="en-US" sz="2200" b="1" dirty="0"/>
               <a:t>Positional Encoding</a:t>
             </a:r>
             <a:r>
               <a:rPr lang="en-US" sz="2200" dirty="0"/>
-              <a:t> </a:t>
-            </a:r>
-            <a:r>
-              <a:rPr lang="en-US" sz="2200" dirty="0" smtClean="0"/>
-              <a:t>: </a:t>
+              <a:t> : </a:t>
             </a:r>
             <a:r>
               <a:rPr lang="ru-RU" sz="2200" dirty="0"/>
@@ -6423,25 +6394,17 @@
             </a:r>
             <a:r>
               <a:rPr lang="ru-RU" sz="2200" dirty="0"/>
-              <a:t> информацию о его абсолютной позиции во всей последовательности</a:t>
-            </a:r>
-            <a:r>
-              <a:rPr lang="ru-RU" sz="2200" dirty="0" smtClean="0"/>
-              <a:t>.</a:t>
+              <a:t> информацию о его абсолютной позиции во всей последовательности. </a:t>
+            </a:r>
+            <a:r>
+              <a:rPr lang="ru-RU" sz="2200" b="1" dirty="0"/>
+              <a:t>Цель</a:t>
             </a:r>
             <a:r>
               <a:rPr lang="ru-RU" sz="2200" dirty="0"/>
-              <a:t> </a:t>
-            </a:r>
-            <a:r>
-              <a:rPr lang="ru-RU" sz="2200" b="1" dirty="0" smtClean="0"/>
-              <a:t>Цель</a:t>
-            </a:r>
-            <a:r>
-              <a:rPr lang="ru-RU" sz="2200" dirty="0" smtClean="0"/>
               <a:t>:</a:t>
             </a:r>
-            <a:endParaRPr lang="en-US" sz="2200" dirty="0" smtClean="0"/>
+            <a:endParaRPr lang="en-US" sz="2200" dirty="0"/>
           </a:p>
           <a:p>
             <a:pPr lvl="1">
@@ -6450,15 +6413,15 @@
               </a:lnSpc>
             </a:pPr>
             <a:r>
-              <a:rPr lang="ru-RU" sz="2200" dirty="0" smtClean="0"/>
+              <a:rPr lang="ru-RU" sz="2200" dirty="0"/>
               <a:t>Задание последовательного порядка в </a:t>
             </a:r>
             <a:r>
-              <a:rPr lang="ru-RU" sz="2200" dirty="0" err="1" smtClean="0"/>
+              <a:rPr lang="ru-RU" sz="2200" dirty="0" err="1"/>
               <a:t>полносвязной</a:t>
             </a:r>
             <a:r>
-              <a:rPr lang="ru-RU" sz="2200" dirty="0" smtClean="0"/>
+              <a:rPr lang="ru-RU" sz="2200" dirty="0"/>
               <a:t> структуре</a:t>
             </a:r>
           </a:p>
@@ -6469,7 +6432,7 @@
               </a:lnSpc>
             </a:pPr>
             <a:r>
-              <a:rPr lang="ru-RU" sz="2200" dirty="0" smtClean="0"/>
+              <a:rPr lang="ru-RU" sz="2200" dirty="0"/>
               <a:t>Экзогенная переменная(напр. при синусоидальном порядке </a:t>
             </a:r>
             <a:r>
@@ -6486,13 +6449,9 @@
             </a:r>
             <a:r>
               <a:rPr lang="ru-RU" sz="2200" dirty="0"/>
-              <a:t> 15 к позиции </a:t>
-            </a:r>
-            <a:r>
-              <a:rPr lang="ru-RU" sz="2200" dirty="0" smtClean="0"/>
-              <a:t>20)</a:t>
-            </a:r>
-            <a:endParaRPr lang="ru-RU" sz="2200" b="1" dirty="0" smtClean="0"/>
+              <a:t> 15 к позиции 20)</a:t>
+            </a:r>
+            <a:endParaRPr lang="ru-RU" sz="2200" b="1" dirty="0"/>
           </a:p>
         </p:txBody>
       </p:sp>
@@ -6794,42 +6753,15 @@
                 </a:solidFill>
                 <a:latin typeface="Menlo"/>
               </a:rPr>
-              <a:t>P₂ </a:t>
-            </a:r>
-            <a:r>
-              <a:rPr lang="en-US" dirty="0" smtClean="0">
-                <a:solidFill>
-                  <a:srgbClr val="404040"/>
-                </a:solidFill>
-                <a:latin typeface="Menlo"/>
-              </a:rPr>
-              <a:t>= </a:t>
-            </a:r>
-            <a:r>
-              <a:rPr lang="en-US" dirty="0">
-                <a:solidFill>
-                  <a:srgbClr val="404040"/>
-                </a:solidFill>
-                <a:latin typeface="Menlo"/>
-              </a:rPr>
-              <a:t>[x₆, ..., x₁₅</a:t>
-            </a:r>
-            <a:r>
-              <a:rPr lang="en-US" dirty="0" smtClean="0">
-                <a:solidFill>
-                  <a:srgbClr val="404040"/>
-                </a:solidFill>
-                <a:latin typeface="Menlo"/>
-              </a:rPr>
-              <a:t>]</a:t>
-            </a:r>
-          </a:p>
-          <a:p>
-            <a:r>
-              <a:rPr lang="ru-RU" dirty="0" smtClean="0"/>
+              <a:t>P₂ = [x₆, ..., x₁₅]</a:t>
+            </a:r>
+          </a:p>
+          <a:p>
+            <a:r>
+              <a:rPr lang="ru-RU" dirty="0"/>
               <a:t>...</a:t>
             </a:r>
-            <a:endParaRPr lang="en-US" dirty="0" smtClean="0"/>
+            <a:endParaRPr lang="en-US" dirty="0"/>
           </a:p>
           <a:p>
             <a:r>
@@ -7010,7 +6942,7 @@
           <a:p>
             <a:pPr eaLnBrk="1" hangingPunct="1"/>
             <a:r>
-              <a:rPr lang="en-US" altLang="ru-RU" dirty="0" err="1" smtClean="0">
+              <a:rPr lang="en-US" altLang="ru-RU" dirty="0" err="1">
                 <a:solidFill>
                   <a:srgbClr val="404040"/>
                 </a:solidFill>
@@ -7019,7 +6951,7 @@
               <a:t>e</a:t>
             </a:r>
             <a:r>
-              <a:rPr lang="en-US" altLang="ru-RU" baseline="-25000" dirty="0" err="1" smtClean="0">
+              <a:rPr lang="en-US" altLang="ru-RU" baseline="-25000" dirty="0" err="1">
                 <a:solidFill>
                   <a:srgbClr val="404040"/>
                 </a:solidFill>
@@ -7028,7 +6960,7 @@
               <a:t>i</a:t>
             </a:r>
             <a:r>
-              <a:rPr lang="ru-RU" altLang="ru-RU" dirty="0" smtClean="0">
+              <a:rPr lang="ru-RU" altLang="ru-RU" dirty="0">
                 <a:solidFill>
                   <a:srgbClr val="404040"/>
                 </a:solidFill>
@@ -7037,7 +6969,7 @@
               <a:t> </a:t>
             </a:r>
             <a:r>
-              <a:rPr lang="en-US" altLang="ru-RU" dirty="0" smtClean="0">
+              <a:rPr lang="en-US" altLang="ru-RU" dirty="0">
                 <a:solidFill>
                   <a:srgbClr val="404040"/>
                 </a:solidFill>
@@ -7046,7 +6978,7 @@
               <a:t>=</a:t>
             </a:r>
             <a:r>
-              <a:rPr lang="ru-RU" altLang="ru-RU" dirty="0" smtClean="0">
+              <a:rPr lang="ru-RU" altLang="ru-RU" dirty="0">
                 <a:solidFill>
                   <a:srgbClr val="404040"/>
                 </a:solidFill>
@@ -7055,7 +6987,7 @@
               <a:t> </a:t>
             </a:r>
             <a:r>
-              <a:rPr lang="en-US" altLang="ru-RU" dirty="0" err="1" smtClean="0">
+              <a:rPr lang="en-US" altLang="ru-RU" dirty="0" err="1">
                 <a:solidFill>
                   <a:srgbClr val="404040"/>
                 </a:solidFill>
@@ -7064,7 +6996,7 @@
               <a:t>W</a:t>
             </a:r>
             <a:r>
-              <a:rPr lang="en-US" altLang="ru-RU" baseline="30000" dirty="0" err="1" smtClean="0">
+              <a:rPr lang="en-US" altLang="ru-RU" baseline="30000" dirty="0" err="1">
                 <a:solidFill>
                   <a:srgbClr val="404040"/>
                 </a:solidFill>
@@ -7073,7 +7005,7 @@
               <a:t>p</a:t>
             </a:r>
             <a:r>
-              <a:rPr lang="en-US" altLang="ru-RU" dirty="0" smtClean="0">
+              <a:rPr lang="en-US" altLang="ru-RU" dirty="0">
                 <a:solidFill>
                   <a:srgbClr val="404040"/>
                 </a:solidFill>
@@ -7082,7 +7014,7 @@
               <a:t> P</a:t>
             </a:r>
             <a:r>
-              <a:rPr lang="en-US" altLang="ru-RU" baseline="-25000" dirty="0" smtClean="0">
+              <a:rPr lang="en-US" altLang="ru-RU" baseline="-25000" dirty="0">
                 <a:solidFill>
                   <a:srgbClr val="404040"/>
                 </a:solidFill>
@@ -7091,7 +7023,7 @@
               <a:t>i  </a:t>
             </a:r>
             <a:r>
-              <a:rPr lang="en-US" altLang="ru-RU" dirty="0" err="1" smtClean="0">
+              <a:rPr lang="en-US" altLang="ru-RU" dirty="0" err="1">
                 <a:solidFill>
                   <a:srgbClr val="404040"/>
                 </a:solidFill>
@@ -7100,7 +7032,7 @@
               <a:t>e</a:t>
             </a:r>
             <a:r>
-              <a:rPr lang="en-US" altLang="ru-RU" baseline="-25000" dirty="0" err="1" smtClean="0">
+              <a:rPr lang="en-US" altLang="ru-RU" baseline="-25000" dirty="0" err="1">
                 <a:solidFill>
                   <a:srgbClr val="404040"/>
                 </a:solidFill>
@@ -7109,7 +7041,7 @@
               <a:t>i</a:t>
             </a:r>
             <a:r>
-              <a:rPr lang="ru-RU" altLang="ru-RU" dirty="0" smtClean="0">
+              <a:rPr lang="ru-RU" altLang="ru-RU" dirty="0">
                 <a:solidFill>
                   <a:srgbClr val="404040"/>
                 </a:solidFill>
@@ -7118,7 +7050,7 @@
               <a:t>∈ ℝ</a:t>
             </a:r>
             <a:r>
-              <a:rPr lang="en-US" altLang="ru-RU" baseline="30000" dirty="0" smtClean="0">
+              <a:rPr lang="en-US" altLang="ru-RU" baseline="30000" dirty="0">
                 <a:solidFill>
                   <a:srgbClr val="404040"/>
                 </a:solidFill>
@@ -7127,7 +7059,7 @@
               <a:t>D</a:t>
             </a:r>
             <a:r>
-              <a:rPr lang="en-US" altLang="ru-RU" baseline="-25000" dirty="0" smtClean="0">
+              <a:rPr lang="en-US" altLang="ru-RU" baseline="-25000" dirty="0">
                 <a:solidFill>
                   <a:srgbClr val="404040"/>
                 </a:solidFill>
@@ -7331,7 +7263,7 @@
               <a:t> </a:t>
             </a:r>
             <a:r>
-              <a:rPr lang="en-US" altLang="ru-RU" sz="2000" dirty="0" smtClean="0">
+              <a:rPr lang="en-US" altLang="ru-RU" sz="2000" dirty="0">
                 <a:solidFill>
                   <a:srgbClr val="404040"/>
                 </a:solidFill>
@@ -7340,7 +7272,7 @@
               <a:t>=</a:t>
             </a:r>
             <a:r>
-              <a:rPr lang="ru-RU" altLang="ru-RU" sz="2000" dirty="0" smtClean="0">
+              <a:rPr lang="ru-RU" altLang="ru-RU" sz="2000" dirty="0">
                 <a:solidFill>
                   <a:srgbClr val="404040"/>
                 </a:solidFill>
@@ -7367,7 +7299,7 @@
               <a:t>i</a:t>
             </a:r>
             <a:r>
-              <a:rPr lang="en-US" altLang="ru-RU" sz="2000" baseline="-25000" dirty="0" smtClean="0">
+              <a:rPr lang="en-US" altLang="ru-RU" sz="2000" baseline="-25000" dirty="0">
                 <a:solidFill>
                   <a:srgbClr val="404040"/>
                 </a:solidFill>
@@ -7376,7 +7308,7 @@
               <a:t> </a:t>
             </a:r>
             <a:r>
-              <a:rPr lang="en-US" altLang="ru-RU" sz="2000" dirty="0" smtClean="0">
+              <a:rPr lang="en-US" altLang="ru-RU" sz="2000" dirty="0">
                 <a:solidFill>
                   <a:srgbClr val="404040"/>
                 </a:solidFill>
@@ -7385,7 +7317,7 @@
               <a:t>+PE </a:t>
             </a:r>
             <a:r>
-              <a:rPr lang="en-US" altLang="ru-RU" sz="2000" baseline="-25000" dirty="0" smtClean="0">
+              <a:rPr lang="en-US" altLang="ru-RU" sz="2000" baseline="-25000" dirty="0">
                 <a:solidFill>
                   <a:srgbClr val="404040"/>
                 </a:solidFill>
@@ -8103,7 +8035,7 @@
           <a:lstStyle/>
           <a:p>
             <a:r>
-              <a:rPr lang="en-US" altLang="ru-RU" dirty="0" smtClean="0">
+              <a:rPr lang="en-US" altLang="ru-RU" dirty="0">
                 <a:solidFill>
                   <a:srgbClr val="404040"/>
                 </a:solidFill>
@@ -8112,7 +8044,7 @@
               <a:t>PE</a:t>
             </a:r>
             <a:r>
-              <a:rPr lang="ru-RU" altLang="ru-RU" dirty="0" smtClean="0">
+              <a:rPr lang="ru-RU" altLang="ru-RU" dirty="0">
                 <a:solidFill>
                   <a:srgbClr val="404040"/>
                 </a:solidFill>
@@ -8127,7 +8059,7 @@
               <a:buChar char="•"/>
             </a:pPr>
             <a:r>
-              <a:rPr lang="ru-RU" altLang="ru-RU" dirty="0" smtClean="0">
+              <a:rPr lang="ru-RU" altLang="ru-RU" dirty="0">
                 <a:solidFill>
                   <a:srgbClr val="404040"/>
                 </a:solidFill>
@@ -8142,7 +8074,7 @@
               <a:buChar char="•"/>
             </a:pPr>
             <a:r>
-              <a:rPr lang="ru-RU" dirty="0" smtClean="0"/>
+              <a:rPr lang="ru-RU" dirty="0"/>
               <a:t>Обучаемый,</a:t>
             </a:r>
           </a:p>
@@ -8152,15 +8084,15 @@
               <a:buChar char="•"/>
             </a:pPr>
             <a:r>
-              <a:rPr lang="ru-RU" dirty="0" err="1" smtClean="0"/>
+              <a:rPr lang="ru-RU" dirty="0" err="1"/>
               <a:t>Эмбединг</a:t>
             </a:r>
             <a:r>
-              <a:rPr lang="ru-RU" dirty="0" smtClean="0"/>
+              <a:rPr lang="ru-RU" dirty="0"/>
               <a:t> </a:t>
             </a:r>
             <a:r>
-              <a:rPr lang="ru-RU" dirty="0" err="1" smtClean="0"/>
+              <a:rPr lang="ru-RU" dirty="0" err="1"/>
               <a:t>ковариатов</a:t>
             </a:r>
             <a:endParaRPr lang="ru-RU" dirty="0"/>
@@ -8370,7 +8302,7 @@
                   </m:oMath>
                 </a14:m>
                 <a:r>
-                  <a:rPr lang="en-US" dirty="0" smtClean="0"/>
+                  <a:rPr lang="en-US" dirty="0"/>
                   <a:t>, </a:t>
                 </a:r>
                 <a14:m>
@@ -8396,11 +8328,7 @@
                 </a:r>
                 <a:r>
                   <a:rPr lang="en-US" dirty="0"/>
-                  <a:t> or </a:t>
-                </a:r>
-                <a:r>
-                  <a:rPr lang="en-US" dirty="0" smtClean="0"/>
-                  <a:t>MAD</a:t>
+                  <a:t> or MAD</a:t>
                 </a:r>
                 <a14:m>
                   <m:oMath xmlns:m="http://schemas.openxmlformats.org/officeDocument/2006/math">
@@ -8425,7 +8353,7 @@
                   </m:oMath>
                 </a14:m>
                 <a:r>
-                  <a:rPr lang="en-US" dirty="0" smtClean="0"/>
+                  <a:rPr lang="en-US" dirty="0"/>
                   <a:t>=mean or median </a:t>
                 </a:r>
                 <a:endParaRPr lang="ru-RU" dirty="0"/>
@@ -8632,7 +8560,7 @@
           <a:p>
             <a:pPr eaLnBrk="1" hangingPunct="1"/>
             <a:r>
-              <a:rPr lang="ru-RU" altLang="ru-RU" dirty="0" smtClean="0">
+              <a:rPr lang="ru-RU" altLang="ru-RU" dirty="0">
                 <a:solidFill>
                   <a:srgbClr val="404040"/>
                 </a:solidFill>
@@ -8641,7 +8569,7 @@
               <a:t>В некоторых арх. </a:t>
             </a:r>
             <a:r>
-              <a:rPr lang="ru-RU" altLang="ru-RU" dirty="0" err="1" smtClean="0">
+              <a:rPr lang="ru-RU" altLang="ru-RU" dirty="0" err="1">
                 <a:solidFill>
                   <a:srgbClr val="404040"/>
                 </a:solidFill>
@@ -8650,7 +8578,7 @@
               <a:t>Патчей</a:t>
             </a:r>
             <a:r>
-              <a:rPr lang="ru-RU" altLang="ru-RU" dirty="0" smtClean="0">
+              <a:rPr lang="ru-RU" altLang="ru-RU" dirty="0">
                 <a:solidFill>
                   <a:srgbClr val="404040"/>
                 </a:solidFill>
@@ -8734,7 +8662,7 @@
               <a:t> x</a:t>
             </a:r>
             <a:r>
-              <a:rPr lang="en-US" altLang="ru-RU" baseline="-25000" dirty="0" smtClean="0">
+              <a:rPr lang="en-US" altLang="ru-RU" baseline="-25000" dirty="0">
                 <a:solidFill>
                   <a:srgbClr val="404040"/>
                 </a:solidFill>
@@ -8761,13 +8689,6 @@
   <p:clrMapOvr>
     <a:masterClrMapping/>
   </p:clrMapOvr>
-  <p:timing>
-    <p:tnLst>
-      <p:par>
-        <p:cTn id="1" dur="indefinite" restart="never" nodeType="tmRoot"/>
-      </p:par>
-    </p:tnLst>
-  </p:timing>
 </p:sld>
 </file>
 
@@ -8851,19 +8772,19 @@
           <a:p>
             <a:pPr algn="ctr"/>
             <a:r>
-              <a:rPr lang="ru-RU" b="1" dirty="0" smtClean="0"/>
+              <a:rPr lang="ru-RU" b="1" dirty="0"/>
               <a:t>Идеи архитектуры </a:t>
             </a:r>
             <a:r>
-              <a:rPr lang="ru-RU" b="1" dirty="0" err="1" smtClean="0"/>
+              <a:rPr lang="ru-RU" b="1" dirty="0" err="1"/>
               <a:t>Трансформер</a:t>
             </a:r>
             <a:r>
-              <a:rPr lang="ru-RU" b="1" dirty="0" smtClean="0"/>
+              <a:rPr lang="ru-RU" b="1" dirty="0"/>
               <a:t>. </a:t>
             </a:r>
             <a:r>
-              <a:rPr lang="en-US" b="1" dirty="0" smtClean="0"/>
+              <a:rPr lang="en-US" b="1" dirty="0"/>
               <a:t>Encoder</a:t>
             </a:r>
             <a:endParaRPr lang="ru-RU" b="1" dirty="0"/>
@@ -8896,162 +8817,162 @@
               <a:buNone/>
             </a:pPr>
             <a:r>
-              <a:rPr lang="ru-RU" sz="2200" b="1" dirty="0" smtClean="0"/>
+              <a:rPr lang="ru-RU" sz="2200" b="1" dirty="0"/>
               <a:t>Блок – </a:t>
             </a:r>
             <a:r>
-              <a:rPr lang="ru-RU" sz="2200" b="1" dirty="0" err="1" smtClean="0"/>
+              <a:rPr lang="ru-RU" sz="2200" b="1" dirty="0" err="1"/>
               <a:t>трансформер</a:t>
             </a:r>
             <a:r>
-              <a:rPr lang="ru-RU" sz="2200" dirty="0" smtClean="0"/>
+              <a:rPr lang="ru-RU" sz="2200" dirty="0"/>
               <a:t>:  </a:t>
             </a:r>
           </a:p>
           <a:p>
             <a:r>
-              <a:rPr lang="ru-RU" sz="2600" b="1" dirty="0" err="1" smtClean="0"/>
+              <a:rPr lang="ru-RU" sz="2600" b="1" dirty="0" err="1"/>
               <a:t>Самованимание</a:t>
             </a:r>
             <a:r>
-              <a:rPr lang="ru-RU" sz="2600" dirty="0" smtClean="0"/>
+              <a:rPr lang="ru-RU" sz="2600" dirty="0"/>
               <a:t> </a:t>
             </a:r>
             <a:r>
-              <a:rPr lang="en-US" sz="2600" dirty="0" smtClean="0"/>
+              <a:rPr lang="en-US" sz="2600" dirty="0"/>
               <a:t>MHSA</a:t>
             </a:r>
             <a:r>
-              <a:rPr lang="ru-RU" sz="2600" dirty="0" smtClean="0"/>
+              <a:rPr lang="ru-RU" sz="2600" dirty="0"/>
               <a:t>: Цель:</a:t>
             </a:r>
             <a:r>
-              <a:rPr lang="en-US" sz="2600" dirty="0" smtClean="0"/>
+              <a:rPr lang="en-US" sz="2600" dirty="0"/>
               <a:t> </a:t>
             </a:r>
-            <a:endParaRPr lang="ru-RU" sz="2600" dirty="0" smtClean="0"/>
+            <a:endParaRPr lang="ru-RU" sz="2600" dirty="0"/>
           </a:p>
           <a:p>
             <a:pPr lvl="1"/>
             <a:r>
-              <a:rPr lang="ru-RU" sz="1800" dirty="0" smtClean="0"/>
+              <a:rPr lang="ru-RU" sz="1800" dirty="0"/>
               <a:t>Выявить важные </a:t>
             </a:r>
             <a:r>
-              <a:rPr lang="ru-RU" sz="1800" dirty="0" err="1" smtClean="0"/>
+              <a:rPr lang="ru-RU" sz="1800" dirty="0" err="1"/>
               <a:t>патчи</a:t>
             </a:r>
             <a:r>
-              <a:rPr lang="ru-RU" sz="1800" dirty="0" smtClean="0"/>
+              <a:rPr lang="ru-RU" sz="1800" dirty="0"/>
               <a:t> каждой головы – локальные связи, </a:t>
             </a:r>
-            <a:endParaRPr lang="en-US" sz="1800" dirty="0" smtClean="0"/>
+            <a:endParaRPr lang="en-US" sz="1800" dirty="0"/>
           </a:p>
           <a:p>
             <a:pPr lvl="1"/>
             <a:r>
-              <a:rPr lang="ru-RU" sz="1800" dirty="0" smtClean="0"/>
+              <a:rPr lang="ru-RU" sz="1800" dirty="0"/>
               <a:t>Каждая голова – тип признака, напр. тренд, сезон, новизна и т.д.</a:t>
             </a:r>
           </a:p>
           <a:p>
             <a:pPr lvl="1"/>
             <a:r>
-              <a:rPr lang="ru-RU" sz="1800" dirty="0" smtClean="0"/>
+              <a:rPr lang="ru-RU" sz="1800" dirty="0"/>
               <a:t>Обмен информацией между </a:t>
             </a:r>
             <a:r>
-              <a:rPr lang="ru-RU" sz="1800" dirty="0" err="1" smtClean="0"/>
+              <a:rPr lang="ru-RU" sz="1800" dirty="0" err="1"/>
               <a:t>патчами</a:t>
             </a:r>
             <a:r>
-              <a:rPr lang="ru-RU" sz="1800" dirty="0" smtClean="0"/>
+              <a:rPr lang="ru-RU" sz="1800" dirty="0"/>
               <a:t> – глобальные связи.</a:t>
             </a:r>
           </a:p>
           <a:p>
             <a:r>
-              <a:rPr lang="ru-RU" sz="2600" b="1" dirty="0" smtClean="0"/>
+              <a:rPr lang="ru-RU" sz="2600" b="1" dirty="0"/>
               <a:t>Нормировка</a:t>
             </a:r>
             <a:r>
-              <a:rPr lang="en-US" sz="2600" dirty="0" smtClean="0"/>
+              <a:rPr lang="en-US" sz="2600" dirty="0"/>
               <a:t> (shift, scale)</a:t>
             </a:r>
             <a:r>
-              <a:rPr lang="ru-RU" sz="2600" dirty="0" smtClean="0"/>
+              <a:rPr lang="ru-RU" sz="2600" dirty="0"/>
               <a:t> + </a:t>
             </a:r>
             <a:r>
-              <a:rPr lang="en-US" sz="2600" dirty="0" smtClean="0"/>
+              <a:rPr lang="en-US" sz="2600" dirty="0"/>
               <a:t>Residual </a:t>
             </a:r>
             <a:r>
-              <a:rPr lang="ru-RU" sz="2600" dirty="0" smtClean="0"/>
+              <a:rPr lang="ru-RU" sz="2600" dirty="0"/>
               <a:t> </a:t>
             </a:r>
           </a:p>
           <a:p>
             <a:r>
-              <a:rPr lang="ru-RU" sz="2600" b="1" dirty="0" err="1" smtClean="0"/>
+              <a:rPr lang="ru-RU" sz="2600" b="1" dirty="0" err="1"/>
               <a:t>Полносвязная</a:t>
             </a:r>
             <a:r>
-              <a:rPr lang="ru-RU" sz="2600" dirty="0" smtClean="0"/>
+              <a:rPr lang="ru-RU" sz="2600" dirty="0"/>
               <a:t> сеть цель </a:t>
             </a:r>
             <a:r>
               <a:rPr lang="ru-RU" dirty="0"/>
               <a:t>обогащение контекста</a:t>
             </a:r>
-            <a:endParaRPr lang="ru-RU" sz="2600" dirty="0" smtClean="0"/>
+            <a:endParaRPr lang="ru-RU" sz="2600" dirty="0"/>
           </a:p>
           <a:p>
             <a:pPr lvl="1"/>
             <a:r>
-              <a:rPr lang="en-US" sz="2200" dirty="0" smtClean="0"/>
+              <a:rPr lang="en-US" sz="2200" dirty="0"/>
               <a:t>MLP - AE </a:t>
             </a:r>
             <a:r>
-              <a:rPr lang="ru-RU" sz="2200" dirty="0" smtClean="0"/>
+              <a:rPr lang="ru-RU" sz="2200" dirty="0"/>
               <a:t>по каждому </a:t>
             </a:r>
             <a:r>
-              <a:rPr lang="ru-RU" sz="2200" dirty="0" err="1" smtClean="0"/>
+              <a:rPr lang="ru-RU" sz="2200" dirty="0" err="1"/>
               <a:t>патчу</a:t>
             </a:r>
-            <a:endParaRPr lang="ru-RU" sz="2200" dirty="0" smtClean="0"/>
+            <a:endParaRPr lang="ru-RU" sz="2200" dirty="0"/>
           </a:p>
           <a:p>
             <a:pPr lvl="1"/>
             <a:r>
-              <a:rPr lang="ru-RU" sz="2200" dirty="0" err="1" smtClean="0"/>
+              <a:rPr lang="ru-RU" sz="2200" dirty="0" err="1"/>
               <a:t>денойзинг</a:t>
             </a:r>
             <a:r>
-              <a:rPr lang="ru-RU" sz="2200" dirty="0" smtClean="0"/>
+              <a:rPr lang="ru-RU" sz="2200" dirty="0"/>
               <a:t>, </a:t>
             </a:r>
           </a:p>
           <a:p>
             <a:pPr lvl="1"/>
             <a:r>
-              <a:rPr lang="ru-RU" sz="2200" dirty="0" smtClean="0"/>
+              <a:rPr lang="ru-RU" sz="2200" dirty="0"/>
               <a:t>концентрация на важной информации </a:t>
             </a:r>
             <a:r>
-              <a:rPr lang="en-US" sz="2200" dirty="0" smtClean="0"/>
+              <a:rPr lang="en-US" sz="2200" dirty="0"/>
               <a:t> </a:t>
             </a:r>
             <a:r>
-              <a:rPr lang="ru-RU" sz="2200" dirty="0" smtClean="0"/>
+              <a:rPr lang="ru-RU" sz="2200" dirty="0"/>
               <a:t> </a:t>
             </a:r>
           </a:p>
           <a:p>
             <a:pPr lvl="1"/>
             <a:r>
-              <a:rPr lang="ru-RU" sz="2200" dirty="0" smtClean="0"/>
+              <a:rPr lang="ru-RU" sz="2200" dirty="0"/>
               <a:t>Повышение нелинейностей – абстрактности признаков.</a:t>
             </a:r>
           </a:p>
@@ -9079,34 +9000,33 @@
           </a:p>
           <a:p>
             <a:r>
-              <a:rPr lang="ru-RU" sz="2600" dirty="0" smtClean="0"/>
+              <a:rPr lang="ru-RU" sz="2600" dirty="0"/>
               <a:t>Выход </a:t>
             </a:r>
             <a:r>
-              <a:rPr lang="ru-RU" sz="2600" dirty="0" err="1" smtClean="0"/>
+              <a:rPr lang="ru-RU" sz="2600" dirty="0" err="1"/>
               <a:t>энкодера</a:t>
             </a:r>
             <a:r>
-              <a:rPr lang="ru-RU" sz="2600" dirty="0" smtClean="0"/>
+              <a:rPr lang="ru-RU" sz="2600" dirty="0"/>
               <a:t> – скрытые состояния входного окна</a:t>
             </a:r>
-            <a:endParaRPr lang="en-US" sz="2600" dirty="0" smtClean="0"/>
+            <a:endParaRPr lang="en-US" sz="2600" dirty="0"/>
           </a:p>
           <a:p>
             <a:pPr lvl="1"/>
             <a:r>
-              <a:rPr lang="ru-RU" sz="2200" dirty="0" smtClean="0"/>
+              <a:rPr lang="ru-RU" sz="2200" dirty="0"/>
               <a:t>Каждый </a:t>
             </a:r>
             <a:r>
-              <a:rPr lang="en-US" sz="2200" dirty="0" smtClean="0"/>
+              <a:rPr lang="en-US" sz="2200" dirty="0"/>
               <a:t>path -</a:t>
             </a:r>
             <a:r>
-              <a:rPr lang="ru-RU" sz="2200" dirty="0" smtClean="0"/>
+              <a:rPr lang="ru-RU" sz="2200" dirty="0"/>
               <a:t> это некоторое представление. </a:t>
             </a:r>
-            <a:endParaRPr lang="ru-RU" sz="2200" dirty="0"/>
           </a:p>
         </p:txBody>
       </p:sp>
@@ -9345,7 +9265,7 @@
                     </m:oMath>
                   </m:oMathPara>
                 </a14:m>
-                <a:endParaRPr lang="en-US" dirty="0" smtClean="0"/>
+                <a:endParaRPr lang="en-US" dirty="0"/>
               </a:p>
               <a:p>
                 <a:pPr/>
@@ -9445,7 +9365,7 @@
                     </m:oMath>
                   </m:oMathPara>
                 </a14:m>
-                <a:endParaRPr lang="en-US" dirty="0" smtClean="0"/>
+                <a:endParaRPr lang="en-US" dirty="0"/>
               </a:p>
               <a:p>
                 <a:pPr/>
@@ -9599,7 +9519,7 @@
                     </m:oMath>
                   </m:oMathPara>
                 </a14:m>
-                <a:endParaRPr lang="en-US" i="1" dirty="0" smtClean="0">
+                <a:endParaRPr lang="en-US" i="1" dirty="0">
                   <a:latin typeface="Cambria Math" panose="02040503050406030204" pitchFamily="18" charset="0"/>
                 </a:endParaRPr>
               </a:p>
@@ -9652,7 +9572,7 @@
                   </m:oMath>
                 </a14:m>
                 <a:r>
-                  <a:rPr lang="en-US" dirty="0" smtClean="0"/>
+                  <a:rPr lang="en-US" dirty="0"/>
                   <a:t>, </a:t>
                 </a:r>
                 <a14:m>
@@ -9736,7 +9656,7 @@
                     </m:sSup>
                   </m:oMath>
                 </a14:m>
-                <a:endParaRPr lang="en-US" dirty="0" smtClean="0"/>
+                <a:endParaRPr lang="en-US" dirty="0"/>
               </a:p>
             </p:txBody>
           </p:sp>
@@ -10046,7 +9966,7 @@
                     </m:oMath>
                   </m:oMathPara>
                 </a14:m>
-                <a:endParaRPr lang="en-US" dirty="0" smtClean="0"/>
+                <a:endParaRPr lang="en-US" dirty="0"/>
               </a:p>
               <a:p>
                 <a:pPr/>
@@ -10573,13 +10493,6 @@
   <p:clrMapOvr>
     <a:masterClrMapping/>
   </p:clrMapOvr>
-  <p:timing>
-    <p:tnLst>
-      <p:par>
-        <p:cTn id="1" dur="indefinite" restart="never" nodeType="tmRoot"/>
-      </p:par>
-    </p:tnLst>
-  </p:timing>
 </p:sld>
 </file>
 
@@ -10624,15 +10537,15 @@
           <a:p>
             <a:pPr algn="ctr"/>
             <a:r>
-              <a:rPr lang="ru-RU" b="1" dirty="0" smtClean="0"/>
+              <a:rPr lang="ru-RU" b="1" dirty="0"/>
               <a:t>Идеи архитектуры </a:t>
             </a:r>
             <a:r>
-              <a:rPr lang="ru-RU" b="1" dirty="0" err="1" smtClean="0"/>
+              <a:rPr lang="ru-RU" b="1" dirty="0" err="1"/>
               <a:t>Трансформер</a:t>
             </a:r>
             <a:r>
-              <a:rPr lang="en-US" b="1" dirty="0" smtClean="0"/>
+              <a:rPr lang="en-US" b="1" dirty="0"/>
               <a:t>. Decoder</a:t>
             </a:r>
             <a:endParaRPr lang="ru-RU" b="1" dirty="0"/>
@@ -10774,7 +10687,7 @@
           <a:lstStyle/>
           <a:p>
             <a:r>
-              <a:rPr lang="en-US" sz="1000" b="1" dirty="0" smtClean="0">
+              <a:rPr lang="en-US" sz="1000" b="1" dirty="0">
                 <a:solidFill>
                   <a:srgbClr val="404040"/>
                 </a:solidFill>
@@ -10787,7 +10700,7 @@
               <a:t> mask </a:t>
             </a:r>
             <a:r>
-              <a:rPr lang="en-US" sz="1000" b="1" dirty="0" smtClean="0">
+              <a:rPr lang="en-US" sz="1000" b="1" dirty="0">
                 <a:solidFill>
                   <a:srgbClr val="404040"/>
                 </a:solidFill>
@@ -10821,7 +10734,7 @@
           <a:lstStyle/>
           <a:p>
             <a:r>
-              <a:rPr lang="en-US" sz="1000" b="1" dirty="0" smtClean="0">
+              <a:rPr lang="en-US" sz="1000" b="1" dirty="0">
                 <a:solidFill>
                   <a:srgbClr val="404040"/>
                 </a:solidFill>
@@ -11023,7 +10936,7 @@
               <a:buFont typeface="Arial" panose="020B0604020202020204" pitchFamily="34" charset="0"/>
               <a:buNone/>
             </a:pPr>
-            <a:endParaRPr lang="ru-RU" sz="2200" dirty="0" smtClean="0"/>
+            <a:endParaRPr lang="ru-RU" sz="2200" dirty="0"/>
           </a:p>
         </p:txBody>
       </p:sp>
@@ -11160,7 +11073,7 @@
               <a:t> генерируются </a:t>
             </a:r>
             <a:r>
-              <a:rPr lang="en-US" sz="2200" dirty="0" smtClean="0"/>
+              <a:rPr lang="en-US" sz="2200" dirty="0"/>
               <a:t>[&lt;mask&gt;</a:t>
             </a:r>
             <a:r>
@@ -11181,13 +11094,8 @@
             </a:r>
             <a:r>
               <a:rPr lang="ru-RU" sz="2200" dirty="0"/>
-              <a:t>И </a:t>
-            </a:r>
-            <a:r>
-              <a:rPr lang="ru-RU" sz="2200" dirty="0" smtClean="0"/>
-              <a:t>ТД</a:t>
-            </a:r>
-            <a:endParaRPr lang="ru-RU" sz="2200" dirty="0"/>
+              <a:t>И ТД</a:t>
+            </a:r>
           </a:p>
         </p:txBody>
       </p:sp>
@@ -11201,13 +11109,6 @@
   <p:clrMapOvr>
     <a:masterClrMapping/>
   </p:clrMapOvr>
-  <p:timing>
-    <p:tnLst>
-      <p:par>
-        <p:cTn id="1" dur="indefinite" restart="never" nodeType="tmRoot"/>
-      </p:par>
-    </p:tnLst>
-  </p:timing>
 </p:sld>
 </file>
 
@@ -11252,15 +11153,15 @@
           <a:p>
             <a:pPr algn="ctr"/>
             <a:r>
-              <a:rPr lang="ru-RU" b="1" dirty="0" smtClean="0"/>
+              <a:rPr lang="ru-RU" b="1" dirty="0"/>
               <a:t>Идеи архитектуры </a:t>
             </a:r>
             <a:r>
-              <a:rPr lang="ru-RU" b="1" dirty="0" err="1" smtClean="0"/>
+              <a:rPr lang="ru-RU" b="1" dirty="0" err="1"/>
               <a:t>Трансформер</a:t>
             </a:r>
             <a:r>
-              <a:rPr lang="en-US" b="1" dirty="0" smtClean="0"/>
+              <a:rPr lang="en-US" b="1" dirty="0"/>
               <a:t>. Decoder</a:t>
             </a:r>
             <a:endParaRPr lang="ru-RU" b="1" dirty="0"/>
@@ -11295,11 +11196,11 @@
                   <a:buNone/>
                 </a:pPr>
                 <a:r>
-                  <a:rPr lang="ru-RU" sz="2200" b="1" dirty="0" smtClean="0"/>
+                  <a:rPr lang="ru-RU" sz="2200" b="1" dirty="0"/>
                   <a:t>Блок декодера</a:t>
                 </a:r>
                 <a:r>
-                  <a:rPr lang="ru-RU" sz="2200" dirty="0" smtClean="0"/>
+                  <a:rPr lang="ru-RU" sz="2200" dirty="0"/>
                   <a:t>:</a:t>
                 </a:r>
               </a:p>
@@ -11308,33 +11209,29 @@
                   <a:buNone/>
                 </a:pPr>
                 <a:r>
-                  <a:rPr lang="ru-RU" sz="2200" b="1" dirty="0" smtClean="0"/>
+                  <a:rPr lang="ru-RU" sz="2200" b="1" dirty="0"/>
                   <a:t>Маскированное </a:t>
                 </a:r>
                 <a:r>
-                  <a:rPr lang="ru-RU" sz="2200" b="1" dirty="0" err="1" smtClean="0"/>
+                  <a:rPr lang="ru-RU" sz="2200" b="1" dirty="0" err="1"/>
                   <a:t>самовнимание</a:t>
                 </a:r>
                 <a:r>
-                  <a:rPr lang="en-US" sz="2200" b="1" dirty="0" smtClean="0"/>
+                  <a:rPr lang="en-US" sz="2200" b="1" dirty="0"/>
                   <a:t> (</a:t>
                 </a:r>
                 <a:r>
                   <a:rPr lang="en-US" dirty="0"/>
-                  <a:t>Causal Multi-Head </a:t>
+                  <a:t>Causal Multi-Head Attention)</a:t>
                 </a:r>
                 <a:r>
-                  <a:rPr lang="en-US" dirty="0" smtClean="0"/>
-                  <a:t>Attention)</a:t>
-                </a:r>
-                <a:r>
-                  <a:rPr lang="ru-RU" sz="2200" dirty="0" smtClean="0"/>
+                  <a:rPr lang="ru-RU" sz="2200" dirty="0"/>
                   <a:t>. Цель</a:t>
                 </a:r>
               </a:p>
               <a:p>
                 <a:r>
-                  <a:rPr lang="ru-RU" sz="2200" dirty="0" smtClean="0"/>
+                  <a:rPr lang="ru-RU" sz="2200" dirty="0"/>
                   <a:t>Маска закрывает будущие значения </a:t>
                 </a:r>
                 <a14:m>
@@ -11347,7 +11244,7 @@
                     </m:r>
                   </m:oMath>
                 </a14:m>
-                <a:endParaRPr lang="ru-RU" sz="2200" dirty="0" smtClean="0"/>
+                <a:endParaRPr lang="ru-RU" sz="2200" dirty="0"/>
               </a:p>
               <a:p>
                 <a:pPr marL="0" indent="0">
@@ -11457,7 +11354,7 @@
                   </m:oMath>
                 </a14:m>
                 <a:r>
-                  <a:rPr lang="en-US" sz="2200" dirty="0" smtClean="0"/>
+                  <a:rPr lang="en-US" sz="2200" dirty="0"/>
                   <a:t>  </a:t>
                 </a:r>
                 <a14:m>
@@ -11591,7 +11488,7 @@
               </a:p>
               <a:p>
                 <a:r>
-                  <a:rPr lang="ru-RU" sz="2200" dirty="0" smtClean="0"/>
+                  <a:rPr lang="ru-RU" sz="2200" dirty="0"/>
                   <a:t>внимание становится последовательным</a:t>
                 </a:r>
                 <a:endParaRPr lang="en-US" sz="2200" dirty="0"/>
@@ -11599,11 +11496,11 @@
               <a:p>
                 <a:pPr lvl="1"/>
                 <a:r>
-                  <a:rPr lang="ru-RU" sz="2200" dirty="0" err="1" smtClean="0"/>
+                  <a:rPr lang="ru-RU" sz="2200" dirty="0" err="1"/>
                   <a:t>Патчи</a:t>
                 </a:r>
                 <a:r>
-                  <a:rPr lang="ru-RU" sz="2200" dirty="0" smtClean="0"/>
+                  <a:rPr lang="ru-RU" sz="2200" dirty="0"/>
                   <a:t> смотрят только на свои прошлые значения</a:t>
                 </a:r>
               </a:p>
@@ -11623,51 +11520,51 @@
                   <a:rPr lang="en-US" sz="2200" dirty="0"/>
                   <a:t> </a:t>
                 </a:r>
-                <a:endParaRPr lang="ru-RU" sz="2200" dirty="0" smtClean="0"/>
+                <a:endParaRPr lang="ru-RU" sz="2200" dirty="0"/>
               </a:p>
               <a:p>
                 <a:r>
-                  <a:rPr lang="en-US" sz="2200" dirty="0" smtClean="0"/>
+                  <a:rPr lang="en-US" sz="2200" dirty="0"/>
                   <a:t>Q – </a:t>
                 </a:r>
                 <a:r>
-                  <a:rPr lang="ru-RU" sz="2200" dirty="0" smtClean="0"/>
+                  <a:rPr lang="ru-RU" sz="2200" dirty="0"/>
                   <a:t>из декодера, </a:t>
                 </a:r>
                 <a:r>
-                  <a:rPr lang="en-US" sz="2200" dirty="0" smtClean="0"/>
+                  <a:rPr lang="en-US" sz="2200" dirty="0"/>
                   <a:t>K,V</a:t>
                 </a:r>
                 <a:r>
-                  <a:rPr lang="ru-RU" sz="2200" dirty="0" smtClean="0"/>
+                  <a:rPr lang="ru-RU" sz="2200" dirty="0"/>
                   <a:t> из </a:t>
                 </a:r>
                 <a:r>
-                  <a:rPr lang="ru-RU" sz="2200" dirty="0" err="1" smtClean="0"/>
+                  <a:rPr lang="ru-RU" sz="2200" dirty="0" err="1"/>
                   <a:t>энкодера</a:t>
                 </a:r>
                 <a:r>
-                  <a:rPr lang="ru-RU" sz="2200" dirty="0" smtClean="0"/>
+                  <a:rPr lang="ru-RU" sz="2200" dirty="0"/>
                   <a:t> – учет взаимной информации.</a:t>
                 </a:r>
               </a:p>
               <a:p>
                 <a:r>
-                  <a:rPr lang="ru-RU" sz="2200" dirty="0" smtClean="0"/>
+                  <a:rPr lang="ru-RU" sz="2200" dirty="0"/>
                   <a:t>Каждый шаг – предсказание скрытого состояния </a:t>
                 </a:r>
                 <a:r>
-                  <a:rPr lang="ru-RU" sz="2200" dirty="0" err="1" smtClean="0"/>
+                  <a:rPr lang="ru-RU" sz="2200" dirty="0" err="1"/>
                   <a:t>патча</a:t>
                 </a:r>
                 <a:r>
-                  <a:rPr lang="ru-RU" sz="2200" dirty="0" smtClean="0"/>
+                  <a:rPr lang="ru-RU" sz="2200" dirty="0"/>
                   <a:t> в слоях декодера</a:t>
                 </a:r>
               </a:p>
               <a:p>
                 <a:r>
-                  <a:rPr lang="ru-RU" sz="2200" dirty="0" smtClean="0"/>
+                  <a:rPr lang="ru-RU" sz="2200" dirty="0"/>
                   <a:t>На выходе декодирование </a:t>
                 </a:r>
                 <a14:m>
@@ -11764,50 +11661,42 @@
               </a:p>
               <a:p>
                 <a:r>
-                  <a:rPr lang="ru-RU" sz="2200" dirty="0" err="1" smtClean="0"/>
+                  <a:rPr lang="ru-RU" sz="2200" dirty="0" err="1"/>
                   <a:t>autoregressive</a:t>
                 </a:r>
                 <a:r>
-                  <a:rPr lang="ru-RU" sz="2200" dirty="0" smtClean="0"/>
+                  <a:rPr lang="ru-RU" sz="2200" dirty="0"/>
+                  <a:t> генерация (по одному</a:t>
+                </a:r>
+                <a:r>
+                  <a:rPr lang="en-US" sz="2200" dirty="0"/>
                   <a:t> </a:t>
                 </a:r>
                 <a:r>
-                  <a:rPr lang="ru-RU" sz="2200" dirty="0"/>
-                  <a:t>генерация (по </a:t>
-                </a:r>
-                <a:r>
-                  <a:rPr lang="ru-RU" sz="2200" dirty="0" smtClean="0"/>
-                  <a:t>одному</a:t>
-                </a:r>
-                <a:r>
-                  <a:rPr lang="en-US" sz="2200" dirty="0" smtClean="0"/>
-                  <a:t> </a:t>
-                </a:r>
-                <a:r>
-                  <a:rPr lang="ru-RU" sz="2200" dirty="0" err="1" smtClean="0"/>
+                  <a:rPr lang="ru-RU" sz="2200" dirty="0" err="1"/>
                   <a:t>патчу</a:t>
                 </a:r>
                 <a:r>
-                  <a:rPr lang="ru-RU" sz="2200" dirty="0" smtClean="0"/>
+                  <a:rPr lang="ru-RU" sz="2200" dirty="0"/>
                   <a:t> за шаг)</a:t>
                 </a:r>
                 <a:endParaRPr lang="ru-RU" sz="2200" b="1" dirty="0"/>
               </a:p>
               <a:p>
-                <a:endParaRPr lang="ru-RU" sz="2200" dirty="0" smtClean="0"/>
+                <a:endParaRPr lang="ru-RU" sz="2200" dirty="0"/>
               </a:p>
               <a:p>
                 <a:pPr marL="0" indent="0">
                   <a:buNone/>
                 </a:pPr>
-                <a:endParaRPr lang="en-US" sz="2200" dirty="0" smtClean="0"/>
+                <a:endParaRPr lang="en-US" sz="2200" dirty="0"/>
               </a:p>
               <a:p>
                 <a:pPr marL="0" indent="0">
                   <a:buNone/>
                 </a:pPr>
                 <a:r>
-                  <a:rPr lang="en-US" sz="2200" dirty="0" smtClean="0"/>
+                  <a:rPr lang="en-US" sz="2200" dirty="0"/>
                   <a:t> </a:t>
                 </a:r>
                 <a:endParaRPr lang="ru-RU" sz="2200" dirty="0"/>
@@ -11988,7 +11877,7 @@
           <a:lstStyle/>
           <a:p>
             <a:r>
-              <a:rPr lang="en-US" sz="1000" b="1" dirty="0" smtClean="0">
+              <a:rPr lang="en-US" sz="1000" b="1" dirty="0">
                 <a:solidFill>
                   <a:srgbClr val="404040"/>
                 </a:solidFill>
@@ -12022,7 +11911,7 @@
           <a:lstStyle/>
           <a:p>
             <a:r>
-              <a:rPr lang="en-US" sz="1000" b="1" dirty="0" smtClean="0">
+              <a:rPr lang="en-US" sz="1000" b="1" dirty="0">
                 <a:solidFill>
                   <a:srgbClr val="404040"/>
                 </a:solidFill>
@@ -12044,13 +11933,6 @@
   <p:clrMapOvr>
     <a:masterClrMapping/>
   </p:clrMapOvr>
-  <p:timing>
-    <p:tnLst>
-      <p:par>
-        <p:cTn id="1" dur="indefinite" restart="never" nodeType="tmRoot"/>
-      </p:par>
-    </p:tnLst>
-  </p:timing>
 </p:sld>
 </file>
 
@@ -12100,18 +11982,17 @@
           <a:lstStyle/>
           <a:p>
             <a:r>
-              <a:rPr lang="ru-RU" dirty="0" smtClean="0"/>
+              <a:rPr lang="ru-RU" dirty="0"/>
               <a:t>Архитектуры </a:t>
             </a:r>
             <a:r>
-              <a:rPr lang="ru-RU" dirty="0" err="1" smtClean="0"/>
+              <a:rPr lang="ru-RU" dirty="0" err="1"/>
               <a:t>Энкодер</a:t>
             </a:r>
             <a:r>
-              <a:rPr lang="ru-RU" dirty="0" smtClean="0"/>
+              <a:rPr lang="ru-RU" dirty="0"/>
               <a:t>-Декодер</a:t>
             </a:r>
-            <a:endParaRPr lang="ru-RU" dirty="0"/>
           </a:p>
         </p:txBody>
       </p:sp>
@@ -12147,38 +12028,38 @@
               <a:buNone/>
             </a:pPr>
             <a:r>
-              <a:rPr lang="ru-RU" sz="2200" dirty="0" smtClean="0"/>
+              <a:rPr lang="ru-RU" sz="2200" dirty="0"/>
               <a:t> </a:t>
             </a:r>
             <a:r>
-              <a:rPr lang="ru-RU" sz="2200" b="1" dirty="0" err="1" smtClean="0"/>
+              <a:rPr lang="ru-RU" sz="2200" b="1" dirty="0" err="1"/>
               <a:t>Энкодер</a:t>
             </a:r>
             <a:r>
-              <a:rPr lang="ru-RU" sz="2200" dirty="0" smtClean="0"/>
+              <a:rPr lang="ru-RU" sz="2200" dirty="0"/>
               <a:t> – анализ входной последовательности (пересечение </a:t>
             </a:r>
             <a:r>
-              <a:rPr lang="ru-RU" sz="2200" dirty="0" err="1" smtClean="0"/>
+              <a:rPr lang="ru-RU" sz="2200" dirty="0" err="1"/>
               <a:t>пачтей</a:t>
             </a:r>
             <a:r>
-              <a:rPr lang="ru-RU" sz="2200" dirty="0" smtClean="0"/>
+              <a:rPr lang="ru-RU" sz="2200" dirty="0"/>
               <a:t>, на выходе скрытое состояние для всех </a:t>
             </a:r>
             <a:r>
-              <a:rPr lang="ru-RU" sz="2200" dirty="0" err="1" smtClean="0"/>
+              <a:rPr lang="ru-RU" sz="2200" dirty="0" err="1"/>
               <a:t>патчей</a:t>
             </a:r>
             <a:r>
-              <a:rPr lang="ru-RU" sz="2200" dirty="0" smtClean="0"/>
+              <a:rPr lang="ru-RU" sz="2200" dirty="0"/>
               <a:t>) . </a:t>
             </a:r>
           </a:p>
           <a:p>
             <a:pPr lvl="1"/>
             <a:r>
-              <a:rPr lang="ru-RU" sz="2200" dirty="0" smtClean="0"/>
+              <a:rPr lang="ru-RU" sz="2200" dirty="0"/>
               <a:t>Цель скрытого состояния – выделение признаков</a:t>
             </a:r>
           </a:p>
@@ -12187,46 +12068,46 @@
               <a:buNone/>
             </a:pPr>
             <a:r>
-              <a:rPr lang="ru-RU" sz="2200" b="1" dirty="0" smtClean="0"/>
+              <a:rPr lang="ru-RU" sz="2200" b="1" dirty="0"/>
               <a:t>Декодер</a:t>
             </a:r>
             <a:r>
-              <a:rPr lang="ru-RU" sz="2200" dirty="0" smtClean="0"/>
+              <a:rPr lang="ru-RU" sz="2200" dirty="0"/>
               <a:t> – </a:t>
             </a:r>
             <a:r>
-              <a:rPr lang="ru-RU" sz="2200" dirty="0" err="1" smtClean="0"/>
+              <a:rPr lang="ru-RU" sz="2200" dirty="0" err="1"/>
               <a:t>авторегрессионное</a:t>
             </a:r>
             <a:r>
-              <a:rPr lang="ru-RU" sz="2200" dirty="0" smtClean="0"/>
+              <a:rPr lang="ru-RU" sz="2200" dirty="0"/>
               <a:t> предсказание значений на основе входных данных и скрытого состояния, полученного из </a:t>
             </a:r>
             <a:r>
-              <a:rPr lang="ru-RU" sz="2200" dirty="0" err="1" smtClean="0"/>
+              <a:rPr lang="ru-RU" sz="2200" dirty="0" err="1"/>
               <a:t>энкодера</a:t>
             </a:r>
             <a:r>
-              <a:rPr lang="ru-RU" sz="2200" dirty="0" smtClean="0"/>
+              <a:rPr lang="ru-RU" sz="2200" dirty="0"/>
               <a:t>.</a:t>
             </a:r>
           </a:p>
           <a:p>
             <a:pPr lvl="1"/>
             <a:r>
-              <a:rPr lang="ru-RU" sz="2200" dirty="0" smtClean="0"/>
+              <a:rPr lang="ru-RU" sz="2200" dirty="0"/>
               <a:t>Цель декодера предсказания следующего </a:t>
             </a:r>
             <a:r>
-              <a:rPr lang="ru-RU" sz="2200" dirty="0" err="1" smtClean="0"/>
+              <a:rPr lang="ru-RU" sz="2200" dirty="0" err="1"/>
               <a:t>патча</a:t>
             </a:r>
             <a:r>
-              <a:rPr lang="en-US" sz="2200" dirty="0" smtClean="0"/>
+              <a:rPr lang="en-US" sz="2200" dirty="0"/>
               <a:t> </a:t>
             </a:r>
             <a:r>
-              <a:rPr lang="ru-RU" sz="2200" dirty="0" smtClean="0"/>
+              <a:rPr lang="ru-RU" sz="2200" dirty="0"/>
               <a:t>на основе предыстории и запроса.</a:t>
             </a:r>
           </a:p>
@@ -12235,7 +12116,7 @@
               <a:buNone/>
             </a:pPr>
             <a:r>
-              <a:rPr lang="ru-RU" sz="2200" b="1" dirty="0" smtClean="0"/>
+              <a:rPr lang="ru-RU" sz="2200" b="1" dirty="0"/>
               <a:t>Однако </a:t>
             </a:r>
             <a:r>
@@ -12243,18 +12124,18 @@
               <a:t>Архитектуры </a:t>
             </a:r>
             <a:r>
-              <a:rPr lang="ru-RU" sz="2200" dirty="0" err="1" smtClean="0"/>
+              <a:rPr lang="ru-RU" sz="2200" dirty="0" err="1"/>
               <a:t>энкодер</a:t>
             </a:r>
             <a:r>
-              <a:rPr lang="ru-RU" sz="2200" dirty="0" smtClean="0"/>
+              <a:rPr lang="ru-RU" sz="2200" dirty="0"/>
               <a:t>-декодер:</a:t>
             </a:r>
-            <a:endParaRPr lang="ru-RU" sz="2200" b="1" dirty="0" smtClean="0"/>
-          </a:p>
-          <a:p>
-            <a:r>
-              <a:rPr lang="ru-RU" sz="2200" dirty="0" smtClean="0"/>
+            <a:endParaRPr lang="ru-RU" sz="2200" b="1" dirty="0"/>
+          </a:p>
+          <a:p>
+            <a:r>
+              <a:rPr lang="ru-RU" sz="2200" dirty="0"/>
               <a:t>Архитектуры объемы.</a:t>
             </a:r>
           </a:p>
@@ -12266,15 +12147,7 @@
             </a:r>
             <a:r>
               <a:rPr lang="ru-RU" sz="2000" dirty="0"/>
-              <a:t>-декодер</a:t>
-            </a:r>
-            <a:r>
-              <a:rPr lang="ru-RU" sz="2000" dirty="0" smtClean="0"/>
-              <a:t> </a:t>
-            </a:r>
-            <a:r>
-              <a:rPr lang="ru-RU" sz="2000" dirty="0"/>
-              <a:t>имеет </a:t>
+              <a:t>-декодер имеет </a:t>
             </a:r>
             <a:r>
               <a:rPr lang="en-US" sz="2000" dirty="0"/>
@@ -12282,21 +12155,16 @@
             </a:r>
             <a:r>
               <a:rPr lang="ru-RU" sz="2000" dirty="0"/>
-              <a:t>раза больше </a:t>
-            </a:r>
-            <a:r>
-              <a:rPr lang="ru-RU" sz="2000" dirty="0" smtClean="0"/>
-              <a:t>параметров чем </a:t>
-            </a:r>
-            <a:r>
-              <a:rPr lang="ru-RU" sz="2000" dirty="0" err="1" smtClean="0"/>
+              <a:t>раза больше параметров чем </a:t>
+            </a:r>
+            <a:r>
+              <a:rPr lang="ru-RU" sz="2000" dirty="0" err="1"/>
               <a:t>энкодер</a:t>
             </a:r>
             <a:r>
-              <a:rPr lang="ru-RU" sz="2000" dirty="0" smtClean="0"/>
+              <a:rPr lang="ru-RU" sz="2000" dirty="0"/>
               <a:t> </a:t>
             </a:r>
-            <a:endParaRPr lang="ru-RU" sz="2000" dirty="0"/>
           </a:p>
           <a:p>
             <a:pPr lvl="1"/>
@@ -12328,24 +12196,19 @@
               <a:rPr lang="ru-RU" sz="2000" dirty="0"/>
               <a:t> доступны варианты </a:t>
             </a:r>
-            <a:endParaRPr lang="ru-RU" sz="2000" dirty="0" smtClean="0"/>
-          </a:p>
-          <a:p>
-            <a:r>
-              <a:rPr lang="en-US" sz="2200" dirty="0" smtClean="0"/>
+          </a:p>
+          <a:p>
+            <a:r>
+              <a:rPr lang="en-US" sz="2200" dirty="0"/>
               <a:t>Exposure bias</a:t>
             </a:r>
-            <a:endParaRPr lang="ru-RU" sz="2200" dirty="0" smtClean="0"/>
+            <a:endParaRPr lang="ru-RU" sz="2200" dirty="0"/>
           </a:p>
           <a:p>
             <a:pPr lvl="1"/>
             <a:r>
-              <a:rPr lang="ru-RU" sz="1800" dirty="0" smtClean="0"/>
-              <a:t>На </a:t>
-            </a:r>
-            <a:r>
               <a:rPr lang="ru-RU" sz="1800" dirty="0"/>
-              <a:t>обучении — </a:t>
+              <a:t>На обучении — </a:t>
             </a:r>
             <a:r>
               <a:rPr lang="en-US" sz="1800" dirty="0"/>
@@ -12369,30 +12232,26 @@
             </a:r>
             <a:r>
               <a:rPr lang="ru-RU" sz="1800" dirty="0"/>
-              <a:t>разница в </a:t>
-            </a:r>
-            <a:r>
-              <a:rPr lang="ru-RU" sz="1800" dirty="0" smtClean="0"/>
-              <a:t>динамике</a:t>
-            </a:r>
-          </a:p>
-          <a:p>
-            <a:r>
-              <a:rPr lang="ru-RU" sz="2200" dirty="0" smtClean="0"/>
+              <a:t>разница в динамике</a:t>
+            </a:r>
+          </a:p>
+          <a:p>
+            <a:r>
+              <a:rPr lang="ru-RU" sz="2200" dirty="0"/>
               <a:t>Сложность масштабирования</a:t>
             </a:r>
           </a:p>
           <a:p>
             <a:pPr lvl="1"/>
             <a:r>
-              <a:rPr lang="ru-RU" sz="1800" dirty="0" smtClean="0"/>
+              <a:rPr lang="ru-RU" sz="1800" dirty="0"/>
               <a:t>Требует длинной предыстории для каждого </a:t>
             </a:r>
             <a:r>
-              <a:rPr lang="ru-RU" sz="1800" dirty="0" err="1" smtClean="0"/>
+              <a:rPr lang="ru-RU" sz="1800" dirty="0" err="1"/>
               <a:t>патча</a:t>
             </a:r>
-            <a:endParaRPr lang="ru-RU" sz="1800" dirty="0" smtClean="0"/>
+            <a:endParaRPr lang="ru-RU" sz="1800" dirty="0"/>
           </a:p>
         </p:txBody>
       </p:sp>
@@ -12445,13 +12304,6 @@
   <p:clrMapOvr>
     <a:masterClrMapping/>
   </p:clrMapOvr>
-  <p:timing>
-    <p:tnLst>
-      <p:par>
-        <p:cTn id="1" dur="indefinite" restart="never" nodeType="tmRoot"/>
-      </p:par>
-    </p:tnLst>
-  </p:timing>
 </p:sld>
 </file>
 
@@ -12495,10 +12347,9 @@
           <a:lstStyle/>
           <a:p>
             <a:r>
-              <a:rPr lang="ru-RU" dirty="0" smtClean="0"/>
+              <a:rPr lang="ru-RU" dirty="0"/>
               <a:t>Использование сокращенных трансформеров</a:t>
             </a:r>
-            <a:endParaRPr lang="ru-RU" dirty="0"/>
           </a:p>
         </p:txBody>
       </p:sp>
@@ -12534,10 +12385,10 @@
               <a:buNone/>
             </a:pPr>
             <a:r>
-              <a:rPr lang="en-US" sz="4600" b="1" dirty="0" smtClean="0"/>
+              <a:rPr lang="en-US" sz="4600" b="1" dirty="0"/>
               <a:t>Encoder-only transformers</a:t>
             </a:r>
-            <a:endParaRPr lang="ru-RU" sz="4600" b="1" dirty="0" smtClean="0"/>
+            <a:endParaRPr lang="ru-RU" sz="4600" b="1" dirty="0"/>
           </a:p>
           <a:p>
             <a:pPr>
@@ -12549,26 +12400,17 @@
               </a:spcBef>
             </a:pPr>
             <a:r>
-              <a:rPr lang="ru-RU" sz="4600" dirty="0" smtClean="0"/>
+              <a:rPr lang="ru-RU" sz="4600" dirty="0"/>
               <a:t>Возможен </a:t>
             </a:r>
             <a:r>
-              <a:rPr lang="en-US" sz="4600" dirty="0" smtClean="0"/>
-              <a:t>non-</a:t>
-            </a:r>
-            <a:r>
               <a:rPr lang="en-US" sz="4600" dirty="0"/>
-              <a:t> autoregressive</a:t>
-            </a:r>
-            <a:r>
-              <a:rPr lang="en-US" sz="4600" dirty="0" smtClean="0"/>
-              <a:t> forecasting (</a:t>
-            </a:r>
-            <a:r>
-              <a:rPr lang="ru-RU" sz="4600" dirty="0" smtClean="0"/>
+              <a:t>non- autoregressive forecasting (</a:t>
+            </a:r>
+            <a:r>
+              <a:rPr lang="ru-RU" sz="4600" dirty="0"/>
               <a:t>скорость)</a:t>
             </a:r>
-            <a:endParaRPr lang="ru-RU" sz="4600" dirty="0"/>
           </a:p>
           <a:p>
             <a:pPr>
@@ -12580,34 +12422,30 @@
               </a:spcBef>
             </a:pPr>
             <a:r>
-              <a:rPr lang="ru-RU" sz="4600" dirty="0" smtClean="0"/>
+              <a:rPr lang="ru-RU" sz="4600" dirty="0"/>
               <a:t>Доступно упрощенное внимание: </a:t>
             </a:r>
-            <a:r>
-              <a:rPr lang="en-US" sz="4600" dirty="0" smtClean="0"/>
-              <a:t/>
-            </a:r>
             <a:br>
-              <a:rPr lang="en-US" sz="4600" dirty="0" smtClean="0"/>
+              <a:rPr lang="en-US" sz="4600" dirty="0"/>
             </a:br>
             <a:r>
-              <a:rPr lang="en-US" sz="4600" dirty="0" smtClean="0"/>
+              <a:rPr lang="en-US" sz="4600" dirty="0"/>
               <a:t>linear </a:t>
             </a:r>
             <a:r>
-              <a:rPr lang="en-US" sz="4600" dirty="0" err="1" smtClean="0"/>
+              <a:rPr lang="en-US" sz="4600" dirty="0" err="1"/>
               <a:t>att</a:t>
             </a:r>
             <a:r>
-              <a:rPr lang="en-US" sz="4600" dirty="0" smtClean="0"/>
+              <a:rPr lang="en-US" sz="4600" dirty="0"/>
               <a:t>, sparse </a:t>
             </a:r>
             <a:r>
-              <a:rPr lang="en-US" sz="4600" dirty="0" err="1" smtClean="0"/>
+              <a:rPr lang="en-US" sz="4600" dirty="0" err="1"/>
               <a:t>att</a:t>
             </a:r>
             <a:r>
-              <a:rPr lang="en-US" sz="4600" dirty="0" smtClean="0"/>
+              <a:rPr lang="en-US" sz="4600" dirty="0"/>
               <a:t>,</a:t>
             </a:r>
           </a:p>
@@ -12642,11 +12480,7 @@
             </a:r>
             <a:r>
               <a:rPr lang="ru-RU" sz="4600" dirty="0"/>
-              <a:t>, учим их восстанавливать</a:t>
-            </a:r>
-            <a:r>
-              <a:rPr lang="ru-RU" sz="4600" dirty="0" smtClean="0"/>
-              <a:t>)</a:t>
+              <a:t>, учим их восстанавливать)</a:t>
             </a:r>
           </a:p>
           <a:p>
@@ -12659,10 +12493,10 @@
               </a:spcBef>
             </a:pPr>
             <a:r>
-              <a:rPr lang="ru-RU" sz="4600" dirty="0" smtClean="0"/>
+              <a:rPr lang="ru-RU" sz="4600" dirty="0"/>
               <a:t>Анализ глубокой предыстории ВР</a:t>
             </a:r>
-            <a:endParaRPr lang="en-US" sz="4600" dirty="0" smtClean="0"/>
+            <a:endParaRPr lang="en-US" sz="4600" dirty="0"/>
           </a:p>
           <a:p>
             <a:pPr marL="0" indent="0">
@@ -12674,12 +12508,8 @@
               </a:spcBef>
               <a:buNone/>
             </a:pPr>
-            <a:r>
-              <a:rPr lang="en-US" sz="2200" dirty="0" smtClean="0"/>
-              <a:t/>
-            </a:r>
             <a:br>
-              <a:rPr lang="en-US" sz="2200" dirty="0" smtClean="0"/>
+              <a:rPr lang="en-US" sz="2200" dirty="0"/>
             </a:br>
             <a:endParaRPr lang="ru-RU" sz="2200" dirty="0"/>
           </a:p>
@@ -12975,18 +12805,13 @@
               </a:spcBef>
               <a:buNone/>
             </a:pPr>
-            <a:r>
-              <a:rPr lang="en-US" sz="2200" dirty="0" smtClean="0"/>
-              <a:t/>
-            </a:r>
             <a:br>
-              <a:rPr lang="en-US" sz="2200" dirty="0" smtClean="0"/>
+              <a:rPr lang="en-US" sz="2200" dirty="0"/>
             </a:br>
             <a:r>
-              <a:rPr lang="ru-RU" sz="2200" dirty="0" smtClean="0"/>
+              <a:rPr lang="ru-RU" sz="2200" dirty="0"/>
               <a:t> </a:t>
             </a:r>
-            <a:endParaRPr lang="ru-RU" sz="2200" dirty="0"/>
           </a:p>
         </p:txBody>
       </p:sp>
@@ -13116,13 +12941,6 @@
   <p:clrMapOvr>
     <a:masterClrMapping/>
   </p:clrMapOvr>
-  <p:timing>
-    <p:tnLst>
-      <p:par>
-        <p:cTn id="1" dur="indefinite" restart="never" nodeType="tmRoot"/>
-      </p:par>
-    </p:tnLst>
-  </p:timing>
 </p:sld>
 </file>
 
@@ -13684,13 +13502,6 @@
   <p:clrMapOvr>
     <a:masterClrMapping/>
   </p:clrMapOvr>
-  <p:timing>
-    <p:tnLst>
-      <p:par>
-        <p:cTn id="1" dur="indefinite" restart="never" nodeType="tmRoot"/>
-      </p:par>
-    </p:tnLst>
-  </p:timing>
 </p:sld>
 </file>
 
@@ -13732,11 +13543,11 @@
           <a:lstStyle/>
           <a:p>
             <a:r>
-              <a:rPr lang="ru-RU" dirty="0" smtClean="0"/>
+              <a:rPr lang="ru-RU" dirty="0"/>
               <a:t>Некоторые модели </a:t>
             </a:r>
             <a:r>
-              <a:rPr lang="ru-RU" dirty="0" err="1" smtClean="0"/>
+              <a:rPr lang="ru-RU" dirty="0" err="1"/>
               <a:t>трансформеры</a:t>
             </a:r>
             <a:endParaRPr lang="ru-RU" dirty="0"/>
@@ -13842,10 +13653,9 @@
                     <a:lstStyle/>
                     <a:p>
                       <a:r>
-                        <a:rPr lang="ru-RU" sz="2000" dirty="0" smtClean="0"/>
+                        <a:rPr lang="ru-RU" sz="2000" dirty="0"/>
                         <a:t>сложность</a:t>
                       </a:r>
-                      <a:endParaRPr lang="ru-RU" sz="2000" dirty="0"/>
                     </a:p>
                   </a:txBody>
                   <a:tcPr marL="39201" marR="39201" marT="19601" marB="19601" anchor="ctr"/>
@@ -13916,10 +13726,9 @@
                     <a:lstStyle/>
                     <a:p>
                       <a:r>
-                        <a:rPr lang="en-US" sz="2000" dirty="0" smtClean="0"/>
+                        <a:rPr lang="en-US" sz="2000" dirty="0"/>
                         <a:t>Encoder-decoder</a:t>
                       </a:r>
-                      <a:endParaRPr lang="en-US" sz="2000" dirty="0"/>
                     </a:p>
                   </a:txBody>
                   <a:tcPr marL="23521" marR="23521" marT="11760" marB="11760" anchor="ctr"/>
@@ -13961,11 +13770,11 @@
                     <a:lstStyle/>
                     <a:p>
                       <a:r>
-                        <a:rPr lang="en-US" sz="2000" dirty="0" smtClean="0"/>
+                        <a:rPr lang="en-US" sz="2000" dirty="0"/>
                         <a:t>Base</a:t>
                       </a:r>
                       <a:r>
-                        <a:rPr lang="en-US" sz="2000" baseline="0" dirty="0" smtClean="0"/>
+                        <a:rPr lang="en-US" sz="2000" baseline="0" dirty="0"/>
                         <a:t> line</a:t>
                       </a:r>
                       <a:endParaRPr lang="ru-RU" sz="2000" dirty="0"/>
@@ -13999,10 +13808,9 @@
                     <a:lstStyle/>
                     <a:p>
                       <a:r>
-                        <a:rPr lang="en-US" sz="2000" b="1" dirty="0" smtClean="0"/>
+                        <a:rPr lang="en-US" sz="2000" b="1" dirty="0"/>
                         <a:t>TFT</a:t>
                       </a:r>
-                      <a:endParaRPr lang="en-US" sz="2000" b="1" dirty="0"/>
                     </a:p>
                   </a:txBody>
                   <a:tcPr marL="23521" marR="23521" marT="11760" marB="11760" anchor="ctr"/>
@@ -14030,7 +13838,7 @@
                         <a:defRPr/>
                       </a:pPr>
                       <a:r>
-                        <a:rPr lang="en-US" sz="2000" dirty="0" smtClean="0"/>
+                        <a:rPr lang="en-US" sz="2000" dirty="0"/>
                         <a:t>Encoder-decoder</a:t>
                       </a:r>
                     </a:p>
@@ -14060,7 +13868,7 @@
                         <a:defRPr/>
                       </a:pPr>
                       <a:r>
-                        <a:rPr lang="en-US" sz="2000" dirty="0" smtClean="0"/>
+                        <a:rPr lang="en-US" sz="2000" dirty="0"/>
                         <a:t>O(N²)</a:t>
                       </a:r>
                     </a:p>
@@ -14073,7 +13881,7 @@
                     <a:lstStyle/>
                     <a:p>
                       <a:r>
-                        <a:rPr lang="ru-RU" sz="2000" b="0" i="0" kern="1200" dirty="0" smtClean="0">
+                        <a:rPr lang="ru-RU" sz="2000" b="0" i="0" kern="1200" dirty="0">
                           <a:solidFill>
                             <a:schemeClr val="tx1"/>
                           </a:solidFill>
@@ -14085,7 +13893,7 @@
                         <a:t>рекуррентные сети + </a:t>
                       </a:r>
                       <a:r>
-                        <a:rPr lang="ru-RU" sz="2000" b="0" i="0" kern="1200" dirty="0" err="1" smtClean="0">
+                        <a:rPr lang="ru-RU" sz="2000" b="0" i="0" kern="1200" dirty="0" err="1">
                           <a:solidFill>
                             <a:schemeClr val="tx1"/>
                           </a:solidFill>
@@ -14097,7 +13905,7 @@
                         <a:t>трансформер</a:t>
                       </a:r>
                       <a:r>
-                        <a:rPr lang="en-US" sz="2000" b="0" i="0" kern="1200" dirty="0" smtClean="0">
+                        <a:rPr lang="en-US" sz="2000" b="0" i="0" kern="1200" dirty="0">
                           <a:solidFill>
                             <a:schemeClr val="tx1"/>
                           </a:solidFill>
@@ -14109,7 +13917,7 @@
                         <a:t>,</a:t>
                       </a:r>
                       <a:r>
-                        <a:rPr lang="en-US" sz="2000" b="0" i="0" kern="1200" baseline="0" dirty="0" smtClean="0">
+                        <a:rPr lang="en-US" sz="2000" b="0" i="0" kern="1200" baseline="0" dirty="0">
                           <a:solidFill>
                             <a:schemeClr val="tx1"/>
                           </a:solidFill>
@@ -14121,7 +13929,7 @@
                         <a:t> </a:t>
                       </a:r>
                       <a:r>
-                        <a:rPr lang="ru-RU" sz="2000" b="0" i="0" kern="1200" baseline="0" dirty="0" smtClean="0">
+                        <a:rPr lang="ru-RU" sz="2000" b="0" i="0" kern="1200" baseline="0" dirty="0">
                           <a:solidFill>
                             <a:schemeClr val="tx1"/>
                           </a:solidFill>
@@ -14160,22 +13968,22 @@
                         <a:defRPr/>
                       </a:pPr>
                       <a:r>
-                        <a:rPr lang="en-US" sz="2000" dirty="0" err="1" smtClean="0"/>
+                        <a:rPr lang="en-US" sz="2000" dirty="0" err="1"/>
                         <a:t>Heterogen</a:t>
                       </a:r>
                       <a:r>
-                        <a:rPr lang="en-US" sz="2000" dirty="0" smtClean="0"/>
+                        <a:rPr lang="en-US" sz="2000" dirty="0"/>
                         <a:t> data</a:t>
                       </a:r>
                       <a:r>
-                        <a:rPr lang="en-US" sz="2000" baseline="0" dirty="0" smtClean="0"/>
+                        <a:rPr lang="en-US" sz="2000" baseline="0" dirty="0"/>
                         <a:t>, </a:t>
                       </a:r>
                       <a:r>
-                        <a:rPr lang="en-US" sz="2000" baseline="0" dirty="0" err="1" smtClean="0"/>
+                        <a:rPr lang="en-US" sz="2000" baseline="0" dirty="0" err="1"/>
                         <a:t>exogen</a:t>
                       </a:r>
-                      <a:endParaRPr lang="ru-RU" sz="2000" dirty="0" smtClean="0"/>
+                      <a:endParaRPr lang="ru-RU" sz="2000" dirty="0"/>
                     </a:p>
                   </a:txBody>
                   <a:tcPr marL="23521" marR="23521" marT="11760" marB="11760" anchor="ctr"/>
@@ -14186,7 +13994,7 @@
                     <a:lstStyle/>
                     <a:p>
                       <a:r>
-                        <a:rPr lang="en-US" sz="2000" dirty="0" smtClean="0"/>
+                        <a:rPr lang="en-US" sz="2000" dirty="0"/>
                         <a:t>2022</a:t>
                       </a:r>
                       <a:endParaRPr lang="ru-RU" sz="2000" dirty="0"/>
@@ -14238,7 +14046,7 @@
                         <a:defRPr/>
                       </a:pPr>
                       <a:r>
-                        <a:rPr lang="en-US" sz="2000" dirty="0" smtClean="0"/>
+                        <a:rPr lang="en-US" sz="2000" dirty="0"/>
                         <a:t>Encoder-decoder</a:t>
                       </a:r>
                     </a:p>
@@ -14302,22 +14110,22 @@
                         <a:defRPr/>
                       </a:pPr>
                       <a:r>
-                        <a:rPr lang="en-US" sz="2000" dirty="0" smtClean="0"/>
+                        <a:rPr lang="en-US" sz="2000" dirty="0"/>
                         <a:t>Long</a:t>
                       </a:r>
                       <a:r>
-                        <a:rPr lang="en-US" sz="2000" baseline="0" dirty="0" smtClean="0"/>
+                        <a:rPr lang="en-US" sz="2000" baseline="0" dirty="0"/>
                         <a:t> horizon, low </a:t>
                       </a:r>
                       <a:r>
-                        <a:rPr lang="en-US" sz="2000" baseline="0" dirty="0" err="1" smtClean="0"/>
+                        <a:rPr lang="en-US" sz="2000" baseline="0" dirty="0" err="1"/>
                         <a:t>comput</a:t>
                       </a:r>
                       <a:r>
-                        <a:rPr lang="en-US" sz="2000" baseline="0" dirty="0" smtClean="0"/>
+                        <a:rPr lang="en-US" sz="2000" baseline="0" dirty="0"/>
                         <a:t>. require</a:t>
                       </a:r>
-                      <a:endParaRPr lang="ru-RU" sz="2000" dirty="0" smtClean="0"/>
+                      <a:endParaRPr lang="ru-RU" sz="2000" dirty="0"/>
                     </a:p>
                   </a:txBody>
                   <a:tcPr marL="23521" marR="23521" marT="11760" marB="11760" anchor="ctr"/>
@@ -14379,7 +14187,7 @@
                         <a:defRPr/>
                       </a:pPr>
                       <a:r>
-                        <a:rPr lang="en-US" sz="2000" dirty="0" smtClean="0"/>
+                        <a:rPr lang="en-US" sz="2000" dirty="0"/>
                         <a:t>Encoder-decoder</a:t>
                       </a:r>
                     </a:p>
@@ -14435,14 +14243,14 @@
                         <a:defRPr/>
                       </a:pPr>
                       <a:r>
-                        <a:rPr lang="en-US" sz="2000" dirty="0" smtClean="0"/>
+                        <a:rPr lang="en-US" sz="2000" dirty="0"/>
                         <a:t>Long</a:t>
                       </a:r>
                       <a:r>
-                        <a:rPr lang="en-US" sz="2000" baseline="0" dirty="0" smtClean="0"/>
+                        <a:rPr lang="en-US" sz="2000" baseline="0" dirty="0"/>
                         <a:t> horizon, complex patterns</a:t>
                       </a:r>
-                      <a:endParaRPr lang="ru-RU" sz="2000" dirty="0" smtClean="0"/>
+                      <a:endParaRPr lang="ru-RU" sz="2000" dirty="0"/>
                     </a:p>
                   </a:txBody>
                   <a:tcPr marL="23521" marR="23521" marT="11760" marB="11760" anchor="ctr"/>
@@ -14487,10 +14295,9 @@
                     <a:lstStyle/>
                     <a:p>
                       <a:r>
-                        <a:rPr lang="en-US" sz="2000" dirty="0" smtClean="0"/>
+                        <a:rPr lang="en-US" sz="2000" dirty="0"/>
                         <a:t>Encoder</a:t>
                       </a:r>
-                      <a:endParaRPr lang="en-US" sz="2000" dirty="0"/>
                     </a:p>
                   </a:txBody>
                   <a:tcPr marL="23521" marR="23521" marT="11760" marB="11760" anchor="ctr"/>
@@ -14548,14 +14355,14 @@
                         <a:defRPr/>
                       </a:pPr>
                       <a:r>
-                        <a:rPr lang="en-US" sz="2000" dirty="0" smtClean="0"/>
+                        <a:rPr lang="en-US" sz="2000" dirty="0"/>
                         <a:t>Long</a:t>
                       </a:r>
                       <a:r>
-                        <a:rPr lang="en-US" sz="2000" baseline="0" dirty="0" smtClean="0"/>
+                        <a:rPr lang="en-US" sz="2000" baseline="0" dirty="0"/>
                         <a:t> horizon, multivariate</a:t>
                       </a:r>
-                      <a:endParaRPr lang="ru-RU" sz="2000" dirty="0" smtClean="0"/>
+                      <a:endParaRPr lang="ru-RU" sz="2000" dirty="0"/>
                     </a:p>
                   </a:txBody>
                   <a:tcPr marL="23521" marR="23521" marT="11760" marB="11760" anchor="ctr"/>
@@ -14600,10 +14407,9 @@
                     <a:lstStyle/>
                     <a:p>
                       <a:r>
-                        <a:rPr lang="en-US" sz="2000" dirty="0" smtClean="0"/>
+                        <a:rPr lang="en-US" sz="2000" dirty="0"/>
                         <a:t>Encoder</a:t>
                       </a:r>
-                      <a:endParaRPr lang="en-US" sz="2000" dirty="0"/>
                     </a:p>
                   </a:txBody>
                   <a:tcPr marL="23521" marR="23521" marT="11760" marB="11760" anchor="ctr"/>
@@ -14614,10 +14420,9 @@
                     <a:lstStyle/>
                     <a:p>
                       <a:r>
-                        <a:rPr lang="en-US" sz="2000" dirty="0" smtClean="0"/>
+                        <a:rPr lang="en-US" sz="2000" dirty="0"/>
                         <a:t>O(N²)</a:t>
                       </a:r>
-                      <a:endParaRPr lang="en-US" sz="2000" dirty="0"/>
                     </a:p>
                   </a:txBody>
                   <a:tcPr marL="23521" marR="23521" marT="11760" marB="11760" anchor="ctr"/>
@@ -14632,7 +14437,7 @@
                         <a:t>Инвертированная архитектура, переменные как </a:t>
                       </a:r>
                       <a:r>
-                        <a:rPr lang="ru-RU" sz="2000" dirty="0" err="1" smtClean="0"/>
+                        <a:rPr lang="ru-RU" sz="2000" dirty="0" err="1"/>
                         <a:t>патчи</a:t>
                       </a:r>
                       <a:endParaRPr lang="ru-RU" sz="2000" dirty="0"/>
@@ -14693,10 +14498,9 @@
                     <a:lstStyle/>
                     <a:p>
                       <a:r>
-                        <a:rPr lang="en-US" sz="2000" dirty="0" smtClean="0"/>
+                        <a:rPr lang="en-US" sz="2000" dirty="0"/>
                         <a:t>Mixer Encoder</a:t>
                       </a:r>
-                      <a:endParaRPr lang="en-US" sz="2000" dirty="0"/>
                     </a:p>
                   </a:txBody>
                   <a:tcPr marL="23521" marR="23521" marT="11760" marB="11760" anchor="ctr"/>
@@ -14721,30 +14525,26 @@
                     <a:p>
                       <a:r>
                         <a:rPr lang="ru-RU" sz="2000" dirty="0"/>
-                        <a:t>Декомпозируемое многомасштабное </a:t>
+                        <a:t>Декомпозируемое многомасштабное смешивание</a:t>
                       </a:r>
                       <a:r>
-                        <a:rPr lang="ru-RU" sz="2000" dirty="0" smtClean="0"/>
-                        <a:t>смешивание</a:t>
-                      </a:r>
-                      <a:r>
-                        <a:rPr lang="en-US" sz="2000" dirty="0" smtClean="0"/>
+                        <a:rPr lang="en-US" sz="2000" dirty="0"/>
                         <a:t> (</a:t>
                       </a:r>
                       <a:r>
-                        <a:rPr lang="ru-RU" sz="2000" b="1" dirty="0" smtClean="0"/>
+                        <a:rPr lang="ru-RU" sz="2000" b="1" dirty="0"/>
                         <a:t>Миксер</a:t>
                       </a:r>
                       <a:r>
-                        <a:rPr lang="ru-RU" sz="2000" b="1" baseline="0" dirty="0" smtClean="0"/>
+                        <a:rPr lang="ru-RU" sz="2000" b="1" baseline="0" dirty="0"/>
                         <a:t>, не </a:t>
                       </a:r>
                       <a:r>
-                        <a:rPr lang="ru-RU" sz="2000" b="1" baseline="0" dirty="0" err="1" smtClean="0"/>
+                        <a:rPr lang="ru-RU" sz="2000" b="1" baseline="0" dirty="0" err="1"/>
                         <a:t>трансформер</a:t>
                       </a:r>
                       <a:r>
-                        <a:rPr lang="ru-RU" sz="2000" baseline="0" dirty="0" smtClean="0"/>
+                        <a:rPr lang="ru-RU" sz="2000" baseline="0" dirty="0"/>
                         <a:t>!)</a:t>
                       </a:r>
                       <a:endParaRPr lang="ru-RU" sz="2000" dirty="0"/>
@@ -14791,7 +14591,7 @@
                     <a:lstStyle/>
                     <a:p>
                       <a:r>
-                        <a:rPr lang="en-US" sz="2000" b="1" dirty="0" err="1" smtClean="0"/>
+                        <a:rPr lang="en-US" sz="2000" b="1" dirty="0" err="1"/>
                         <a:t>Dlinear</a:t>
                       </a:r>
                       <a:endParaRPr lang="en-US" sz="2000" b="1" dirty="0"/>
@@ -14805,10 +14605,9 @@
                     <a:lstStyle/>
                     <a:p>
                       <a:r>
-                        <a:rPr lang="en-US" sz="2000" dirty="0" smtClean="0"/>
+                        <a:rPr lang="en-US" sz="2000" dirty="0"/>
                         <a:t>Linear</a:t>
                       </a:r>
-                      <a:endParaRPr lang="en-US" sz="2000" dirty="0"/>
                     </a:p>
                   </a:txBody>
                   <a:tcPr marL="23521" marR="23521" marT="11760" marB="11760" anchor="ctr"/>
@@ -14819,10 +14618,9 @@
                     <a:lstStyle/>
                     <a:p>
                       <a:r>
-                        <a:rPr lang="en-US" sz="2000" dirty="0" smtClean="0"/>
+                        <a:rPr lang="en-US" sz="2000" dirty="0"/>
                         <a:t>-</a:t>
                       </a:r>
-                      <a:endParaRPr lang="en-US" sz="2000" dirty="0"/>
                     </a:p>
                   </a:txBody>
                   <a:tcPr marL="23521" marR="23521" marT="11760" marB="11760" anchor="ctr"/>
@@ -14833,15 +14631,15 @@
                     <a:lstStyle/>
                     <a:p>
                       <a:r>
-                        <a:rPr lang="ru-RU" sz="2000" dirty="0" smtClean="0"/>
+                        <a:rPr lang="ru-RU" sz="2000" dirty="0"/>
                         <a:t>Не</a:t>
                       </a:r>
                       <a:r>
-                        <a:rPr lang="ru-RU" sz="2000" baseline="0" dirty="0" smtClean="0"/>
+                        <a:rPr lang="ru-RU" sz="2000" baseline="0" dirty="0"/>
                         <a:t> </a:t>
                       </a:r>
                       <a:r>
-                        <a:rPr lang="ru-RU" sz="2000" baseline="0" dirty="0" err="1" smtClean="0"/>
+                        <a:rPr lang="ru-RU" sz="2000" baseline="0" dirty="0" err="1"/>
                         <a:t>трансформер</a:t>
                       </a:r>
                       <a:endParaRPr lang="ru-RU" sz="2000" dirty="0"/>
@@ -14872,27 +14670,27 @@
                         <a:defRPr/>
                       </a:pPr>
                       <a:r>
-                        <a:rPr lang="en-US" sz="2000" dirty="0" smtClean="0"/>
+                        <a:rPr lang="en-US" sz="2000" dirty="0"/>
                         <a:t>Base</a:t>
                       </a:r>
                       <a:r>
-                        <a:rPr lang="en-US" sz="2000" baseline="0" dirty="0" smtClean="0"/>
+                        <a:rPr lang="en-US" sz="2000" baseline="0" dirty="0"/>
                         <a:t> line</a:t>
                       </a:r>
                       <a:r>
-                        <a:rPr lang="ru-RU" sz="2000" baseline="0" dirty="0" smtClean="0"/>
+                        <a:rPr lang="ru-RU" sz="2000" baseline="0" dirty="0"/>
                         <a:t> </a:t>
                       </a:r>
                       <a:r>
-                        <a:rPr lang="en-US" sz="2000" baseline="0" dirty="0" smtClean="0"/>
+                        <a:rPr lang="en-US" sz="2000" baseline="0" dirty="0"/>
                         <a:t>for </a:t>
                       </a:r>
                       <a:r>
-                        <a:rPr lang="en-US" sz="2000" dirty="0" smtClean="0"/>
+                        <a:rPr lang="en-US" sz="2000" dirty="0"/>
                         <a:t>Long</a:t>
                       </a:r>
                       <a:r>
-                        <a:rPr lang="en-US" sz="2000" baseline="0" dirty="0" smtClean="0"/>
+                        <a:rPr lang="en-US" sz="2000" baseline="0" dirty="0"/>
                         <a:t> horizon</a:t>
                       </a:r>
                       <a:endParaRPr lang="ru-RU" sz="2000" dirty="0"/>
@@ -14906,7 +14704,7 @@
                     <a:lstStyle/>
                     <a:p>
                       <a:r>
-                        <a:rPr lang="en-US" sz="2000" dirty="0" smtClean="0"/>
+                        <a:rPr lang="en-US" sz="2000" dirty="0"/>
                         <a:t>2023</a:t>
                       </a:r>
                       <a:endParaRPr lang="ru-RU" sz="2000" dirty="0"/>
@@ -14990,13 +14788,6 @@
   <p:clrMapOvr>
     <a:masterClrMapping/>
   </p:clrMapOvr>
-  <p:timing>
-    <p:tnLst>
-      <p:par>
-        <p:cTn id="1" dur="indefinite" restart="never" nodeType="tmRoot"/>
-      </p:par>
-    </p:tnLst>
-  </p:timing>
 </p:sld>
 </file>
 
@@ -15313,13 +15104,6 @@
   <p:clrMapOvr>
     <a:masterClrMapping/>
   </p:clrMapOvr>
-  <p:timing>
-    <p:tnLst>
-      <p:par>
-        <p:cTn id="1" dur="indefinite" restart="never" nodeType="tmRoot"/>
-      </p:par>
-    </p:tnLst>
-  </p:timing>
 </p:sld>
 </file>
 
@@ -15447,20 +15231,16 @@
                   <a:buNone/>
                 </a:pPr>
                 <a:r>
-                  <a:rPr lang="ru-RU" sz="2200" dirty="0" smtClean="0"/>
+                  <a:rPr lang="ru-RU" sz="2200" dirty="0"/>
                   <a:t>Пусть требуется предсказать последовательность значений</a:t>
                 </a:r>
                 <a:r>
-                  <a:rPr lang="en-US" sz="2200" dirty="0" smtClean="0"/>
+                  <a:rPr lang="en-US" sz="2200" dirty="0"/>
                   <a:t> </a:t>
                 </a:r>
                 <a:r>
-                  <a:rPr lang="ru-RU" sz="2200" dirty="0" smtClean="0"/>
-                  <a:t>ВР </a:t>
-                </a:r>
-                <a:r>
                   <a:rPr lang="ru-RU" sz="2200" dirty="0"/>
-                  <a:t>по входным данным</a:t>
+                  <a:t>ВР по входным данным</a:t>
                 </a:r>
               </a:p>
               <a:p>
@@ -15489,7 +15269,7 @@
                   </a:lnSpc>
                 </a:pPr>
                 <a:r>
-                  <a:rPr lang="ru-RU" sz="2200" dirty="0" smtClean="0"/>
+                  <a:rPr lang="ru-RU" sz="2200" dirty="0"/>
                   <a:t>Напомним: </a:t>
                 </a:r>
                 <a14:m>
@@ -15795,11 +15575,7 @@
                 </a:r>
                 <a:r>
                   <a:rPr lang="ru-RU" sz="2200" dirty="0"/>
-                  <a:t>последнее известное состояние системы, </a:t>
-                </a:r>
-                <a:r>
-                  <a:rPr lang="ru-RU" sz="2200" dirty="0" smtClean="0"/>
-                  <a:t>то </a:t>
+                  <a:t>последнее известное состояние системы, то </a:t>
                 </a:r>
                 <a14:m>
                   <m:oMath xmlns:m="http://schemas.openxmlformats.org/officeDocument/2006/math">
@@ -15880,11 +15656,7 @@
                 </a:r>
                 <a:r>
                   <a:rPr lang="ru-RU" sz="2000" dirty="0"/>
-                  <a:t> единого вектора </a:t>
-                </a:r>
-                <a:r>
-                  <a:rPr lang="ru-RU" sz="2000" dirty="0" smtClean="0"/>
-                  <a:t>скрытых состояний </a:t>
+                  <a:t> единого вектора скрытых состояний </a:t>
                 </a:r>
                 <a14:m>
                   <m:oMath xmlns:m="http://schemas.openxmlformats.org/officeDocument/2006/math">
@@ -15927,24 +15699,16 @@
                   </a:spcBef>
                 </a:pPr>
                 <a:r>
-                  <a:rPr lang="ru-RU" dirty="0" smtClean="0"/>
+                  <a:rPr lang="ru-RU" dirty="0"/>
                   <a:t>Последние</a:t>
                 </a:r>
                 <a:r>
-                  <a:rPr lang="en-US" dirty="0" smtClean="0"/>
+                  <a:rPr lang="en-US" dirty="0"/>
                   <a:t> </a:t>
                 </a:r>
                 <a:r>
-                  <a:rPr lang="ru-RU" dirty="0" smtClean="0"/>
-                  <a:t>известные </a:t>
-                </a:r>
-                <a:r>
                   <a:rPr lang="ru-RU" dirty="0"/>
-                  <a:t>скрытое </a:t>
-                </a:r>
-                <a:r>
-                  <a:rPr lang="ru-RU" dirty="0" smtClean="0"/>
-                  <a:t>состояние </a:t>
+                  <a:t>известные скрытое состояние </a:t>
                 </a:r>
                 <a14:m>
                   <m:oMath xmlns:m="http://schemas.openxmlformats.org/officeDocument/2006/math">
@@ -15976,7 +15740,7 @@
                   </m:oMath>
                 </a14:m>
                 <a:r>
-                  <a:rPr lang="ru-RU" dirty="0" smtClean="0"/>
+                  <a:rPr lang="ru-RU" dirty="0"/>
                   <a:t> и </a:t>
                 </a:r>
                 <a14:m>
@@ -16009,16 +15773,8 @@
                   </m:oMath>
                 </a14:m>
                 <a:r>
-                  <a:rPr lang="ru-RU" dirty="0" smtClean="0"/>
-                  <a:t> задают </a:t>
-                </a:r>
-                <a:r>
                   <a:rPr lang="ru-RU" dirty="0"/>
-                  <a:t>все состояния </a:t>
-                </a:r>
-                <a:r>
-                  <a:rPr lang="ru-RU" dirty="0" smtClean="0"/>
-                  <a:t>предсказания</a:t>
+                  <a:t> задают все состояния предсказания</a:t>
                 </a:r>
               </a:p>
               <a:p>
@@ -16032,13 +15788,8 @@
                 </a:pPr>
                 <a:r>
                   <a:rPr lang="ru-RU" dirty="0"/>
-                  <a:t>Скрытое состояние – это "бутылочное горлышко": вся информация из прошлого сжимается в фиксированный вектор, что приводит к потере деталей</a:t>
+                  <a:t>Скрытое состояние – это "бутылочное горлышко": вся информация из прошлого сжимается в фиксированный вектор, что приводит к потере деталей.</a:t>
                 </a:r>
-                <a:r>
-                  <a:rPr lang="ru-RU" dirty="0" smtClean="0"/>
-                  <a:t>.</a:t>
-                </a:r>
-                <a:endParaRPr lang="ru-RU" dirty="0"/>
               </a:p>
               <a:p>
                 <a:pPr lvl="2">
@@ -16050,12 +15801,8 @@
                   </a:spcBef>
                 </a:pPr>
                 <a:r>
-                  <a:rPr lang="ru-RU" dirty="0" smtClean="0"/>
-                  <a:t>Ограниченный </a:t>
-                </a:r>
-                <a:r>
                   <a:rPr lang="ru-RU" dirty="0"/>
-                  <a:t>горизонт предсказаний</a:t>
+                  <a:t>Ограниченный горизонт предсказаний</a:t>
                 </a:r>
               </a:p>
               <a:p>
@@ -16068,18 +15815,9 @@
                   </a:spcBef>
                 </a:pPr>
                 <a:r>
-                  <a:rPr lang="ru-RU" sz="2000" dirty="0" smtClean="0"/>
-                  <a:t>Проблема </a:t>
+                  <a:rPr lang="ru-RU" sz="2000" dirty="0"/>
+                  <a:t>Проблема долгого обучения (веса или затухают или взрываются)</a:t>
                 </a:r>
-                <a:r>
-                  <a:rPr lang="ru-RU" sz="2000" dirty="0"/>
-                  <a:t>долгого обучения (веса или затухают или взрываются</a:t>
-                </a:r>
-                <a:r>
-                  <a:rPr lang="ru-RU" sz="2000" dirty="0" smtClean="0"/>
-                  <a:t>)</a:t>
-                </a:r>
-                <a:endParaRPr lang="ru-RU" sz="2000" dirty="0"/>
               </a:p>
             </p:txBody>
           </p:sp>
@@ -16277,13 +16015,6 @@
   <p:clrMapOvr>
     <a:masterClrMapping/>
   </p:clrMapOvr>
-  <p:timing>
-    <p:tnLst>
-      <p:par>
-        <p:cTn id="1" dur="indefinite" restart="never" nodeType="tmRoot"/>
-      </p:par>
-    </p:tnLst>
-  </p:timing>
 </p:sld>
 </file>
 
@@ -16327,10 +16058,9 @@
           <a:lstStyle/>
           <a:p>
             <a:r>
-              <a:rPr lang="ru-RU" dirty="0" smtClean="0"/>
+              <a:rPr lang="ru-RU" dirty="0"/>
               <a:t>Использование сокращенных трансформеров</a:t>
             </a:r>
-            <a:endParaRPr lang="ru-RU" dirty="0"/>
           </a:p>
         </p:txBody>
       </p:sp>
@@ -16470,12 +16200,8 @@
               </a:spcBef>
               <a:buNone/>
             </a:pPr>
-            <a:r>
-              <a:rPr lang="en-US" sz="2200" dirty="0" smtClean="0"/>
-              <a:t/>
-            </a:r>
             <a:br>
-              <a:rPr lang="en-US" sz="2200" dirty="0" smtClean="0"/>
+              <a:rPr lang="en-US" sz="2200" dirty="0"/>
             </a:br>
             <a:endParaRPr lang="ru-RU" sz="2200" dirty="0"/>
           </a:p>
@@ -16729,15 +16455,15 @@
               <a:buNone/>
             </a:pPr>
             <a:r>
-              <a:rPr lang="ru-RU" sz="2200" b="1" dirty="0" smtClean="0"/>
+              <a:rPr lang="ru-RU" sz="2200" b="1" dirty="0"/>
               <a:t>Примеры </a:t>
             </a:r>
             <a:r>
-              <a:rPr lang="en-US" sz="2200" b="1" dirty="0" err="1" smtClean="0"/>
+              <a:rPr lang="en-US" sz="2200" b="1" dirty="0" err="1"/>
               <a:t>TimesFM</a:t>
             </a:r>
             <a:r>
-              <a:rPr lang="en-US" sz="2200" b="1" dirty="0" smtClean="0"/>
+              <a:rPr lang="en-US" sz="2200" b="1" dirty="0"/>
               <a:t>:</a:t>
             </a:r>
           </a:p>
@@ -16751,26 +16477,26 @@
               </a:spcBef>
             </a:pPr>
             <a:r>
-              <a:rPr lang="ru-RU" sz="2200" dirty="0" smtClean="0"/>
+              <a:rPr lang="ru-RU" sz="2200" dirty="0"/>
               <a:t>Выходной </a:t>
             </a:r>
             <a:r>
-              <a:rPr lang="ru-RU" sz="2200" dirty="0" err="1" smtClean="0"/>
+              <a:rPr lang="ru-RU" sz="2200" dirty="0" err="1"/>
               <a:t>патч</a:t>
             </a:r>
             <a:r>
-              <a:rPr lang="ru-RU" sz="2200" dirty="0" smtClean="0"/>
+              <a:rPr lang="ru-RU" sz="2200" dirty="0"/>
               <a:t> можно варьировать от 32 до 128 (шире входного </a:t>
             </a:r>
             <a:r>
-              <a:rPr lang="ru-RU" sz="2200" dirty="0" err="1" smtClean="0"/>
+              <a:rPr lang="ru-RU" sz="2200" dirty="0" err="1"/>
               <a:t>патча</a:t>
             </a:r>
             <a:r>
-              <a:rPr lang="ru-RU" sz="2200" dirty="0" smtClean="0"/>
+              <a:rPr lang="ru-RU" sz="2200" dirty="0"/>
               <a:t>)</a:t>
             </a:r>
-            <a:endParaRPr lang="en-US" sz="2200" dirty="0" smtClean="0"/>
+            <a:endParaRPr lang="en-US" sz="2200" dirty="0"/>
           </a:p>
           <a:p>
             <a:pPr lvl="1">
@@ -16782,20 +16508,8 @@
               </a:spcBef>
             </a:pPr>
             <a:r>
-              <a:rPr lang="ru-RU" sz="2200" dirty="0" smtClean="0"/>
-              <a:t> </a:t>
-            </a:r>
-            <a:r>
               <a:rPr lang="ru-RU" sz="2200" dirty="0"/>
-              <a:t>остаток идет в контекст </a:t>
-            </a:r>
-            <a:r>
-              <a:rPr lang="ru-RU" sz="2200" dirty="0" smtClean="0"/>
-              <a:t>семплов. </a:t>
-            </a:r>
-            <a:r>
-              <a:rPr lang="ru-RU" sz="2200" dirty="0"/>
-              <a:t>( шаг </a:t>
+              <a:t> остаток идет в контекст семплов. ( шаг </a:t>
             </a:r>
             <a:r>
               <a:rPr lang="ru-RU" sz="2200" dirty="0" err="1"/>
@@ -16813,7 +16527,7 @@
               <a:rPr lang="ru-RU" sz="2200" dirty="0"/>
               <a:t>) </a:t>
             </a:r>
-            <a:endParaRPr lang="en-US" sz="2200" dirty="0" smtClean="0"/>
+            <a:endParaRPr lang="en-US" sz="2200" dirty="0"/>
           </a:p>
           <a:p>
             <a:pPr lvl="1">
@@ -16825,22 +16539,22 @@
               </a:spcBef>
             </a:pPr>
             <a:r>
-              <a:rPr lang="ru-RU" sz="2200" dirty="0" smtClean="0"/>
+              <a:rPr lang="ru-RU" sz="2200" dirty="0"/>
               <a:t>Можно </a:t>
             </a:r>
             <a:r>
-              <a:rPr lang="ru-RU" sz="2200" dirty="0" err="1" smtClean="0"/>
+              <a:rPr lang="ru-RU" sz="2200" dirty="0" err="1"/>
               <a:t>ансаблить</a:t>
             </a:r>
             <a:r>
-              <a:rPr lang="ru-RU" sz="2200" dirty="0" smtClean="0"/>
+              <a:rPr lang="ru-RU" sz="2200" dirty="0"/>
               <a:t> предсказания разным размером </a:t>
             </a:r>
             <a:r>
-              <a:rPr lang="ru-RU" sz="2200" dirty="0" err="1" smtClean="0"/>
+              <a:rPr lang="ru-RU" sz="2200" dirty="0" err="1"/>
               <a:t>патча</a:t>
             </a:r>
-            <a:endParaRPr lang="ru-RU" sz="2200" dirty="0" smtClean="0"/>
+            <a:endParaRPr lang="ru-RU" sz="2200" dirty="0"/>
           </a:p>
           <a:p>
             <a:pPr>
@@ -16853,21 +16567,17 @@
             </a:pPr>
             <a:r>
               <a:rPr lang="en-US" sz="2200" dirty="0"/>
-              <a:t>Self </a:t>
-            </a:r>
-            <a:r>
-              <a:rPr lang="en-US" sz="2200" dirty="0" smtClean="0"/>
-              <a:t>training</a:t>
-            </a:r>
-            <a:r>
-              <a:rPr lang="ru-RU" sz="2200" dirty="0" smtClean="0"/>
+              <a:t>Self training</a:t>
+            </a:r>
+            <a:r>
+              <a:rPr lang="ru-RU" sz="2200" dirty="0"/>
               <a:t> через маскировку семплов в </a:t>
             </a:r>
             <a:r>
-              <a:rPr lang="ru-RU" sz="2200" dirty="0" err="1" smtClean="0"/>
+              <a:rPr lang="ru-RU" sz="2200" dirty="0" err="1"/>
               <a:t>патче</a:t>
             </a:r>
-            <a:endParaRPr lang="ru-RU" sz="2200" dirty="0" smtClean="0"/>
+            <a:endParaRPr lang="ru-RU" sz="2200" dirty="0"/>
           </a:p>
           <a:p>
             <a:pPr>
@@ -16883,11 +16593,11 @@
               <a:t>Доступен </a:t>
             </a:r>
             <a:r>
-              <a:rPr lang="en-US" sz="2200" dirty="0" smtClean="0"/>
+              <a:rPr lang="en-US" sz="2200" dirty="0"/>
               <a:t>Zero-shot</a:t>
             </a:r>
             <a:r>
-              <a:rPr lang="ru-RU" sz="2200" dirty="0" smtClean="0"/>
+              <a:rPr lang="ru-RU" sz="2200" dirty="0"/>
               <a:t>, вход и выход переменной длины</a:t>
             </a:r>
           </a:p>
@@ -16901,18 +16611,13 @@
               </a:spcBef>
               <a:buNone/>
             </a:pPr>
-            <a:r>
-              <a:rPr lang="en-US" sz="2200" dirty="0" smtClean="0"/>
-              <a:t/>
-            </a:r>
             <a:br>
-              <a:rPr lang="en-US" sz="2200" dirty="0" smtClean="0"/>
+              <a:rPr lang="en-US" sz="2200" dirty="0"/>
             </a:br>
             <a:r>
-              <a:rPr lang="ru-RU" sz="2200" dirty="0" smtClean="0"/>
+              <a:rPr lang="ru-RU" sz="2200" dirty="0"/>
               <a:t> </a:t>
             </a:r>
-            <a:endParaRPr lang="ru-RU" sz="2200" dirty="0"/>
           </a:p>
         </p:txBody>
       </p:sp>
@@ -16926,13 +16631,6 @@
   <p:clrMapOvr>
     <a:masterClrMapping/>
   </p:clrMapOvr>
-  <p:timing>
-    <p:tnLst>
-      <p:par>
-        <p:cTn id="1" dur="indefinite" restart="never" nodeType="tmRoot"/>
-      </p:par>
-    </p:tnLst>
-  </p:timing>
 </p:sld>
 </file>
 
@@ -16978,7 +16676,7 @@
               <a:t>Некоторые модели </a:t>
             </a:r>
             <a:r>
-              <a:rPr lang="en-US" dirty="0" smtClean="0"/>
+              <a:rPr lang="en-US" dirty="0"/>
               <a:t>foundation</a:t>
             </a:r>
             <a:endParaRPr lang="ru-RU" dirty="0"/>
@@ -17133,7 +16831,7 @@
                     <a:lstStyle/>
                     <a:p>
                       <a:r>
-                        <a:rPr lang="en-US" sz="2200" b="0" i="0" kern="1200" dirty="0" smtClean="0">
+                        <a:rPr lang="en-US" sz="2200" b="0" i="0" kern="1200" dirty="0">
                           <a:solidFill>
                             <a:schemeClr val="tx1"/>
                           </a:solidFill>
@@ -17144,15 +16842,6 @@
                         </a:rPr>
                         <a:t>TimeGPT-1</a:t>
                       </a:r>
-                      <a:endParaRPr lang="en-US" sz="2200" b="0" i="0" kern="1200" dirty="0">
-                        <a:solidFill>
-                          <a:schemeClr val="tx1"/>
-                        </a:solidFill>
-                        <a:effectLst/>
-                        <a:latin typeface="+mn-lt"/>
-                        <a:ea typeface="+mn-ea"/>
-                        <a:cs typeface="+mn-cs"/>
-                      </a:endParaRPr>
                     </a:p>
                   </a:txBody>
                   <a:tcPr marL="23521" marR="23521" marT="11760" marB="11760" anchor="ctr"/>
@@ -17163,7 +16852,7 @@
                     <a:lstStyle/>
                     <a:p>
                       <a:r>
-                        <a:rPr lang="en-US" sz="2200" b="0" i="0" kern="1200" dirty="0" smtClean="0">
+                        <a:rPr lang="en-US" sz="2200" b="0" i="0" kern="1200" dirty="0">
                           <a:solidFill>
                             <a:schemeClr val="tx1"/>
                           </a:solidFill>
@@ -17175,7 +16864,7 @@
                         <a:t>Transformer (encoder-decoder),</a:t>
                       </a:r>
                       <a:r>
-                        <a:rPr lang="en-US" sz="2200" b="0" i="0" kern="1200" baseline="0" dirty="0" smtClean="0">
+                        <a:rPr lang="en-US" sz="2200" b="0" i="0" kern="1200" baseline="0" dirty="0">
                           <a:solidFill>
                             <a:schemeClr val="tx1"/>
                           </a:solidFill>
@@ -17187,7 +16876,7 @@
                         <a:t>  &gt;1B </a:t>
                       </a:r>
                       <a:r>
-                        <a:rPr lang="ru-RU" sz="2200" b="0" i="0" kern="1200" baseline="0" dirty="0" err="1" smtClean="0">
+                        <a:rPr lang="ru-RU" sz="2200" b="0" i="0" kern="1200" baseline="0" dirty="0" err="1">
                           <a:solidFill>
                             <a:schemeClr val="tx1"/>
                           </a:solidFill>
@@ -17199,7 +16888,7 @@
                         <a:t>парамеров</a:t>
                       </a:r>
                       <a:r>
-                        <a:rPr lang="ru-RU" sz="2200" b="0" i="0" kern="1200" baseline="0" dirty="0" smtClean="0">
+                        <a:rPr lang="ru-RU" sz="2200" b="0" i="0" kern="1200" baseline="0" dirty="0">
                           <a:solidFill>
                             <a:schemeClr val="tx1"/>
                           </a:solidFill>
@@ -17211,7 +16900,7 @@
                         <a:t>, </a:t>
                       </a:r>
                       <a:r>
-                        <a:rPr lang="en-US" sz="1800" b="0" i="0" kern="1200" dirty="0" smtClean="0">
+                        <a:rPr lang="en-US" sz="1800" b="0" i="0" kern="1200" dirty="0">
                           <a:solidFill>
                             <a:schemeClr val="tx1"/>
                           </a:solidFill>
@@ -17233,27 +16922,27 @@
                     <a:lstStyle/>
                     <a:p>
                       <a:r>
-                        <a:rPr lang="ru-RU" sz="2200" dirty="0" smtClean="0"/>
+                        <a:rPr lang="ru-RU" sz="2200" dirty="0"/>
                         <a:t>Закрытая модель (</a:t>
                       </a:r>
                       <a:r>
-                        <a:rPr lang="en-US" sz="2200" dirty="0" smtClean="0"/>
+                        <a:rPr lang="en-US" sz="2200" dirty="0"/>
                         <a:t>API)</a:t>
                       </a:r>
                       <a:r>
-                        <a:rPr lang="ru-RU" sz="2200" baseline="0" dirty="0" smtClean="0"/>
+                        <a:rPr lang="ru-RU" sz="2200" baseline="0" dirty="0"/>
                         <a:t> для </a:t>
                       </a:r>
                       <a:r>
-                        <a:rPr lang="ru-RU" sz="2200" baseline="0" dirty="0" err="1" smtClean="0"/>
+                        <a:rPr lang="ru-RU" sz="2200" baseline="0" dirty="0" err="1"/>
                         <a:t>деплоя</a:t>
                       </a:r>
                       <a:r>
-                        <a:rPr lang="ru-RU" sz="2200" baseline="0" dirty="0" smtClean="0"/>
+                        <a:rPr lang="ru-RU" sz="2200" baseline="0" dirty="0"/>
                         <a:t>, </a:t>
                       </a:r>
                       <a:r>
-                        <a:rPr lang="en-US" sz="2200" baseline="0" dirty="0" smtClean="0"/>
+                        <a:rPr lang="en-US" sz="2200" baseline="0" dirty="0"/>
                         <a:t>long horizon</a:t>
                       </a:r>
                       <a:endParaRPr lang="ru-RU" sz="2200" dirty="0"/>
@@ -17267,10 +16956,9 @@
                     <a:lstStyle/>
                     <a:p>
                       <a:r>
-                        <a:rPr lang="ru-RU" sz="2200" dirty="0" smtClean="0"/>
+                        <a:rPr lang="ru-RU" sz="2200" dirty="0"/>
                         <a:t>2023</a:t>
                       </a:r>
-                      <a:endParaRPr lang="ru-RU" sz="2200" dirty="0"/>
                     </a:p>
                   </a:txBody>
                   <a:tcPr marL="23521" marR="23521" marT="11760" marB="11760" anchor="ctr"/>
@@ -17288,7 +16976,7 @@
                     <a:lstStyle/>
                     <a:p>
                       <a:r>
-                        <a:rPr lang="en-US" sz="2200" b="0" i="0" kern="1200" dirty="0" err="1" smtClean="0">
+                        <a:rPr lang="en-US" sz="2200" b="0" i="0" kern="1200" dirty="0" err="1">
                           <a:solidFill>
                             <a:schemeClr val="tx1"/>
                           </a:solidFill>
@@ -17318,7 +17006,7 @@
                     <a:lstStyle/>
                     <a:p>
                       <a:r>
-                        <a:rPr lang="en-US" sz="2200" b="0" i="0" kern="1200" dirty="0" smtClean="0">
+                        <a:rPr lang="en-US" sz="2200" b="0" i="0" kern="1200" dirty="0">
                           <a:solidFill>
                             <a:schemeClr val="tx1"/>
                           </a:solidFill>
@@ -17330,7 +17018,7 @@
                         <a:t>decoder-only</a:t>
                       </a:r>
                       <a:r>
-                        <a:rPr lang="ru-RU" sz="2200" b="0" i="0" kern="1200" dirty="0" smtClean="0">
+                        <a:rPr lang="ru-RU" sz="2200" b="0" i="0" kern="1200" dirty="0">
                           <a:solidFill>
                             <a:schemeClr val="tx1"/>
                           </a:solidFill>
@@ -17342,7 +17030,7 @@
                         <a:t>,</a:t>
                       </a:r>
                       <a:r>
-                        <a:rPr lang="en-US" sz="2200" b="0" i="0" kern="1200" dirty="0" smtClean="0">
+                        <a:rPr lang="en-US" sz="2200" b="0" i="0" kern="1200" dirty="0">
                           <a:solidFill>
                             <a:schemeClr val="tx1"/>
                           </a:solidFill>
@@ -17354,7 +17042,7 @@
                         <a:t> </a:t>
                       </a:r>
                       <a:r>
-                        <a:rPr lang="ru-RU" sz="2200" b="0" i="0" kern="1200" dirty="0" smtClean="0">
+                        <a:rPr lang="ru-RU" sz="2200" b="0" i="0" kern="1200" dirty="0">
                           <a:solidFill>
                             <a:schemeClr val="tx1"/>
                           </a:solidFill>
@@ -17366,7 +17054,7 @@
                         <a:t>переменные</a:t>
                       </a:r>
                       <a:r>
-                        <a:rPr lang="ru-RU" sz="2200" b="0" i="0" kern="1200" baseline="0" dirty="0" smtClean="0">
+                        <a:rPr lang="ru-RU" sz="2200" b="0" i="0" kern="1200" baseline="0" dirty="0">
                           <a:solidFill>
                             <a:schemeClr val="tx1"/>
                           </a:solidFill>
@@ -17378,7 +17066,7 @@
                         <a:t> </a:t>
                       </a:r>
                       <a:r>
-                        <a:rPr lang="ru-RU" sz="2200" b="0" i="0" kern="1200" baseline="0" dirty="0" err="1" smtClean="0">
+                        <a:rPr lang="ru-RU" sz="2200" b="0" i="0" kern="1200" baseline="0" dirty="0" err="1">
                           <a:solidFill>
                             <a:schemeClr val="tx1"/>
                           </a:solidFill>
@@ -17390,7 +17078,7 @@
                         <a:t>патчи</a:t>
                       </a:r>
                       <a:r>
-                        <a:rPr lang="ru-RU" sz="2200" b="0" i="0" kern="1200" baseline="0" dirty="0" smtClean="0">
+                        <a:rPr lang="ru-RU" sz="2200" b="0" i="0" kern="1200" baseline="0" dirty="0">
                           <a:solidFill>
                             <a:schemeClr val="tx1"/>
                           </a:solidFill>
@@ -17402,7 +17090,7 @@
                         <a:t>,</a:t>
                       </a:r>
                       <a:r>
-                        <a:rPr lang="ru-RU" sz="2200" b="0" i="0" kern="1200" dirty="0" smtClean="0">
+                        <a:rPr lang="ru-RU" sz="2200" b="0" i="0" kern="1200" dirty="0">
                           <a:solidFill>
                             <a:schemeClr val="tx1"/>
                           </a:solidFill>
@@ -17414,7 +17102,7 @@
                         <a:t> </a:t>
                       </a:r>
                       <a:r>
-                        <a:rPr lang="en-US" sz="2200" b="0" i="0" kern="1200" dirty="0" smtClean="0">
+                        <a:rPr lang="en-US" sz="2200" b="0" i="0" kern="1200" dirty="0">
                           <a:solidFill>
                             <a:schemeClr val="tx1"/>
                           </a:solidFill>
@@ -17426,7 +17114,7 @@
                         <a:t>200M </a:t>
                       </a:r>
                       <a:r>
-                        <a:rPr lang="ru-RU" sz="2200" b="0" i="0" kern="1200" dirty="0" smtClean="0">
+                        <a:rPr lang="ru-RU" sz="2200" b="0" i="0" kern="1200" dirty="0">
                           <a:solidFill>
                             <a:schemeClr val="tx1"/>
                           </a:solidFill>
@@ -17465,18 +17153,18 @@
                         <a:defRPr/>
                       </a:pPr>
                       <a:r>
-                        <a:rPr lang="en-US" sz="2200" dirty="0" smtClean="0"/>
+                        <a:rPr lang="en-US" sz="2200" dirty="0"/>
                         <a:t>Zero-shot,</a:t>
                       </a:r>
                       <a:r>
-                        <a:rPr lang="en-US" sz="2200" baseline="0" dirty="0" smtClean="0"/>
+                        <a:rPr lang="en-US" sz="2200" baseline="0" dirty="0"/>
                         <a:t> </a:t>
                       </a:r>
                       <a:r>
-                        <a:rPr lang="ru-RU" sz="2200" baseline="0" dirty="0" smtClean="0"/>
+                        <a:rPr lang="ru-RU" sz="2200" baseline="0" dirty="0"/>
                         <a:t>средний горизонт</a:t>
                       </a:r>
-                      <a:endParaRPr lang="ru-RU" sz="2200" dirty="0" smtClean="0"/>
+                      <a:endParaRPr lang="ru-RU" sz="2200" dirty="0"/>
                     </a:p>
                   </a:txBody>
                   <a:tcPr marL="23521" marR="23521" marT="11760" marB="11760" anchor="ctr"/>
@@ -17487,10 +17175,9 @@
                     <a:lstStyle/>
                     <a:p>
                       <a:r>
-                        <a:rPr lang="ru-RU" sz="2200" dirty="0" smtClean="0"/>
+                        <a:rPr lang="ru-RU" sz="2200" dirty="0"/>
                         <a:t>2024</a:t>
                       </a:r>
-                      <a:endParaRPr lang="ru-RU" sz="2200" dirty="0"/>
                     </a:p>
                   </a:txBody>
                   <a:tcPr marL="23521" marR="23521" marT="11760" marB="11760" anchor="ctr"/>
@@ -17508,7 +17195,7 @@
                     <a:lstStyle/>
                     <a:p>
                       <a:r>
-                        <a:rPr lang="en-US" sz="2200" b="0" i="0" kern="1200" dirty="0" smtClean="0">
+                        <a:rPr lang="en-US" sz="2200" b="0" i="0" kern="1200" dirty="0">
                           <a:solidFill>
                             <a:schemeClr val="tx1"/>
                           </a:solidFill>
@@ -17519,15 +17206,6 @@
                         </a:rPr>
                         <a:t>Lag-Llama</a:t>
                       </a:r>
-                      <a:endParaRPr lang="en-US" sz="2200" b="0" i="0" kern="1200" dirty="0">
-                        <a:solidFill>
-                          <a:schemeClr val="tx1"/>
-                        </a:solidFill>
-                        <a:effectLst/>
-                        <a:latin typeface="+mn-lt"/>
-                        <a:ea typeface="+mn-ea"/>
-                        <a:cs typeface="+mn-cs"/>
-                      </a:endParaRPr>
                     </a:p>
                   </a:txBody>
                   <a:tcPr marL="23521" marR="23521" marT="11760" marB="11760" anchor="ctr"/>
@@ -17538,7 +17216,7 @@
                     <a:lstStyle/>
                     <a:p>
                       <a:r>
-                        <a:rPr lang="en-US" sz="2200" b="0" i="0" kern="1200" dirty="0" smtClean="0">
+                        <a:rPr lang="en-US" sz="2200" b="0" i="0" kern="1200" dirty="0">
                           <a:solidFill>
                             <a:schemeClr val="tx1"/>
                           </a:solidFill>
@@ -17550,7 +17228,7 @@
                         <a:t>decoder-only </a:t>
                       </a:r>
                       <a:r>
-                        <a:rPr lang="ru-RU" sz="2200" b="0" i="0" kern="1200" dirty="0" smtClean="0">
+                        <a:rPr lang="ru-RU" sz="2200" b="0" i="0" kern="1200" dirty="0">
                           <a:solidFill>
                             <a:schemeClr val="tx1"/>
                           </a:solidFill>
@@ -17562,7 +17240,7 @@
                         <a:t>лаги как </a:t>
                       </a:r>
                       <a:r>
-                        <a:rPr lang="ru-RU" sz="2200" b="0" i="0" kern="1200" dirty="0" err="1" smtClean="0">
+                        <a:rPr lang="ru-RU" sz="2200" b="0" i="0" kern="1200" dirty="0" err="1">
                           <a:solidFill>
                             <a:schemeClr val="tx1"/>
                           </a:solidFill>
@@ -17574,7 +17252,7 @@
                         <a:t>ковариаты</a:t>
                       </a:r>
                       <a:r>
-                        <a:rPr lang="en-US" sz="2200" b="0" i="0" kern="1200" dirty="0" smtClean="0">
+                        <a:rPr lang="en-US" sz="2200" b="0" i="0" kern="1200" dirty="0">
                           <a:solidFill>
                             <a:schemeClr val="tx1"/>
                           </a:solidFill>
@@ -17586,7 +17264,7 @@
                         <a:t> </a:t>
                       </a:r>
                       <a:r>
-                        <a:rPr lang="ru-RU" sz="2200" b="0" i="0" kern="1200" dirty="0" smtClean="0">
+                        <a:rPr lang="ru-RU" sz="2200" b="0" i="0" kern="1200" dirty="0">
                           <a:solidFill>
                             <a:schemeClr val="tx1"/>
                           </a:solidFill>
@@ -17598,7 +17276,7 @@
                         <a:t>(контекст),</a:t>
                       </a:r>
                       <a:r>
-                        <a:rPr lang="ru-RU" sz="2200" b="0" i="0" kern="1200" baseline="0" dirty="0" smtClean="0">
+                        <a:rPr lang="ru-RU" sz="2200" b="0" i="0" kern="1200" baseline="0" dirty="0">
                           <a:solidFill>
                             <a:schemeClr val="tx1"/>
                           </a:solidFill>
@@ -17610,7 +17288,7 @@
                         <a:t> легковесная архитектура, вероятностные предсказания (</a:t>
                       </a:r>
                       <a:r>
-                        <a:rPr lang="en-US" sz="2200" b="0" i="0" kern="1200" baseline="0" dirty="0" smtClean="0">
+                        <a:rPr lang="en-US" sz="2200" b="0" i="0" kern="1200" baseline="0" dirty="0">
                           <a:solidFill>
                             <a:schemeClr val="tx1"/>
                           </a:solidFill>
@@ -17622,7 +17300,7 @@
                         <a:t>&lt;150M)</a:t>
                       </a:r>
                       <a:r>
-                        <a:rPr lang="ru-RU" sz="2200" b="0" i="0" kern="1200" baseline="0" dirty="0" smtClean="0">
+                        <a:rPr lang="ru-RU" sz="2200" b="0" i="0" kern="1200" baseline="0" dirty="0">
                           <a:solidFill>
                             <a:schemeClr val="tx1"/>
                           </a:solidFill>
@@ -17661,7 +17339,7 @@
                         <a:defRPr/>
                       </a:pPr>
                       <a:r>
-                        <a:rPr lang="ru-RU" sz="2200" b="0" i="0" kern="1200" dirty="0" smtClean="0">
+                        <a:rPr lang="ru-RU" sz="2200" b="0" i="0" kern="1200" dirty="0">
                           <a:solidFill>
                             <a:schemeClr val="tx1"/>
                           </a:solidFill>
@@ -17673,7 +17351,7 @@
                         <a:t>короткие/средние ряды горизонты</a:t>
                       </a:r>
                       <a:r>
-                        <a:rPr lang="en-US" sz="2200" b="0" i="0" kern="1200" dirty="0" smtClean="0">
+                        <a:rPr lang="en-US" sz="2200" b="0" i="0" kern="1200" dirty="0">
                           <a:solidFill>
                             <a:schemeClr val="tx1"/>
                           </a:solidFill>
@@ -17684,7 +17362,7 @@
                         </a:rPr>
                         <a:t>, fine-tune</a:t>
                       </a:r>
-                      <a:endParaRPr lang="ru-RU" sz="2200" dirty="0" smtClean="0"/>
+                      <a:endParaRPr lang="ru-RU" sz="2200" dirty="0"/>
                     </a:p>
                   </a:txBody>
                   <a:tcPr marL="23521" marR="23521" marT="11760" marB="11760" anchor="ctr"/>
@@ -17695,10 +17373,9 @@
                     <a:lstStyle/>
                     <a:p>
                       <a:r>
-                        <a:rPr lang="ru-RU" sz="2200" dirty="0" smtClean="0"/>
+                        <a:rPr lang="ru-RU" sz="2200" dirty="0"/>
                         <a:t>2023</a:t>
                       </a:r>
-                      <a:endParaRPr lang="ru-RU" sz="2200" dirty="0"/>
                     </a:p>
                   </a:txBody>
                   <a:tcPr marL="23521" marR="23521" marT="11760" marB="11760" anchor="ctr"/>
@@ -17716,7 +17393,7 @@
                     <a:lstStyle/>
                     <a:p>
                       <a:r>
-                        <a:rPr lang="en-US" sz="2200" b="0" i="0" kern="1200" dirty="0" err="1" smtClean="0">
+                        <a:rPr lang="en-US" sz="2200" b="0" i="0" kern="1200" dirty="0" err="1">
                           <a:solidFill>
                             <a:schemeClr val="tx1"/>
                           </a:solidFill>
@@ -17727,7 +17404,7 @@
                         </a:rPr>
                         <a:t>Moria</a:t>
                       </a:r>
-                      <a:endParaRPr lang="en-US" sz="2200" b="0" i="0" kern="1200" dirty="0" smtClean="0">
+                      <a:endParaRPr lang="en-US" sz="2200" b="0" i="0" kern="1200" dirty="0">
                         <a:solidFill>
                           <a:schemeClr val="tx1"/>
                         </a:solidFill>
@@ -17746,15 +17423,15 @@
                     <a:lstStyle/>
                     <a:p>
                       <a:r>
-                        <a:rPr lang="en-US" sz="2200" dirty="0" smtClean="0"/>
+                        <a:rPr lang="en-US" sz="2200" dirty="0"/>
                         <a:t>Encoder-only,</a:t>
                       </a:r>
                       <a:r>
-                        <a:rPr lang="en-US" sz="2200" baseline="0" dirty="0" smtClean="0"/>
+                        <a:rPr lang="en-US" sz="2200" baseline="0" dirty="0"/>
                         <a:t> </a:t>
                       </a:r>
                       <a:r>
-                        <a:rPr lang="en-US" sz="1800" b="0" i="0" kern="1200" dirty="0" smtClean="0">
+                        <a:rPr lang="en-US" sz="1800" b="0" i="0" kern="1200" dirty="0">
                           <a:solidFill>
                             <a:schemeClr val="tx1"/>
                           </a:solidFill>
@@ -17765,7 +17442,7 @@
                         </a:rPr>
                         <a:t>mixture distribution</a:t>
                       </a:r>
-                      <a:endParaRPr lang="en-US" sz="2200" dirty="0" smtClean="0"/>
+                      <a:endParaRPr lang="en-US" sz="2200" dirty="0"/>
                     </a:p>
                   </a:txBody>
                   <a:tcPr marL="23521" marR="23521" marT="11760" marB="11760" anchor="ctr"/>
@@ -17793,7 +17470,7 @@
                         <a:defRPr/>
                       </a:pPr>
                       <a:r>
-                        <a:rPr lang="ru-RU" sz="2200" b="0" i="0" kern="1200" dirty="0" smtClean="0">
+                        <a:rPr lang="ru-RU" sz="2200" b="0" i="0" kern="1200" dirty="0">
                           <a:solidFill>
                             <a:schemeClr val="tx1"/>
                           </a:solidFill>
@@ -17805,7 +17482,7 @@
                         <a:t>Предсказание, </a:t>
                       </a:r>
                       <a:r>
-                        <a:rPr lang="ru-RU" sz="2200" b="0" i="0" kern="1200" dirty="0" err="1" smtClean="0">
+                        <a:rPr lang="ru-RU" sz="2200" b="0" i="0" kern="1200" dirty="0" err="1">
                           <a:solidFill>
                             <a:schemeClr val="tx1"/>
                           </a:solidFill>
@@ -17817,7 +17494,7 @@
                         <a:t>Детекция</a:t>
                       </a:r>
                       <a:r>
-                        <a:rPr lang="ru-RU" sz="2200" b="0" i="0" kern="1200" dirty="0" smtClean="0">
+                        <a:rPr lang="ru-RU" sz="2200" b="0" i="0" kern="1200" dirty="0">
                           <a:solidFill>
                             <a:schemeClr val="tx1"/>
                           </a:solidFill>
@@ -17828,7 +17505,7 @@
                         </a:rPr>
                         <a:t> аномалий</a:t>
                       </a:r>
-                      <a:endParaRPr lang="ru-RU" sz="2200" dirty="0" smtClean="0"/>
+                      <a:endParaRPr lang="ru-RU" sz="2200" dirty="0"/>
                     </a:p>
                   </a:txBody>
                   <a:tcPr marL="23521" marR="23521" marT="11760" marB="11760" anchor="ctr"/>
@@ -17839,10 +17516,9 @@
                     <a:lstStyle/>
                     <a:p>
                       <a:r>
-                        <a:rPr lang="ru-RU" sz="2200" dirty="0" smtClean="0"/>
+                        <a:rPr lang="ru-RU" sz="2200" dirty="0"/>
                         <a:t>2023</a:t>
                       </a:r>
-                      <a:endParaRPr lang="ru-RU" sz="2200" dirty="0"/>
                     </a:p>
                   </a:txBody>
                   <a:tcPr marL="23521" marR="23521" marT="11760" marB="11760" anchor="ctr"/>
@@ -17860,7 +17536,7 @@
                     <a:lstStyle/>
                     <a:p>
                       <a:r>
-                        <a:rPr lang="en-US" sz="2200" b="0" i="0" kern="1200" dirty="0" err="1" smtClean="0">
+                        <a:rPr lang="en-US" sz="2200" b="0" i="0" kern="1200" dirty="0" err="1">
                           <a:solidFill>
                             <a:schemeClr val="tx1"/>
                           </a:solidFill>
@@ -17890,34 +17566,33 @@
                     <a:lstStyle/>
                     <a:p>
                       <a:r>
-                        <a:rPr lang="en-US" sz="2200" dirty="0" smtClean="0"/>
+                        <a:rPr lang="en-US" sz="2200" dirty="0"/>
                         <a:t>Decoder-only</a:t>
                       </a:r>
                       <a:r>
-                        <a:rPr lang="ru-RU" sz="2200" dirty="0" smtClean="0"/>
+                        <a:rPr lang="ru-RU" sz="2200" dirty="0"/>
                         <a:t> </a:t>
                       </a:r>
                       <a:r>
-                        <a:rPr lang="en-US" sz="2200" dirty="0" smtClean="0"/>
+                        <a:rPr lang="en-US" sz="2200" dirty="0"/>
                         <a:t>–</a:t>
                       </a:r>
                       <a:r>
-                        <a:rPr lang="en-US" sz="2200" baseline="0" dirty="0" smtClean="0"/>
+                        <a:rPr lang="en-US" sz="2200" baseline="0" dirty="0"/>
                         <a:t> </a:t>
                       </a:r>
                       <a:r>
-                        <a:rPr lang="ru-RU" sz="2200" baseline="0" dirty="0" smtClean="0"/>
+                        <a:rPr lang="ru-RU" sz="2200" baseline="0" dirty="0"/>
                         <a:t>ВР как текст, </a:t>
                       </a:r>
                       <a:r>
-                        <a:rPr lang="en-US" sz="2200" baseline="0" dirty="0" smtClean="0"/>
+                        <a:rPr lang="en-US" sz="2200" baseline="0" dirty="0"/>
                         <a:t> (200M)</a:t>
                       </a:r>
                       <a:r>
-                        <a:rPr lang="ru-RU" sz="2200" dirty="0" smtClean="0"/>
+                        <a:rPr lang="ru-RU" sz="2200" dirty="0"/>
                         <a:t>, </a:t>
                       </a:r>
-                      <a:endParaRPr lang="ru-RU" sz="2200" dirty="0"/>
                     </a:p>
                   </a:txBody>
                   <a:tcPr marL="23521" marR="23521" marT="11760" marB="11760" anchor="ctr"/>
@@ -17945,18 +17620,18 @@
                         <a:defRPr/>
                       </a:pPr>
                       <a:r>
-                        <a:rPr lang="en-US" sz="2200" dirty="0" smtClean="0"/>
+                        <a:rPr lang="en-US" sz="2200" dirty="0"/>
                         <a:t>Zero-shot,</a:t>
                       </a:r>
                       <a:r>
-                        <a:rPr lang="en-US" sz="2200" baseline="0" dirty="0" smtClean="0"/>
+                        <a:rPr lang="en-US" sz="2200" baseline="0" dirty="0"/>
                         <a:t> </a:t>
                       </a:r>
                       <a:r>
-                        <a:rPr lang="ru-RU" sz="2200" baseline="0" dirty="0" smtClean="0"/>
+                        <a:rPr lang="ru-RU" sz="2200" baseline="0" dirty="0"/>
                         <a:t>средний горизонт</a:t>
                       </a:r>
-                      <a:endParaRPr lang="ru-RU" sz="2200" dirty="0" smtClean="0"/>
+                      <a:endParaRPr lang="ru-RU" sz="2200" dirty="0"/>
                     </a:p>
                   </a:txBody>
                   <a:tcPr marL="23521" marR="23521" marT="11760" marB="11760" anchor="ctr"/>
@@ -17967,10 +17642,9 @@
                     <a:lstStyle/>
                     <a:p>
                       <a:r>
-                        <a:rPr lang="ru-RU" sz="2200" dirty="0" smtClean="0"/>
+                        <a:rPr lang="ru-RU" sz="2200" dirty="0"/>
                         <a:t>2023</a:t>
                       </a:r>
-                      <a:endParaRPr lang="ru-RU" sz="2200" dirty="0"/>
                     </a:p>
                   </a:txBody>
                   <a:tcPr marL="23521" marR="23521" marT="11760" marB="11760" anchor="ctr"/>
@@ -17988,7 +17662,7 @@
                     <a:lstStyle/>
                     <a:p>
                       <a:r>
-                        <a:rPr lang="en-US" sz="2200" b="0" i="0" kern="1200" dirty="0" smtClean="0">
+                        <a:rPr lang="en-US" sz="2200" b="0" i="0" kern="1200" dirty="0">
                           <a:solidFill>
                             <a:schemeClr val="tx1"/>
                           </a:solidFill>
@@ -17999,15 +17673,6 @@
                         </a:rPr>
                         <a:t>TTM</a:t>
                       </a:r>
-                      <a:endParaRPr lang="en-US" sz="2200" b="0" i="0" kern="1200" dirty="0">
-                        <a:solidFill>
-                          <a:schemeClr val="tx1"/>
-                        </a:solidFill>
-                        <a:effectLst/>
-                        <a:latin typeface="+mn-lt"/>
-                        <a:ea typeface="+mn-ea"/>
-                        <a:cs typeface="+mn-cs"/>
-                      </a:endParaRPr>
                     </a:p>
                   </a:txBody>
                   <a:tcPr marL="23521" marR="23521" marT="11760" marB="11760" anchor="ctr"/>
@@ -18018,7 +17683,7 @@
                     <a:lstStyle/>
                     <a:p>
                       <a:r>
-                        <a:rPr lang="en-US" sz="1800" b="0" i="0" kern="1200" dirty="0" smtClean="0">
+                        <a:rPr lang="en-US" sz="1800" b="0" i="0" kern="1200" dirty="0">
                           <a:solidFill>
                             <a:schemeClr val="tx1"/>
                           </a:solidFill>
@@ -18030,7 +17695,7 @@
                         <a:t>Tiny Time Mixers </a:t>
                       </a:r>
                       <a:r>
-                        <a:rPr lang="ru-RU" sz="1800" b="0" i="0" kern="1200" dirty="0" smtClean="0">
+                        <a:rPr lang="ru-RU" sz="1800" b="0" i="0" kern="1200" dirty="0">
                           <a:solidFill>
                             <a:schemeClr val="tx1"/>
                           </a:solidFill>
@@ -18042,7 +17707,7 @@
                         <a:t>от</a:t>
                       </a:r>
                       <a:r>
-                        <a:rPr lang="ru-RU" sz="1800" b="0" i="0" kern="1200" baseline="0" dirty="0" smtClean="0">
+                        <a:rPr lang="ru-RU" sz="1800" b="0" i="0" kern="1200" baseline="0" dirty="0">
                           <a:solidFill>
                             <a:schemeClr val="tx1"/>
                           </a:solidFill>
@@ -18054,7 +17719,7 @@
                         <a:t> 1М</a:t>
                       </a:r>
                       <a:r>
-                        <a:rPr lang="en-US" sz="1800" b="0" i="0" kern="1200" baseline="0" dirty="0" smtClean="0">
+                        <a:rPr lang="en-US" sz="1800" b="0" i="0" kern="1200" baseline="0" dirty="0">
                           <a:solidFill>
                             <a:schemeClr val="tx1"/>
                           </a:solidFill>
@@ -18066,7 +17731,7 @@
                         <a:t> </a:t>
                       </a:r>
                       <a:r>
-                        <a:rPr lang="ru-RU" sz="1800" b="0" i="0" kern="1200" baseline="0" dirty="0" smtClean="0">
+                        <a:rPr lang="ru-RU" sz="1800" b="0" i="0" kern="1200" baseline="0" dirty="0">
                           <a:solidFill>
                             <a:schemeClr val="tx1"/>
                           </a:solidFill>
@@ -18105,14 +17770,14 @@
                         <a:defRPr/>
                       </a:pPr>
                       <a:r>
-                        <a:rPr lang="en-US" sz="2200" dirty="0" smtClean="0"/>
+                        <a:rPr lang="en-US" sz="2200" dirty="0"/>
                         <a:t>Zero-shot in Poor</a:t>
                       </a:r>
                       <a:r>
-                        <a:rPr lang="en-US" sz="2200" baseline="0" dirty="0" smtClean="0"/>
+                        <a:rPr lang="en-US" sz="2200" baseline="0" dirty="0"/>
                         <a:t> performance devices</a:t>
                       </a:r>
-                      <a:endParaRPr lang="ru-RU" sz="2200" dirty="0" smtClean="0"/>
+                      <a:endParaRPr lang="ru-RU" sz="2200" dirty="0"/>
                     </a:p>
                   </a:txBody>
                   <a:tcPr marL="23521" marR="23521" marT="11760" marB="11760" anchor="ctr"/>
@@ -18123,7 +17788,7 @@
                     <a:lstStyle/>
                     <a:p>
                       <a:r>
-                        <a:rPr lang="en-US" sz="2200" dirty="0" smtClean="0"/>
+                        <a:rPr lang="en-US" sz="2200" dirty="0"/>
                         <a:t>2024</a:t>
                       </a:r>
                       <a:endParaRPr lang="ru-RU" sz="2200" dirty="0"/>
@@ -18252,32 +17917,31 @@
               <a:t> </a:t>
             </a:r>
             <a:r>
-              <a:rPr lang="ru-RU" dirty="0" smtClean="0"/>
+              <a:rPr lang="ru-RU" dirty="0"/>
               <a:t>бывают также диффузионные, </a:t>
             </a:r>
             <a:r>
-              <a:rPr lang="en-US" dirty="0" smtClean="0"/>
+              <a:rPr lang="en-US" dirty="0"/>
               <a:t>state-space-, </a:t>
             </a:r>
             <a:r>
-              <a:rPr lang="ru-RU" dirty="0" smtClean="0"/>
+              <a:rPr lang="ru-RU" dirty="0"/>
               <a:t>и другие типы экспериментальных моделей,</a:t>
             </a:r>
           </a:p>
           <a:p>
             <a:r>
-              <a:rPr lang="ru-RU" dirty="0" smtClean="0"/>
+              <a:rPr lang="ru-RU" dirty="0"/>
               <a:t>Также </a:t>
             </a:r>
             <a:r>
-              <a:rPr lang="ru-RU" dirty="0" err="1" smtClean="0"/>
+              <a:rPr lang="ru-RU" dirty="0" err="1"/>
               <a:t>мультимодальные</a:t>
             </a:r>
             <a:r>
-              <a:rPr lang="ru-RU" dirty="0" smtClean="0"/>
+              <a:rPr lang="ru-RU" dirty="0"/>
               <a:t>, и другие модели. </a:t>
             </a:r>
-            <a:endParaRPr lang="ru-RU" dirty="0"/>
           </a:p>
         </p:txBody>
       </p:sp>
@@ -18377,52 +18041,31 @@
               <a:buNone/>
             </a:pPr>
             <a:r>
-              <a:rPr lang="ru-RU" sz="2400" b="1" dirty="0" smtClean="0"/>
+              <a:rPr lang="ru-RU" sz="2400" b="1" dirty="0"/>
               <a:t>Преимущества:</a:t>
             </a:r>
-            <a:endParaRPr lang="ru-RU" sz="2400" b="1" dirty="0"/>
-          </a:p>
-          <a:p>
-            <a:r>
-              <a:rPr lang="ru-RU" sz="2400" dirty="0" smtClean="0"/>
-              <a:t>Малые </a:t>
-            </a:r>
+          </a:p>
+          <a:p>
             <a:r>
               <a:rPr lang="ru-RU" sz="2400" dirty="0"/>
-              <a:t>данные</a:t>
-            </a:r>
-            <a:r>
-              <a:rPr lang="ru-RU" sz="2400" dirty="0" smtClean="0"/>
-              <a:t>: </a:t>
-            </a:r>
+              <a:t>Малые данные: эффективны при ограниченных исторических данных</a:t>
+            </a:r>
+          </a:p>
+          <a:p>
             <a:r>
               <a:rPr lang="ru-RU" sz="2400" dirty="0"/>
-              <a:t>эффективны при ограниченных исторических данных</a:t>
-            </a:r>
-          </a:p>
-          <a:p>
-            <a:r>
-              <a:rPr lang="ru-RU" sz="2400" dirty="0" smtClean="0"/>
               <a:t>Новые домены:</a:t>
             </a:r>
             <a:r>
-              <a:rPr lang="en-US" sz="2400" dirty="0" smtClean="0"/>
+              <a:rPr lang="en-US" sz="2400" dirty="0"/>
               <a:t> </a:t>
             </a:r>
             <a:r>
-              <a:rPr lang="ru-RU" sz="2400" dirty="0" smtClean="0"/>
-              <a:t>быстрая </a:t>
-            </a:r>
-            <a:r>
               <a:rPr lang="ru-RU" sz="2400" dirty="0"/>
-              <a:t>адаптация к новым типам временных </a:t>
-            </a:r>
-            <a:r>
-              <a:rPr lang="ru-RU" sz="2400" dirty="0" smtClean="0"/>
-              <a:t>рядов</a:t>
-            </a:r>
-            <a:r>
-              <a:rPr lang="en-US" sz="2400" dirty="0" smtClean="0"/>
+              <a:t>быстрая адаптация к новым типам временных рядов</a:t>
+            </a:r>
+            <a:r>
+              <a:rPr lang="en-US" sz="2400" dirty="0"/>
               <a:t> (</a:t>
             </a:r>
             <a:r>
@@ -18434,31 +18077,19 @@
               <a:t> </a:t>
             </a:r>
             <a:r>
-              <a:rPr lang="ru-RU" sz="2400" dirty="0" err="1" smtClean="0"/>
+              <a:rPr lang="ru-RU" sz="2400" dirty="0" err="1"/>
               <a:t>start</a:t>
             </a:r>
             <a:r>
-              <a:rPr lang="en-US" sz="2400" dirty="0" smtClean="0"/>
+              <a:rPr lang="en-US" sz="2400" dirty="0"/>
               <a:t>)</a:t>
             </a:r>
             <a:endParaRPr lang="ru-RU" sz="2400" dirty="0"/>
           </a:p>
           <a:p>
             <a:r>
-              <a:rPr lang="ru-RU" sz="2400" dirty="0" smtClean="0"/>
-              <a:t>Множественные </a:t>
-            </a:r>
-            <a:r>
               <a:rPr lang="ru-RU" sz="2400" dirty="0"/>
-              <a:t>задачи</a:t>
-            </a:r>
-            <a:r>
-              <a:rPr lang="ru-RU" sz="2400" dirty="0" smtClean="0"/>
-              <a:t>: </a:t>
-            </a:r>
-            <a:r>
-              <a:rPr lang="ru-RU" sz="2400" dirty="0"/>
-              <a:t>одна модель для различных </a:t>
+              <a:t>Множественные задачи: одна модель для различных </a:t>
             </a:r>
             <a:r>
               <a:rPr lang="ru-RU" sz="2400" dirty="0" err="1"/>
@@ -18474,85 +18105,52 @@
               <a:buNone/>
             </a:pPr>
             <a:r>
-              <a:rPr lang="ru-RU" sz="2400" b="1" dirty="0" smtClean="0"/>
+              <a:rPr lang="ru-RU" sz="2400" b="1" dirty="0"/>
               <a:t>Ограничения:</a:t>
             </a:r>
-            <a:endParaRPr lang="ru-RU" sz="2400" b="1" dirty="0"/>
-          </a:p>
-          <a:p>
-            <a:r>
-              <a:rPr lang="ru-RU" sz="2400" dirty="0" smtClean="0"/>
-              <a:t>Вычислительные </a:t>
-            </a:r>
+          </a:p>
+          <a:p>
             <a:r>
               <a:rPr lang="ru-RU" sz="2400" dirty="0"/>
-              <a:t>требования</a:t>
-            </a:r>
-            <a:r>
-              <a:rPr lang="ru-RU" sz="2400" dirty="0" smtClean="0"/>
-              <a:t>: </a:t>
-            </a:r>
+              <a:t>Вычислительные требования: высокие требования к GPU/TPU</a:t>
+            </a:r>
+          </a:p>
+          <a:p>
             <a:r>
               <a:rPr lang="ru-RU" sz="2400" dirty="0"/>
-              <a:t>высокие требования к GPU/TPU</a:t>
-            </a:r>
-          </a:p>
-          <a:p>
-            <a:r>
-              <a:rPr lang="ru-RU" sz="2400" dirty="0" smtClean="0"/>
               <a:t>Интерпретируемость:</a:t>
             </a:r>
             <a:r>
-              <a:rPr lang="en-US" sz="2400" dirty="0" smtClean="0"/>
+              <a:rPr lang="en-US" sz="2400" dirty="0"/>
               <a:t> </a:t>
             </a:r>
             <a:r>
-              <a:rPr lang="ru-RU" sz="2400" dirty="0" smtClean="0"/>
-              <a:t>сложно </a:t>
-            </a:r>
-            <a:r>
               <a:rPr lang="ru-RU" sz="2400" dirty="0"/>
-              <a:t>понять логику принятия решений</a:t>
-            </a:r>
-          </a:p>
-          <a:p>
-            <a:r>
-              <a:rPr lang="ru-RU" sz="2400" dirty="0" err="1" smtClean="0"/>
+              <a:t>сложно понять логику принятия решений</a:t>
+            </a:r>
+          </a:p>
+          <a:p>
+            <a:r>
+              <a:rPr lang="ru-RU" sz="2400" dirty="0" err="1"/>
               <a:t>Domain</a:t>
             </a:r>
             <a:r>
-              <a:rPr lang="ru-RU" sz="2400" dirty="0" smtClean="0"/>
+              <a:rPr lang="ru-RU" sz="2400" dirty="0"/>
               <a:t> </a:t>
             </a:r>
             <a:r>
-              <a:rPr lang="ru-RU" sz="2400" dirty="0" err="1" smtClean="0"/>
+              <a:rPr lang="ru-RU" sz="2400" dirty="0" err="1"/>
               <a:t>expertise</a:t>
             </a:r>
             <a:r>
-              <a:rPr lang="ru-RU" sz="2400" dirty="0" smtClean="0"/>
-              <a:t>: </a:t>
-            </a:r>
-            <a:r>
               <a:rPr lang="ru-RU" sz="2400" dirty="0"/>
-              <a:t>могут пропускать специфичные для домена знания</a:t>
-            </a:r>
-          </a:p>
-          <a:p>
-            <a:r>
-              <a:rPr lang="ru-RU" sz="2400" dirty="0" smtClean="0"/>
-              <a:t>Калибровка </a:t>
-            </a:r>
+              <a:t>: могут пропускать специфичные для домена знания</a:t>
+            </a:r>
+          </a:p>
+          <a:p>
             <a:r>
               <a:rPr lang="ru-RU" sz="2400" dirty="0"/>
-              <a:t>неопределенности</a:t>
-            </a:r>
-            <a:r>
-              <a:rPr lang="ru-RU" sz="2400" dirty="0" smtClean="0"/>
-              <a:t>: </a:t>
-            </a:r>
-            <a:r>
-              <a:rPr lang="ru-RU" sz="2400" dirty="0"/>
-              <a:t>сложность в оценке </a:t>
+              <a:t>Калибровка неопределенности: сложность в оценке </a:t>
             </a:r>
             <a:r>
               <a:rPr lang="ru-RU" sz="2400" dirty="0" err="1"/>
@@ -18580,13 +18178,6 @@
   <p:clrMapOvr>
     <a:masterClrMapping/>
   </p:clrMapOvr>
-  <p:timing>
-    <p:tnLst>
-      <p:par>
-        <p:cTn id="1" dur="indefinite" restart="never" nodeType="tmRoot"/>
-      </p:par>
-    </p:tnLst>
-  </p:timing>
 </p:sld>
 </file>
 
@@ -18822,13 +18413,8 @@
             </a:r>
             <a:r>
               <a:rPr lang="en-US" sz="7200" dirty="0"/>
-              <a:t> zero-shot, in-context learning, </a:t>
-            </a:r>
-            <a:r>
-              <a:rPr lang="en-US" sz="7200" dirty="0" smtClean="0"/>
-              <a:t>chain-of-thought</a:t>
-            </a:r>
-            <a:endParaRPr lang="en-US" sz="7200" dirty="0"/>
+              <a:t> zero-shot, in-context learning, chain-of-thought</a:t>
+            </a:r>
           </a:p>
         </p:txBody>
       </p:sp>
@@ -19042,21 +18628,6 @@
   <p:clrMapOvr>
     <a:masterClrMapping/>
   </p:clrMapOvr>
-  <mc:AlternateContent xmlns:mc="http://schemas.openxmlformats.org/markup-compatibility/2006" xmlns:p14="http://schemas.microsoft.com/office/powerpoint/2010/main">
-    <mc:Choice Requires="p14">
-      <p:transition spd="slow" p14:dur="2000"/>
-    </mc:Choice>
-    <mc:Fallback xmlns="">
-      <p:transition spd="slow"/>
-    </mc:Fallback>
-  </mc:AlternateContent>
-  <p:timing>
-    <p:tnLst>
-      <p:par>
-        <p:cTn id="1" dur="indefinite" restart="never" nodeType="tmRoot"/>
-      </p:par>
-    </p:tnLst>
-  </p:timing>
 </p:sld>
 </file>
 
@@ -19844,14 +19415,6 @@
   <p:clrMapOvr>
     <a:masterClrMapping/>
   </p:clrMapOvr>
-  <mc:AlternateContent xmlns:mc="http://schemas.openxmlformats.org/markup-compatibility/2006" xmlns:p14="http://schemas.microsoft.com/office/powerpoint/2010/main">
-    <mc:Choice Requires="p14">
-      <p:transition spd="slow" p14:dur="2000"/>
-    </mc:Choice>
-    <mc:Fallback xmlns="">
-      <p:transition spd="slow"/>
-    </mc:Fallback>
-  </mc:AlternateContent>
 </p:sld>
 </file>
 
@@ -19979,7 +19542,7 @@
                   <a:buNone/>
                 </a:pPr>
                 <a:r>
-                  <a:rPr lang="ru-RU" sz="2300" dirty="0" smtClean="0"/>
+                  <a:rPr lang="ru-RU" sz="2300" dirty="0"/>
                   <a:t>Задача </a:t>
                 </a:r>
                 <a:r>
@@ -19992,29 +19555,25 @@
                 </a:r>
                 <a:r>
                   <a:rPr lang="en-US" sz="2300" dirty="0"/>
-                  <a:t>-to-sequence (Seq2Seq</a:t>
+                  <a:t>-to-sequence (Seq2Seq) –</a:t>
                 </a:r>
                 <a:r>
-                  <a:rPr lang="en-US" sz="2300" dirty="0" smtClean="0"/>
-                  <a:t>) –</a:t>
-                </a:r>
-                <a:r>
-                  <a:rPr lang="ru-RU" sz="2300" dirty="0" smtClean="0"/>
+                  <a:rPr lang="ru-RU" sz="2300" dirty="0"/>
                   <a:t> это </a:t>
                 </a:r>
                 <a:r>
-                  <a:rPr lang="ru-RU" sz="2300" dirty="0" err="1" smtClean="0"/>
+                  <a:rPr lang="ru-RU" sz="2300" dirty="0" err="1"/>
                   <a:t>задачапредсказания</a:t>
                 </a:r>
                 <a:r>
-                  <a:rPr lang="ru-RU" sz="2300" dirty="0" smtClean="0"/>
+                  <a:rPr lang="ru-RU" sz="2300" dirty="0"/>
                   <a:t> набора будущих </a:t>
                 </a:r>
                 <a:br>
-                  <a:rPr lang="ru-RU" sz="2300" dirty="0" smtClean="0"/>
+                  <a:rPr lang="ru-RU" sz="2300" dirty="0"/>
                 </a:br>
                 <a:r>
-                  <a:rPr lang="ru-RU" sz="2300" dirty="0" smtClean="0"/>
+                  <a:rPr lang="ru-RU" sz="2300" dirty="0"/>
                   <a:t>значений </a:t>
                 </a:r>
                 <a14:m>
@@ -20120,23 +19679,15 @@
                   </m:oMath>
                 </a14:m>
                 <a:r>
-                  <a:rPr lang="en-US" sz="2300" dirty="0" smtClean="0"/>
+                  <a:rPr lang="en-US" sz="2300" dirty="0"/>
                   <a:t> </a:t>
                 </a:r>
                 <a:r>
-                  <a:rPr lang="ru-RU" sz="2300" dirty="0" smtClean="0"/>
-                  <a:t>по </a:t>
+                  <a:rPr lang="ru-RU" sz="2300" dirty="0"/>
+                  <a:t>по входным данным</a:t>
                 </a:r>
                 <a:r>
-                  <a:rPr lang="ru-RU" sz="2300" dirty="0"/>
-                  <a:t>входным </a:t>
-                </a:r>
-                <a:r>
-                  <a:rPr lang="ru-RU" sz="2300" dirty="0" smtClean="0"/>
-                  <a:t>данным</a:t>
-                </a:r>
-                <a:r>
-                  <a:rPr lang="en-US" sz="2300" dirty="0" smtClean="0"/>
+                  <a:rPr lang="en-US" sz="2300" dirty="0"/>
                   <a:t> </a:t>
                 </a:r>
                 <a14:m>
@@ -20588,13 +20139,6 @@
   <p:clrMapOvr>
     <a:masterClrMapping/>
   </p:clrMapOvr>
-  <p:timing>
-    <p:tnLst>
-      <p:par>
-        <p:cTn id="1" dur="indefinite" restart="never" nodeType="tmRoot"/>
-      </p:par>
-    </p:tnLst>
-  </p:timing>
 </p:sld>
 </file>
 
@@ -20668,14 +20212,10 @@
             </a:r>
             <a:r>
               <a:rPr lang="ru-RU" b="1" dirty="0"/>
-              <a:t> в </a:t>
-            </a:r>
-            <a:r>
-              <a:rPr lang="ru-RU" b="1" dirty="0" smtClean="0"/>
-              <a:t>режиме </a:t>
-            </a:r>
-            <a:r>
-              <a:rPr lang="ru-RU" dirty="0" err="1" smtClean="0"/>
+              <a:t> в режиме </a:t>
+            </a:r>
+            <a:r>
+              <a:rPr lang="ru-RU" dirty="0" err="1"/>
               <a:t>Seq</a:t>
             </a:r>
             <a:r>
@@ -20720,51 +20260,47 @@
                   <a:buNone/>
                 </a:pPr>
                 <a:r>
-                  <a:rPr lang="ru-RU" sz="2200" b="1" dirty="0" smtClean="0"/>
+                  <a:rPr lang="ru-RU" sz="2200" b="1" dirty="0"/>
                   <a:t>Гипотеза: </a:t>
                 </a:r>
                 <a:r>
-                  <a:rPr lang="ru-RU" sz="2200" dirty="0" smtClean="0"/>
+                  <a:rPr lang="ru-RU" sz="2200" dirty="0"/>
                   <a:t>Регуляризация переобучения </a:t>
                 </a:r>
                 <a:r>
-                  <a:rPr lang="en-US" sz="2200" dirty="0" smtClean="0"/>
+                  <a:rPr lang="en-US" sz="2200" dirty="0"/>
                   <a:t>RNN </a:t>
                 </a:r>
                 <a:r>
-                  <a:rPr lang="ru-RU" sz="2200" dirty="0" smtClean="0"/>
+                  <a:rPr lang="ru-RU" sz="2200" dirty="0"/>
                   <a:t>возможна, если расширить скрытое представление</a:t>
                 </a:r>
               </a:p>
               <a:p>
                 <a:r>
-                  <a:rPr lang="ru-RU" sz="2200" dirty="0" smtClean="0"/>
+                  <a:rPr lang="ru-RU" sz="2200" dirty="0"/>
                   <a:t>по сути требуется расширить контекст</a:t>
                 </a:r>
                 <a:r>
-                  <a:rPr lang="ru-RU" sz="2200" b="1" dirty="0" smtClean="0"/>
+                  <a:rPr lang="ru-RU" sz="2200" b="1" dirty="0"/>
                   <a:t> </a:t>
                 </a:r>
-                <a:endParaRPr lang="en-US" sz="2200" b="1" dirty="0" smtClean="0"/>
+                <a:endParaRPr lang="en-US" sz="2200" b="1" dirty="0"/>
               </a:p>
               <a:p>
                 <a:pPr marL="0" indent="0">
                   <a:buNone/>
                 </a:pPr>
                 <a:r>
-                  <a:rPr lang="ru-RU" sz="2200" b="1" dirty="0" smtClean="0"/>
-                  <a:t>Идея: модель </a:t>
+                  <a:rPr lang="ru-RU" sz="2200" b="1" dirty="0"/>
+                  <a:t>Идея: модель могла бы </a:t>
+                </a:r>
+                <a:r>
+                  <a:rPr lang="ru-RU" sz="2200" dirty="0"/>
+                  <a:t>смотреть</a:t>
                 </a:r>
                 <a:r>
                   <a:rPr lang="ru-RU" sz="2200" b="1" dirty="0"/>
-                  <a:t>могла бы </a:t>
-                </a:r>
-                <a:r>
-                  <a:rPr lang="ru-RU" sz="2200" dirty="0" smtClean="0"/>
-                  <a:t>смотреть</a:t>
-                </a:r>
-                <a:r>
-                  <a:rPr lang="ru-RU" sz="2200" b="1" dirty="0" smtClean="0"/>
                   <a:t> на набор значений   </a:t>
                 </a:r>
                 <a14:m>
@@ -20846,7 +20382,7 @@
                   </m:oMath>
                 </a14:m>
                 <a:r>
-                  <a:rPr lang="en-US" sz="2200" b="1" dirty="0" smtClean="0"/>
+                  <a:rPr lang="en-US" sz="2200" b="1" dirty="0"/>
                   <a:t> </a:t>
                 </a:r>
               </a:p>
@@ -20855,23 +20391,23 @@
                   <a:buNone/>
                 </a:pPr>
                 <a:r>
-                  <a:rPr lang="ru-RU" sz="2200" b="1" dirty="0" smtClean="0"/>
+                  <a:rPr lang="ru-RU" sz="2200" b="1" dirty="0"/>
                   <a:t>Реализация:</a:t>
                 </a:r>
                 <a:r>
-                  <a:rPr lang="en-US" sz="2200" b="1" dirty="0" smtClean="0"/>
+                  <a:rPr lang="en-US" sz="2200" b="1" dirty="0"/>
                   <a:t> </a:t>
                 </a:r>
                 <a:r>
-                  <a:rPr lang="ru-RU" sz="2200" dirty="0" smtClean="0"/>
+                  <a:rPr lang="ru-RU" sz="2200" dirty="0"/>
                   <a:t>Пусть </a:t>
                 </a:r>
                 <a:r>
-                  <a:rPr lang="ru-RU" sz="2200" dirty="0" err="1" smtClean="0"/>
+                  <a:rPr lang="ru-RU" sz="2200" dirty="0" err="1"/>
                   <a:t>энкодер</a:t>
                 </a:r>
                 <a:r>
-                  <a:rPr lang="ru-RU" sz="2200" dirty="0" smtClean="0"/>
+                  <a:rPr lang="ru-RU" sz="2200" dirty="0"/>
                   <a:t> глубины </a:t>
                 </a:r>
                 <a14:m>
@@ -20885,11 +20421,11 @@
                   </m:oMath>
                 </a14:m>
                 <a:r>
-                  <a:rPr lang="en-US" sz="2200" dirty="0" smtClean="0"/>
+                  <a:rPr lang="en-US" sz="2200" dirty="0"/>
                   <a:t> </a:t>
                 </a:r>
                 <a:r>
-                  <a:rPr lang="ru-RU" sz="2200" dirty="0" smtClean="0"/>
+                  <a:rPr lang="ru-RU" sz="2200" dirty="0"/>
                   <a:t>и  горизонт предсказания </a:t>
                 </a:r>
                 <a14:m>
@@ -20908,29 +20444,29 @@
                     </m:r>
                   </m:oMath>
                 </a14:m>
-                <a:endParaRPr lang="ru-RU" sz="2200" dirty="0" smtClean="0"/>
+                <a:endParaRPr lang="ru-RU" sz="2200" dirty="0"/>
               </a:p>
               <a:p>
                 <a:pPr marL="0" indent="0">
                   <a:buNone/>
                 </a:pPr>
                 <a:r>
-                  <a:rPr lang="ru-RU" sz="2200" b="1" dirty="0" smtClean="0"/>
+                  <a:rPr lang="ru-RU" sz="2200" b="1" dirty="0"/>
                   <a:t>Перепишем</a:t>
                 </a:r>
                 <a:r>
-                  <a:rPr lang="en-US" sz="2200" b="1" dirty="0" smtClean="0"/>
+                  <a:rPr lang="en-US" sz="2200" b="1" dirty="0"/>
                   <a:t> </a:t>
                 </a:r>
                 <a:r>
-                  <a:rPr lang="ru-RU" sz="2200" b="1" dirty="0" smtClean="0"/>
+                  <a:rPr lang="ru-RU" sz="2200" b="1" dirty="0"/>
                   <a:t>скрытое состояние декодер </a:t>
                 </a:r>
                 <a:r>
-                  <a:rPr lang="en-US" sz="2200" b="1" dirty="0" smtClean="0"/>
+                  <a:rPr lang="en-US" sz="2200" b="1" dirty="0"/>
                   <a:t>Seq2Seq RNN</a:t>
                 </a:r>
-                <a:endParaRPr lang="ru-RU" sz="2200" i="1" dirty="0" smtClean="0">
+                <a:endParaRPr lang="ru-RU" sz="2200" i="1" dirty="0">
                   <a:latin typeface="Cambria Math" panose="02040503050406030204" pitchFamily="18" charset="0"/>
                 </a:endParaRPr>
               </a:p>
@@ -21270,7 +20806,7 @@
                     </m:oMath>
                   </m:oMathPara>
                 </a14:m>
-                <a:endParaRPr lang="ru-RU" sz="2200" b="1" dirty="0" smtClean="0"/>
+                <a:endParaRPr lang="ru-RU" sz="2200" b="1" dirty="0"/>
               </a:p>
               <a:p>
                 <a:pPr marL="0" indent="0">
@@ -21289,7 +20825,7 @@
                   <a:t>гд</a:t>
                 </a:r>
                 <a:r>
-                  <a:rPr lang="ru-RU" sz="2200" i="1" dirty="0" smtClean="0">
+                  <a:rPr lang="ru-RU" sz="2200" i="1" dirty="0">
                     <a:latin typeface="Cambria Math" panose="02040503050406030204" pitchFamily="18" charset="0"/>
                   </a:rPr>
                   <a:t>е</a:t>
@@ -21553,25 +21089,13 @@
                   <a:rPr lang="en-US" sz="2200" i="1" dirty="0">
                     <a:latin typeface="Cambria Math" panose="02040503050406030204" pitchFamily="18" charset="0"/>
                   </a:rPr>
-                  <a:t> </a:t>
-                </a:r>
-                <a:r>
-                  <a:rPr lang="en-US" sz="2200" i="1" dirty="0" smtClean="0">
-                    <a:latin typeface="Cambria Math" panose="02040503050406030204" pitchFamily="18" charset="0"/>
-                  </a:rPr>
-                  <a:t>(</a:t>
-                </a:r>
-                <a:r>
-                  <a:rPr lang="ru-RU" sz="2200" i="1" dirty="0" smtClean="0">
-                    <a:latin typeface="Cambria Math" panose="02040503050406030204" pitchFamily="18" charset="0"/>
-                  </a:rPr>
-                  <a:t>контекст), </a:t>
+                  <a:t> (</a:t>
                 </a:r>
                 <a:r>
                   <a:rPr lang="ru-RU" sz="2200" i="1" dirty="0">
                     <a:latin typeface="Cambria Math" panose="02040503050406030204" pitchFamily="18" charset="0"/>
                   </a:rPr>
-                  <a:t>как результат предыдущих (</a:t>
+                  <a:t>контекст), как результат предыдущих (</a:t>
                 </a:r>
                 <a:r>
                   <a:rPr lang="en-US" sz="2200" i="1" dirty="0" err="1">
@@ -21606,47 +21130,26 @@
                   <a:rPr lang="ru-RU" sz="2200" i="1" dirty="0">
                     <a:latin typeface="Cambria Math" panose="02040503050406030204" pitchFamily="18" charset="0"/>
                   </a:rPr>
-                  <a:t>кая идея </a:t>
+                  <a:t>кая идея называется внимание </a:t>
                 </a:r>
                 <a:r>
-                  <a:rPr lang="ru-RU" sz="2200" i="1" dirty="0" smtClean="0">
+                  <a:rPr lang="ru-RU" sz="2200" i="1" dirty="0" err="1">
                     <a:latin typeface="Cambria Math" panose="02040503050406030204" pitchFamily="18" charset="0"/>
                   </a:rPr>
-                  <a:t>называется </a:t>
+                  <a:t>энкодер</a:t>
                 </a:r>
                 <a:r>
                   <a:rPr lang="ru-RU" sz="2200" i="1" dirty="0">
                     <a:latin typeface="Cambria Math" panose="02040503050406030204" pitchFamily="18" charset="0"/>
                   </a:rPr>
-                  <a:t>внимание</a:t>
-                </a:r>
-                <a:r>
-                  <a:rPr lang="ru-RU" sz="2200" i="1" dirty="0" smtClean="0">
-                    <a:latin typeface="Cambria Math" panose="02040503050406030204" pitchFamily="18" charset="0"/>
-                  </a:rPr>
-                  <a:t> </a:t>
-                </a:r>
-                <a:r>
-                  <a:rPr lang="ru-RU" sz="2200" i="1" dirty="0" err="1" smtClean="0">
-                    <a:latin typeface="Cambria Math" panose="02040503050406030204" pitchFamily="18" charset="0"/>
-                  </a:rPr>
-                  <a:t>энкодер</a:t>
-                </a:r>
-                <a:r>
-                  <a:rPr lang="ru-RU" sz="2200" i="1" dirty="0" smtClean="0">
-                    <a:latin typeface="Cambria Math" panose="02040503050406030204" pitchFamily="18" charset="0"/>
-                  </a:rPr>
                   <a:t>-декодер</a:t>
                 </a:r>
-                <a:endParaRPr lang="ru-RU" sz="2200" i="1" dirty="0">
-                  <a:latin typeface="Cambria Math" panose="02040503050406030204" pitchFamily="18" charset="0"/>
-                </a:endParaRPr>
               </a:p>
               <a:p>
                 <a:pPr marL="0" indent="0">
                   <a:buNone/>
                 </a:pPr>
-                <a:endParaRPr lang="ru-RU" sz="2200" b="1" dirty="0" smtClean="0"/>
+                <a:endParaRPr lang="ru-RU" sz="2200" b="1" dirty="0"/>
               </a:p>
               <a:p>
                 <a:pPr marL="0" indent="0">
@@ -21786,7 +21289,7 @@
                   </a:spcBef>
                 </a:pPr>
                 <a:r>
-                  <a:rPr lang="ru-RU" i="1" dirty="0" smtClean="0">
+                  <a:rPr lang="ru-RU" i="1" dirty="0">
                     <a:latin typeface="Cambria Math" panose="02040503050406030204" pitchFamily="18" charset="0"/>
                   </a:rPr>
                   <a:t>В примере из </a:t>
@@ -21852,7 +21355,7 @@
                   </m:oMath>
                 </a14:m>
                 <a:r>
-                  <a:rPr lang="ru-RU" i="1" dirty="0" smtClean="0">
+                  <a:rPr lang="ru-RU" i="1" dirty="0">
                     <a:latin typeface="Cambria Math" panose="02040503050406030204" pitchFamily="18" charset="0"/>
                   </a:rPr>
                   <a:t>и </a:t>
@@ -21918,24 +21421,18 @@
                   </m:oMath>
                 </a14:m>
                 <a:r>
-                  <a:rPr lang="ru-RU" i="1" dirty="0" smtClean="0">
+                  <a:rPr lang="ru-RU" i="1" dirty="0">
                     <a:latin typeface="Cambria Math" panose="02040503050406030204" pitchFamily="18" charset="0"/>
                   </a:rPr>
                   <a:t> </a:t>
                 </a:r>
-                <a:r>
-                  <a:rPr lang="en-US" i="1" dirty="0" smtClean="0">
-                    <a:latin typeface="Cambria Math" panose="02040503050406030204" pitchFamily="18" charset="0"/>
-                  </a:rPr>
-                  <a:t/>
-                </a:r>
                 <a:br>
-                  <a:rPr lang="en-US" i="1" dirty="0" smtClean="0">
+                  <a:rPr lang="en-US" i="1" dirty="0">
                     <a:latin typeface="Cambria Math" panose="02040503050406030204" pitchFamily="18" charset="0"/>
                   </a:rPr>
                 </a:br>
                 <a:r>
-                  <a:rPr lang="ru-RU" i="1" dirty="0" smtClean="0">
+                  <a:rPr lang="ru-RU" i="1" dirty="0">
                     <a:latin typeface="Cambria Math" panose="02040503050406030204" pitchFamily="18" charset="0"/>
                   </a:rPr>
                   <a:t>создается новый вектор </a:t>
@@ -21970,7 +21467,7 @@
                   </m:oMath>
                 </a14:m>
                 <a:r>
-                  <a:rPr lang="ru-RU" i="1" dirty="0" smtClean="0">
+                  <a:rPr lang="ru-RU" i="1" dirty="0">
                     <a:latin typeface="Cambria Math" panose="02040503050406030204" pitchFamily="18" charset="0"/>
                   </a:rPr>
                   <a:t> для  предсказания </a:t>
@@ -22084,13 +21581,6 @@
   <p:clrMapOvr>
     <a:masterClrMapping/>
   </p:clrMapOvr>
-  <p:timing>
-    <p:tnLst>
-      <p:par>
-        <p:cTn id="1" dur="indefinite" restart="never" nodeType="tmRoot"/>
-      </p:par>
-    </p:tnLst>
-  </p:timing>
 </p:sld>
 </file>
 
@@ -22156,11 +21646,7 @@
             </a:r>
             <a:r>
               <a:rPr lang="ru-RU" b="1" dirty="0"/>
-              <a:t> </a:t>
-            </a:r>
-            <a:r>
-              <a:rPr lang="ru-RU" b="1" dirty="0" smtClean="0"/>
-              <a:t>блока внимания </a:t>
+              <a:t> блока внимания </a:t>
             </a:r>
             <a:r>
               <a:rPr lang="ru-RU" dirty="0" err="1"/>
@@ -22214,10 +21700,9 @@
                   <a:buNone/>
                 </a:pPr>
                 <a:r>
-                  <a:rPr lang="ru-RU" sz="2200" i="1" dirty="0" smtClean="0"/>
+                  <a:rPr lang="ru-RU" sz="2200" i="1" dirty="0"/>
                   <a:t>Зададим блок внимания: </a:t>
                 </a:r>
-                <a:endParaRPr lang="ru-RU" sz="2200" i="1" dirty="0"/>
               </a:p>
               <a:p>
                 <a:pPr marL="0" indent="0">
@@ -22393,12 +21878,8 @@
                   </m:oMath>
                 </a14:m>
                 <a:r>
-                  <a:rPr lang="en-US" sz="2200" dirty="0" smtClean="0"/>
-                  <a:t> </a:t>
-                </a:r>
-                <a:r>
                   <a:rPr lang="en-US" sz="2200" dirty="0"/>
-                  <a:t> – </a:t>
+                  <a:t>  – </a:t>
                 </a:r>
                 <a14:m>
                   <m:oMath xmlns:m="http://schemas.openxmlformats.org/officeDocument/2006/math">
@@ -22411,12 +21892,8 @@
                   </m:oMath>
                 </a14:m>
                 <a:r>
-                  <a:rPr lang="en-US" sz="2200" dirty="0" smtClean="0"/>
-                  <a:t> </a:t>
-                </a:r>
-                <a:r>
                   <a:rPr lang="en-US" sz="2200" dirty="0"/>
-                  <a:t>– </a:t>
+                  <a:t> – </a:t>
                 </a:r>
                 <a:r>
                   <a:rPr lang="en-US" sz="2200" dirty="0" err="1"/>
@@ -22424,14 +21901,10 @@
                 </a:r>
                 <a:r>
                   <a:rPr lang="ru-RU" sz="2200" dirty="0"/>
-                  <a:t>с (важность информации декодера</a:t>
+                  <a:t>с (важность информации декодера)</a:t>
                 </a:r>
                 <a:r>
-                  <a:rPr lang="ru-RU" sz="2200" dirty="0" smtClean="0"/>
-                  <a:t>)</a:t>
-                </a:r>
-                <a:r>
-                  <a:rPr lang="en-US" sz="2200" dirty="0" smtClean="0"/>
+                  <a:rPr lang="en-US" sz="2200" dirty="0"/>
                   <a:t>, </a:t>
                 </a:r>
                 <a14:m>
@@ -22595,7 +22068,7 @@
                   </m:oMath>
                 </a14:m>
                 <a:r>
-                  <a:rPr lang="en-US" sz="2200" dirty="0" smtClean="0"/>
+                  <a:rPr lang="en-US" sz="2200" dirty="0"/>
                   <a:t>  </a:t>
                 </a:r>
                 <a14:m>
@@ -22625,11 +22098,11 @@
                   <a:t> – важность информации </a:t>
                 </a:r>
                 <a:r>
-                  <a:rPr lang="ru-RU" sz="2200" dirty="0" err="1" smtClean="0"/>
+                  <a:rPr lang="ru-RU" sz="2200" dirty="0" err="1"/>
                   <a:t>энкодера</a:t>
                 </a:r>
                 <a:r>
-                  <a:rPr lang="ru-RU" sz="2200" dirty="0" smtClean="0"/>
+                  <a:rPr lang="ru-RU" sz="2200" dirty="0"/>
                   <a:t>, </a:t>
                 </a:r>
                 <a14:m>
@@ -22856,7 +22329,7 @@
                   <a:t>важность значений</a:t>
                 </a:r>
                 <a:r>
-                  <a:rPr lang="en-US" sz="2200" dirty="0" smtClean="0"/>
+                  <a:rPr lang="en-US" sz="2200" dirty="0"/>
                   <a:t> </a:t>
                 </a:r>
                 <a14:m>
@@ -22897,11 +22370,11 @@
                   </a:spcBef>
                 </a:pPr>
                 <a:r>
-                  <a:rPr lang="ru-RU" sz="2200" b="1" dirty="0" smtClean="0"/>
+                  <a:rPr lang="ru-RU" sz="2200" b="1" dirty="0"/>
                   <a:t>Интуиция</a:t>
                 </a:r>
                 <a:r>
-                  <a:rPr lang="en-US" sz="2200" b="1" dirty="0" smtClean="0"/>
+                  <a:rPr lang="en-US" sz="2200" b="1" dirty="0"/>
                   <a:t> </a:t>
                 </a:r>
                 <a14:m>
@@ -22921,15 +22394,15 @@
                   </m:oMath>
                 </a14:m>
                 <a:r>
-                  <a:rPr lang="ru-RU" sz="2200" dirty="0" smtClean="0"/>
+                  <a:rPr lang="ru-RU" sz="2200" dirty="0"/>
                   <a:t>: если </a:t>
                 </a:r>
                 <a:r>
-                  <a:rPr lang="en" sz="2200" dirty="0" smtClean="0"/>
+                  <a:rPr lang="en" sz="2200" dirty="0"/>
                   <a:t>decoder</a:t>
                 </a:r>
                 <a:r>
-                  <a:rPr lang="ru-RU" sz="2200" dirty="0" smtClean="0"/>
+                  <a:rPr lang="ru-RU" sz="2200" dirty="0"/>
                   <a:t> (</a:t>
                 </a:r>
                 <a14:m>
@@ -22943,43 +22416,39 @@
                   </m:oMath>
                 </a14:m>
                 <a:r>
-                  <a:rPr lang="ru-RU" sz="2200" dirty="0" smtClean="0"/>
+                  <a:rPr lang="ru-RU" sz="2200" dirty="0"/>
                   <a:t>)</a:t>
                 </a:r>
                 <a:r>
-                  <a:rPr lang="en" sz="2200" dirty="0" smtClean="0"/>
+                  <a:rPr lang="en" sz="2200" dirty="0"/>
                   <a:t> </a:t>
                 </a:r>
                 <a:r>
                   <a:rPr lang="ru-RU" sz="2200" dirty="0"/>
-                  <a:t>прогнозирует </a:t>
+                  <a:t>прогнозирует трафик в пятницу, </a:t>
                 </a:r>
                 <a:r>
-                  <a:rPr lang="ru-RU" sz="2200" dirty="0" smtClean="0"/>
-                  <a:t>трафик в пятницу, </a:t>
-                </a:r>
-                <a:r>
-                  <a:rPr lang="ru-RU" sz="2200" i="1" dirty="0" smtClean="0"/>
+                  <a:rPr lang="ru-RU" sz="2200" i="1" dirty="0"/>
                   <a:t>важность</a:t>
                 </a:r>
                 <a:r>
-                  <a:rPr lang="en-US" sz="2200" i="1" dirty="0" smtClean="0"/>
+                  <a:rPr lang="en-US" sz="2200" i="1" dirty="0"/>
                   <a:t> </a:t>
                 </a:r>
                 <a:r>
-                  <a:rPr lang="ru-RU" sz="2200" i="1" dirty="0" smtClean="0"/>
+                  <a:rPr lang="ru-RU" sz="2200" i="1" dirty="0"/>
                   <a:t>предыдущих значений </a:t>
                 </a:r>
                 <a:r>
-                  <a:rPr lang="ru-RU" sz="2200" dirty="0" smtClean="0"/>
+                  <a:rPr lang="ru-RU" sz="2200" dirty="0"/>
                   <a:t>пятниц </a:t>
                 </a:r>
                 <a:r>
-                  <a:rPr lang="en-US" sz="2200" dirty="0" smtClean="0"/>
+                  <a:rPr lang="en-US" sz="2200" dirty="0"/>
                   <a:t>(K)</a:t>
                 </a:r>
                 <a:r>
-                  <a:rPr lang="ru-RU" sz="2200" dirty="0" smtClean="0"/>
+                  <a:rPr lang="ru-RU" sz="2200" dirty="0"/>
                   <a:t> будет большой.</a:t>
                 </a:r>
                 <a:endParaRPr lang="en-US" sz="2200" dirty="0"/>
@@ -23416,13 +22885,6 @@
   <p:clrMapOvr>
     <a:masterClrMapping/>
   </p:clrMapOvr>
-  <p:timing>
-    <p:tnLst>
-      <p:par>
-        <p:cTn id="1" dur="indefinite" restart="never" nodeType="tmRoot"/>
-      </p:par>
-    </p:tnLst>
-  </p:timing>
 </p:sld>
 </file>
 
@@ -23466,7 +22928,7 @@
           <a:lstStyle/>
           <a:p>
             <a:r>
-              <a:rPr lang="ru-RU" dirty="0" smtClean="0"/>
+              <a:rPr lang="ru-RU" dirty="0"/>
               <a:t>Пример работы слоя внимания </a:t>
             </a:r>
             <a:r>
@@ -23505,31 +22967,15 @@
                   <a:buNone/>
                 </a:pPr>
                 <a:r>
-                  <a:rPr lang="ru-RU" sz="1900" dirty="0" smtClean="0">
-                    <a:solidFill>
-                      <a:schemeClr val="tx1"/>
-                    </a:solidFill>
-                  </a:rPr>
-                  <a:t>Пусть есть </a:t>
-                </a:r>
-                <a:r>
                   <a:rPr lang="ru-RU" sz="1900" dirty="0">
                     <a:solidFill>
                       <a:schemeClr val="tx1"/>
                     </a:solidFill>
                   </a:rPr>
-                  <a:t>временной </a:t>
+                  <a:t>Пусть есть временной ряд:</a:t>
                 </a:r>
                 <a:r>
-                  <a:rPr lang="ru-RU" sz="1900" dirty="0" smtClean="0">
-                    <a:solidFill>
-                      <a:schemeClr val="tx1"/>
-                    </a:solidFill>
-                  </a:rPr>
-                  <a:t>ряд:</a:t>
-                </a:r>
-                <a:r>
-                  <a:rPr lang="en-US" sz="1900" dirty="0" smtClean="0">
+                  <a:rPr lang="en-US" sz="1900" dirty="0">
                     <a:solidFill>
                       <a:schemeClr val="tx1"/>
                     </a:solidFill>
@@ -23684,15 +23130,7 @@
                       <a:schemeClr val="tx1"/>
                     </a:solidFill>
                   </a:rPr>
-                  <a:t>​</a:t>
-                </a:r>
-                <a:r>
-                  <a:rPr lang="en" sz="1900" dirty="0" smtClean="0">
-                    <a:solidFill>
-                      <a:schemeClr val="tx1"/>
-                    </a:solidFill>
-                  </a:rPr>
-                  <a:t>,</a:t>
+                  <a:t>​,</a:t>
                 </a:r>
               </a:p>
               <a:p>
@@ -23700,20 +23138,12 @@
                   <a:buNone/>
                 </a:pPr>
                 <a:r>
-                  <a:rPr lang="ru-RU" sz="1900" dirty="0" smtClean="0">
-                    <a:solidFill>
-                      <a:schemeClr val="tx1"/>
-                    </a:solidFill>
-                  </a:rPr>
-                  <a:t>хотим </a:t>
-                </a:r>
-                <a:r>
                   <a:rPr lang="ru-RU" sz="1900" dirty="0">
                     <a:solidFill>
                       <a:schemeClr val="tx1"/>
                     </a:solidFill>
                   </a:rPr>
-                  <a:t>спрогнозировать </a:t>
+                  <a:t>хотим спрогнозировать </a:t>
                 </a:r>
                 <a14:m>
                   <m:oMath xmlns:m="http://schemas.openxmlformats.org/officeDocument/2006/math">
@@ -23754,7 +23184,7 @@
                   </m:oMath>
                 </a14:m>
                 <a:r>
-                  <a:rPr lang="en" sz="1900" dirty="0" smtClean="0">
+                  <a:rPr lang="en" sz="1900" dirty="0">
                     <a:solidFill>
                       <a:schemeClr val="tx1"/>
                     </a:solidFill>
@@ -23777,15 +23207,7 @@
                       <a:schemeClr val="tx1"/>
                     </a:solidFill>
                   </a:rPr>
-                  <a:t>Encoder: RNN </a:t>
-                </a:r>
-                <a:r>
-                  <a:rPr lang="en" sz="1900" dirty="0" smtClean="0">
-                    <a:solidFill>
-                      <a:schemeClr val="tx1"/>
-                    </a:solidFill>
-                  </a:rPr>
-                  <a:t>, </a:t>
+                  <a:t>Encoder: RNN , </a:t>
                 </a:r>
                 <a:r>
                   <a:rPr lang="ru-RU" sz="1900" dirty="0">
@@ -23920,14 +23342,14 @@
                   </m:oMath>
                 </a14:m>
                 <a:r>
-                  <a:rPr lang="en" sz="1900" dirty="0" smtClean="0">
+                  <a:rPr lang="en" sz="1900" dirty="0">
                     <a:solidFill>
                       <a:schemeClr val="tx1"/>
                     </a:solidFill>
                   </a:rPr>
                   <a:t>​</a:t>
                 </a:r>
-                <a:endParaRPr lang="ru-RU" sz="1900" dirty="0" smtClean="0">
+                <a:endParaRPr lang="ru-RU" sz="1900" dirty="0">
                   <a:solidFill>
                     <a:schemeClr val="tx1"/>
                   </a:solidFill>
@@ -24107,18 +23529,10 @@
                       <a:schemeClr val="tx1"/>
                     </a:solidFill>
                   </a:rPr>
-                  <a:t>генерирует </a:t>
+                  <a:t>генерирует прогнозы </a:t>
                 </a:r>
                 <a:r>
-                  <a:rPr lang="ru-RU" sz="1900" dirty="0" smtClean="0">
-                    <a:solidFill>
-                      <a:schemeClr val="tx1"/>
-                    </a:solidFill>
-                  </a:rPr>
-                  <a:t>прогнозы </a:t>
-                </a:r>
-                <a:r>
-                  <a:rPr lang="ru-RU" sz="1900" dirty="0" err="1" smtClean="0">
+                  <a:rPr lang="ru-RU" sz="1900" dirty="0" err="1">
                     <a:solidFill>
                       <a:schemeClr val="tx1"/>
                     </a:solidFill>
@@ -24126,7 +23540,7 @@
                   <a:t>авторегрессионно</a:t>
                 </a:r>
                 <a:r>
-                  <a:rPr lang="ru-RU" sz="1900" dirty="0" smtClean="0">
+                  <a:rPr lang="ru-RU" sz="1900" dirty="0">
                     <a:solidFill>
                       <a:schemeClr val="tx1"/>
                     </a:solidFill>
@@ -24342,7 +23756,7 @@
                   </m:oMath>
                 </a14:m>
                 <a:r>
-                  <a:rPr lang="en-US" sz="1500" dirty="0" smtClean="0">
+                  <a:rPr lang="en-US" sz="1500" dirty="0">
                     <a:solidFill>
                       <a:schemeClr val="tx1"/>
                     </a:solidFill>
@@ -24407,17 +23821,9 @@
                       <a:schemeClr val="tx1"/>
                     </a:solidFill>
                   </a:rPr>
-                  <a:t> </a:t>
+                  <a:t> слоя</a:t>
                 </a:r>
-                <a:r>
-                  <a:rPr lang="ru-RU" sz="1600" dirty="0" smtClean="0">
-                    <a:solidFill>
-                      <a:schemeClr val="tx1"/>
-                    </a:solidFill>
-                  </a:rPr>
-                  <a:t>слоя</a:t>
-                </a:r>
-                <a:endParaRPr lang="ru-RU" sz="1500" dirty="0" smtClean="0">
+                <a:endParaRPr lang="ru-RU" sz="1500" dirty="0">
                   <a:solidFill>
                     <a:schemeClr val="tx1"/>
                   </a:solidFill>
@@ -24425,20 +23831,12 @@
               </a:p>
               <a:p>
                 <a:r>
-                  <a:rPr lang="ru-RU" sz="1900" dirty="0" smtClean="0">
-                    <a:solidFill>
-                      <a:schemeClr val="tx1"/>
-                    </a:solidFill>
-                  </a:rPr>
-                  <a:t>Пусть </a:t>
-                </a:r>
-                <a:r>
                   <a:rPr lang="ru-RU" sz="1900" dirty="0">
                     <a:solidFill>
                       <a:schemeClr val="tx1"/>
                     </a:solidFill>
                   </a:rPr>
-                  <a:t>размерность скрытых состояний </a:t>
+                  <a:t>Пусть размерность скрытых состояний </a:t>
                 </a:r>
                 <a:r>
                   <a:rPr lang="en" sz="1900" i="1" dirty="0">
@@ -24992,7 +24390,7 @@
                     </m:r>
                   </m:oMath>
                 </a14:m>
-                <a:endParaRPr lang="en" sz="1900" dirty="0" smtClean="0">
+                <a:endParaRPr lang="en" sz="1900" dirty="0">
                   <a:solidFill>
                     <a:schemeClr val="tx1"/>
                   </a:solidFill>
@@ -25998,7 +25396,7 @@
                     </m:nary>
                   </m:oMath>
                 </a14:m>
-                <a:endParaRPr lang="ru-RU" sz="1900" i="1" dirty="0" smtClean="0">
+                <a:endParaRPr lang="ru-RU" sz="1900" i="1" dirty="0">
                   <a:solidFill>
                     <a:schemeClr val="tx1"/>
                   </a:solidFill>
@@ -26028,7 +25426,7 @@
                     </m:r>
                   </m:oMath>
                 </a14:m>
-                <a:endParaRPr lang="en" sz="1900" dirty="0" smtClean="0">
+                <a:endParaRPr lang="en" sz="1900" dirty="0">
                   <a:solidFill>
                     <a:schemeClr val="tx1"/>
                   </a:solidFill>
@@ -26206,14 +25604,14 @@
                   </m:oMath>
                 </a14:m>
                 <a:r>
-                  <a:rPr lang="en-US" sz="1900" dirty="0" smtClean="0">
+                  <a:rPr lang="en-US" sz="1900" dirty="0">
                     <a:solidFill>
                       <a:schemeClr val="tx1"/>
                     </a:solidFill>
                   </a:rPr>
                   <a:t>, </a:t>
                 </a:r>
-                <a:endParaRPr lang="ru-RU" sz="1900" dirty="0" smtClean="0">
+                <a:endParaRPr lang="ru-RU" sz="1900" dirty="0">
                   <a:solidFill>
                     <a:schemeClr val="tx1"/>
                   </a:solidFill>
@@ -26337,27 +25735,7 @@
                               <a:effectLst/>
                               <a:latin typeface="Helvetica Neue" panose="02000503000000020004" pitchFamily="2" charset="0"/>
                             </a:rPr>
-                            <a:t> </a:t>
-                          </a:r>
-                          <a:r>
-                            <a:rPr lang="en" sz="1700" b="1" dirty="0" smtClean="0">
-                              <a:solidFill>
-                                <a:srgbClr val="000000"/>
-                              </a:solidFill>
-                              <a:effectLst/>
-                              <a:latin typeface="Helvetica Neue" panose="02000503000000020004" pitchFamily="2" charset="0"/>
-                            </a:rPr>
-                            <a:t>n</a:t>
-                          </a:r>
-                          <a:r>
-                            <a:rPr lang="en" sz="1700" b="1" dirty="0">
-                              <a:solidFill>
-                                <a:srgbClr val="000000"/>
-                              </a:solidFill>
-                              <a:effectLst/>
-                              <a:latin typeface="Helvetica Neue" panose="02000503000000020004" pitchFamily="2" charset="0"/>
-                            </a:rPr>
-                            <a:t> </a:t>
+                            <a:t> n </a:t>
                           </a:r>
                           <a:endParaRPr lang="en" sz="1700" dirty="0">
                             <a:effectLst/>
@@ -26415,7 +25793,7 @@
                             <a:buNone/>
                           </a:pPr>
                           <a:r>
-                            <a:rPr lang="en" sz="1700" b="1" dirty="0" smtClean="0">
+                            <a:rPr lang="en" sz="1700" b="1" dirty="0">
                               <a:solidFill>
                                 <a:srgbClr val="000000"/>
                               </a:solidFill>
@@ -26531,7 +25909,7 @@
                             <a:buNone/>
                           </a:pPr>
                           <a:r>
-                            <a:rPr lang="en" sz="1700" b="1" dirty="0" smtClean="0">
+                            <a:rPr lang="en" sz="1700" b="1" dirty="0">
                               <a:solidFill>
                                 <a:srgbClr val="000000"/>
                               </a:solidFill>
@@ -26731,7 +26109,7 @@
                             <a:buNone/>
                           </a:pPr>
                           <a:r>
-                            <a:rPr lang="en" sz="1700" b="1" dirty="0" smtClean="0">
+                            <a:rPr lang="en" sz="1700" b="1" dirty="0">
                               <a:solidFill>
                                 <a:srgbClr val="000000"/>
                               </a:solidFill>
@@ -28924,13 +28302,6 @@
   <p:clrMapOvr>
     <a:masterClrMapping/>
   </p:clrMapOvr>
-  <p:timing>
-    <p:tnLst>
-      <p:par>
-        <p:cTn id="1" dur="indefinite" restart="never" nodeType="tmRoot"/>
-      </p:par>
-    </p:tnLst>
-  </p:timing>
 </p:sld>
 </file>
 
@@ -29007,7 +28378,7 @@
               <a:t> в режиме </a:t>
             </a:r>
             <a:r>
-              <a:rPr lang="ru-RU" dirty="0" smtClean="0"/>
+              <a:rPr lang="ru-RU" dirty="0"/>
               <a:t>одного блока</a:t>
             </a:r>
             <a:endParaRPr lang="ru-RU" b="1" dirty="0"/>
@@ -29054,7 +28425,7 @@
                   <a:buNone/>
                 </a:pPr>
                 <a:r>
-                  <a:rPr lang="ru-RU" sz="2200" b="1" dirty="0" smtClean="0">
+                  <a:rPr lang="ru-RU" sz="2200" b="1" dirty="0">
                     <a:latin typeface="Cambria Math" panose="02040503050406030204" pitchFamily="18" charset="0"/>
                   </a:rPr>
                   <a:t>Гипотеза</a:t>
@@ -29063,13 +28434,7 @@
                   <a:rPr lang="ru-RU" sz="2200" dirty="0">
                     <a:latin typeface="Cambria Math" panose="02040503050406030204" pitchFamily="18" charset="0"/>
                   </a:rPr>
-                  <a:t>: анализ набора скрытых </a:t>
-                </a:r>
-                <a:r>
-                  <a:rPr lang="ru-RU" sz="2200" dirty="0" smtClean="0">
-                    <a:latin typeface="Cambria Math" panose="02040503050406030204" pitchFamily="18" charset="0"/>
-                  </a:rPr>
-                  <a:t>состояний </a:t>
+                  <a:t>: анализ набора скрытых состояний </a:t>
                 </a:r>
                 <a14:m>
                   <m:oMath xmlns:m="http://schemas.openxmlformats.org/officeDocument/2006/math">
@@ -29144,24 +28509,14 @@
                   </m:oMath>
                 </a14:m>
                 <a:r>
-                  <a:rPr lang="ru-RU" sz="2200" dirty="0" smtClean="0">
-                    <a:latin typeface="Cambria Math" panose="02040503050406030204" pitchFamily="18" charset="0"/>
-                  </a:rPr>
-                  <a:t>  </a:t>
-                </a:r>
-                <a:r>
                   <a:rPr lang="ru-RU" sz="2200" dirty="0">
                     <a:latin typeface="Cambria Math" panose="02040503050406030204" pitchFamily="18" charset="0"/>
                   </a:rPr>
-                  <a:t>позволяет </a:t>
+                  <a:t>  позволяет </a:t>
                 </a:r>
                 <a:r>
                   <a:rPr lang="ru-RU" sz="2200" dirty="0"/>
-                  <a:t>выявить внутренние зависимости </a:t>
-                </a:r>
-                <a:r>
-                  <a:rPr lang="ru-RU" sz="2200" dirty="0" smtClean="0"/>
-                  <a:t>ВР при формировании состояния </a:t>
+                  <a:t>выявить внутренние зависимости ВР при формировании состояния </a:t>
                 </a:r>
                 <a14:m>
                   <m:oMath xmlns:m="http://schemas.openxmlformats.org/officeDocument/2006/math">
@@ -29199,22 +28554,22 @@
                   </m:oMath>
                 </a14:m>
                 <a:r>
-                  <a:rPr lang="en-US" sz="2200" dirty="0" smtClean="0"/>
+                  <a:rPr lang="en-US" sz="2200" dirty="0"/>
                   <a:t> </a:t>
                 </a:r>
                 <a:r>
-                  <a:rPr lang="ru-RU" sz="2200" dirty="0" smtClean="0"/>
+                  <a:rPr lang="ru-RU" sz="2200" dirty="0"/>
                   <a:t>в </a:t>
                 </a:r>
                 <a:r>
-                  <a:rPr lang="ru-RU" sz="2200" dirty="0" err="1" smtClean="0"/>
+                  <a:rPr lang="ru-RU" sz="2200" dirty="0" err="1"/>
                   <a:t>энкодере</a:t>
                 </a:r>
                 <a:r>
-                  <a:rPr lang="ru-RU" sz="2200" dirty="0" smtClean="0"/>
+                  <a:rPr lang="ru-RU" sz="2200" dirty="0"/>
                   <a:t>. В том числе:</a:t>
                 </a:r>
-                <a:endParaRPr lang="en-US" sz="2200" dirty="0" smtClean="0"/>
+                <a:endParaRPr lang="en-US" sz="2200" dirty="0"/>
               </a:p>
               <a:p>
                 <a:pPr marL="457200" lvl="1" indent="0">
@@ -29227,27 +28582,15 @@
                   <a:buNone/>
                 </a:pPr>
                 <a:r>
-                  <a:rPr lang="ru-RU" sz="2200" dirty="0" smtClean="0"/>
-                  <a:t>— Схожесть паттернов(регулярность</a:t>
-                </a:r>
-                <a:r>
                   <a:rPr lang="ru-RU" sz="2200" dirty="0"/>
-                  <a:t>, сезонность)?</a:t>
+                  <a:t>— Схожесть паттернов(регулярность, сезонность)?</a:t>
                 </a:r>
                 <a:br>
                   <a:rPr lang="ru-RU" sz="2200" dirty="0"/>
                 </a:br>
                 <a:r>
                   <a:rPr lang="ru-RU" sz="2200" dirty="0"/>
-                  <a:t>— </a:t>
-                </a:r>
-                <a:r>
-                  <a:rPr lang="ru-RU" sz="2200" dirty="0" smtClean="0"/>
-                  <a:t>Влияние прошлых паттернов на будущее (тренд</a:t>
-                </a:r>
-                <a:r>
-                  <a:rPr lang="ru-RU" sz="2200" dirty="0"/>
-                  <a:t>, новизна, цикличность)?</a:t>
+                  <a:t>— Влияние прошлых паттернов на будущее (тренд, новизна, цикличность)?</a:t>
                 </a:r>
               </a:p>
               <a:p>
@@ -29262,11 +28605,7 @@
                 </a:pPr>
                 <a:r>
                   <a:rPr lang="ru-RU" sz="2200" dirty="0"/>
-                  <a:t>— </a:t>
-                </a:r>
-                <a:r>
-                  <a:rPr lang="ru-RU" sz="2200" dirty="0" smtClean="0"/>
-                  <a:t>Выявление нерегулярных паттернов(аномалии)?</a:t>
+                  <a:t>— Выявление нерегулярных паттернов(аномалии)?</a:t>
                 </a:r>
               </a:p>
               <a:p>
@@ -29280,23 +28619,19 @@
                   <a:buNone/>
                 </a:pPr>
                 <a:r>
-                  <a:rPr lang="ru-RU" sz="2200" dirty="0" smtClean="0"/>
-                  <a:t>Такая </a:t>
+                  <a:rPr lang="ru-RU" sz="2200" dirty="0"/>
+                  <a:t>Такая гипотеза называется </a:t>
                 </a:r>
                 <a:r>
-                  <a:rPr lang="ru-RU" sz="2200" dirty="0"/>
-                  <a:t>гипотеза называется </a:t>
-                </a:r>
-                <a:r>
-                  <a:rPr lang="ru-RU" sz="2200" b="1" dirty="0" smtClean="0"/>
+                  <a:rPr lang="ru-RU" sz="2200" b="1" dirty="0"/>
                   <a:t>само-внимание </a:t>
                 </a:r>
                 <a:r>
-                  <a:rPr lang="en-US" sz="2200" b="1" dirty="0" smtClean="0"/>
+                  <a:rPr lang="en-US" sz="2200" b="1" dirty="0"/>
                   <a:t>(self-attention)</a:t>
                 </a:r>
                 <a:r>
-                  <a:rPr lang="ru-RU" sz="2200" b="1" dirty="0" smtClean="0"/>
+                  <a:rPr lang="ru-RU" sz="2200" b="1" dirty="0"/>
                   <a:t>:</a:t>
                 </a:r>
                 <a:endParaRPr lang="ru-RU" sz="2200" i="1" dirty="0">
@@ -29702,10 +29037,10 @@
                   <a:t> скрытых состояний</a:t>
                 </a:r>
                 <a:r>
-                  <a:rPr lang="en-US" sz="2200" dirty="0" smtClean="0"/>
+                  <a:rPr lang="en-US" sz="2200" dirty="0"/>
                   <a:t>;</a:t>
                 </a:r>
-                <a:endParaRPr lang="ru-RU" sz="2200" dirty="0" smtClean="0"/>
+                <a:endParaRPr lang="ru-RU" sz="2200" dirty="0"/>
               </a:p>
               <a:p>
                 <a:pPr marL="0" indent="0">
@@ -29719,18 +29054,14 @@
                 </a:pPr>
                 <a:r>
                   <a:rPr lang="ru-RU" sz="2200" dirty="0"/>
-                  <a:t>	</a:t>
+                  <a:t>	если кросс-внимание – дает предсказание, то </a:t>
                 </a:r>
                 <a:r>
-                  <a:rPr lang="ru-RU" sz="2200" dirty="0" smtClean="0"/>
-                  <a:t>если кросс-внимание – дает предсказание, то </a:t>
-                </a:r>
-                <a:r>
-                  <a:rPr lang="ru-RU" sz="2200" dirty="0" err="1" smtClean="0"/>
+                  <a:rPr lang="ru-RU" sz="2200" dirty="0" err="1"/>
                   <a:t>самовнимание</a:t>
                 </a:r>
                 <a:r>
-                  <a:rPr lang="ru-RU" sz="2200" dirty="0" smtClean="0"/>
+                  <a:rPr lang="ru-RU" sz="2200" dirty="0"/>
                   <a:t> дает анализ</a:t>
                 </a:r>
                 <a:endParaRPr lang="en-US" sz="2200" dirty="0"/>
@@ -30289,13 +29620,6 @@
   <p:clrMapOvr>
     <a:masterClrMapping/>
   </p:clrMapOvr>
-  <p:timing>
-    <p:tnLst>
-      <p:par>
-        <p:cTn id="1" dur="indefinite" restart="never" nodeType="tmRoot"/>
-      </p:par>
-    </p:tnLst>
-  </p:timing>
 </p:sld>
 </file>
 
@@ -30400,7 +29724,7 @@
                   <a:buNone/>
                 </a:pPr>
                 <a:r>
-                  <a:rPr lang="ru-RU" sz="2200" b="1" dirty="0" smtClean="0">
+                  <a:rPr lang="ru-RU" sz="2200" b="1" dirty="0">
                     <a:latin typeface="Cambria Math" panose="02040503050406030204" pitchFamily="18" charset="0"/>
                   </a:rPr>
                   <a:t>Гипотеза</a:t>
@@ -30875,15 +30199,15 @@
                   <a:t> </a:t>
                 </a:r>
                 <a:r>
-                  <a:rPr lang="en-US" sz="2000" dirty="0" err="1" smtClean="0"/>
+                  <a:rPr lang="en-US" sz="2000" dirty="0" err="1"/>
                   <a:t>весов</a:t>
                 </a:r>
                 <a:r>
-                  <a:rPr lang="ru-RU" sz="2000" dirty="0" smtClean="0"/>
+                  <a:rPr lang="ru-RU" sz="2000" dirty="0"/>
                   <a:t> каждой головы</a:t>
                 </a:r>
                 <a:r>
-                  <a:rPr lang="en-US" sz="2000" dirty="0" smtClean="0"/>
+                  <a:rPr lang="en-US" sz="2000" dirty="0"/>
                   <a:t>.</a:t>
                 </a:r>
                 <a:endParaRPr lang="ru-RU" sz="2000" dirty="0"/>
@@ -32699,35 +32023,34 @@
           <a:lstStyle/>
           <a:p>
             <a:r>
-              <a:rPr lang="ru-RU" dirty="0" err="1" smtClean="0"/>
+              <a:rPr lang="ru-RU" dirty="0" err="1"/>
               <a:t>Самовнимание</a:t>
             </a:r>
             <a:r>
-              <a:rPr lang="ru-RU" dirty="0" smtClean="0"/>
+              <a:rPr lang="ru-RU" dirty="0"/>
               <a:t> аналогично адаптивной ядерной фильтрации</a:t>
             </a:r>
             <a:br>
-              <a:rPr lang="ru-RU" dirty="0" smtClean="0"/>
+              <a:rPr lang="ru-RU" dirty="0"/>
             </a:br>
             <a:r>
-              <a:rPr lang="ru-RU" dirty="0" smtClean="0"/>
+              <a:rPr lang="ru-RU" dirty="0"/>
               <a:t> ВР – цель фильтрации выделение одного паттерна</a:t>
             </a:r>
           </a:p>
           <a:p>
             <a:r>
-              <a:rPr lang="ru-RU" dirty="0" smtClean="0"/>
+              <a:rPr lang="ru-RU" dirty="0"/>
               <a:t>Цель многоголового </a:t>
             </a:r>
             <a:r>
-              <a:rPr lang="ru-RU" dirty="0" err="1" smtClean="0"/>
+              <a:rPr lang="ru-RU" dirty="0" err="1"/>
               <a:t>самовнимания</a:t>
             </a:r>
             <a:r>
-              <a:rPr lang="ru-RU" dirty="0" smtClean="0"/>
+              <a:rPr lang="ru-RU" dirty="0"/>
               <a:t> – выделение набора паттернов во ВР</a:t>
             </a:r>
-            <a:endParaRPr lang="ru-RU" dirty="0"/>
           </a:p>
         </p:txBody>
       </p:sp>
@@ -32741,13 +32064,6 @@
   <p:clrMapOvr>
     <a:masterClrMapping/>
   </p:clrMapOvr>
-  <p:timing>
-    <p:tnLst>
-      <p:par>
-        <p:cTn id="1" dur="indefinite" restart="never" nodeType="tmRoot"/>
-      </p:par>
-    </p:tnLst>
-  </p:timing>
 </p:sld>
 </file>
 
@@ -32792,18 +32108,17 @@
           <a:p>
             <a:pPr algn="ctr"/>
             <a:r>
-              <a:rPr lang="ru-RU" dirty="0" smtClean="0"/>
+              <a:rPr lang="ru-RU" dirty="0"/>
               <a:t>Идеи перехода от </a:t>
             </a:r>
             <a:r>
-              <a:rPr lang="en-US" dirty="0" smtClean="0"/>
+              <a:rPr lang="en-US" dirty="0"/>
               <a:t>RNN </a:t>
             </a:r>
             <a:r>
-              <a:rPr lang="ru-RU" dirty="0" smtClean="0"/>
+              <a:rPr lang="ru-RU" dirty="0"/>
               <a:t>к авторегрессии</a:t>
             </a:r>
-            <a:endParaRPr lang="ru-RU" dirty="0"/>
           </a:p>
         </p:txBody>
       </p:sp>
@@ -32841,18 +32156,18 @@
                   <a:buNone/>
                 </a:pPr>
                 <a:r>
-                  <a:rPr lang="ru-RU" sz="2200" b="1" dirty="0" smtClean="0"/>
+                  <a:rPr lang="ru-RU" sz="2200" b="1" dirty="0"/>
                   <a:t>Рассмотрим слой </a:t>
                 </a:r>
                 <a:r>
-                  <a:rPr lang="en-US" sz="2200" b="1" dirty="0" smtClean="0"/>
+                  <a:rPr lang="en-US" sz="2200" b="1" dirty="0"/>
                   <a:t>RNN c </a:t>
                 </a:r>
                 <a:r>
-                  <a:rPr lang="ru-RU" sz="2200" b="1" dirty="0" err="1" smtClean="0"/>
+                  <a:rPr lang="ru-RU" sz="2200" b="1" dirty="0" err="1"/>
                   <a:t>самовниманием</a:t>
                 </a:r>
-                <a:endParaRPr lang="ru-RU" sz="2200" b="1" dirty="0" smtClean="0"/>
+                <a:endParaRPr lang="ru-RU" sz="2200" b="1" dirty="0"/>
               </a:p>
               <a:p>
                 <a:pPr marL="0" indent="0">
@@ -33396,7 +32711,7 @@
                     </m:oMath>
                   </m:oMathPara>
                 </a14:m>
-                <a:endParaRPr lang="ru-RU" sz="2200" dirty="0" smtClean="0"/>
+                <a:endParaRPr lang="ru-RU" sz="2200" dirty="0"/>
               </a:p>
               <a:p>
                 <a:pPr marL="0" indent="0" algn="ctr">
@@ -33558,7 +32873,7 @@
                   </m:oMath>
                 </a14:m>
                 <a:r>
-                  <a:rPr lang="en-US" sz="2200" dirty="0" smtClean="0"/>
+                  <a:rPr lang="en-US" sz="2200" dirty="0"/>
                   <a:t>, </a:t>
                 </a:r>
                 <a:endParaRPr lang="ru-RU" sz="2200" dirty="0"/>
@@ -33574,7 +32889,7 @@
                   <a:buNone/>
                 </a:pPr>
                 <a:r>
-                  <a:rPr lang="ru-RU" sz="2200" dirty="0" smtClean="0"/>
+                  <a:rPr lang="ru-RU" sz="2200" dirty="0"/>
                   <a:t>где </a:t>
                 </a:r>
                 <a14:m>
@@ -33588,11 +32903,11 @@
                   </m:oMath>
                 </a14:m>
                 <a:r>
-                  <a:rPr lang="en-US" sz="2200" dirty="0" smtClean="0"/>
+                  <a:rPr lang="en-US" sz="2200" dirty="0"/>
                   <a:t> – </a:t>
                 </a:r>
                 <a:r>
-                  <a:rPr lang="ru-RU" sz="2200" dirty="0" smtClean="0"/>
+                  <a:rPr lang="ru-RU" sz="2200" dirty="0"/>
                   <a:t>размер вектора </a:t>
                 </a:r>
                 <a14:m>
@@ -33694,7 +33009,7 @@
                     </m:r>
                   </m:oMath>
                 </a14:m>
-                <a:endParaRPr lang="ru-RU" sz="2200" dirty="0" smtClean="0"/>
+                <a:endParaRPr lang="ru-RU" sz="2200" dirty="0"/>
               </a:p>
               <a:p>
                 <a:pPr lvl="1">
@@ -33706,15 +33021,15 @@
                   </a:spcBef>
                 </a:pPr>
                 <a:r>
-                  <a:rPr lang="ru-RU" sz="2200" dirty="0" smtClean="0"/>
+                  <a:rPr lang="ru-RU" sz="2200" dirty="0"/>
                   <a:t>По сути это выражение представляет собой </a:t>
                 </a:r>
                 <a:r>
-                  <a:rPr lang="en-US" sz="2200" dirty="0" smtClean="0"/>
+                  <a:rPr lang="en-US" sz="2200" dirty="0"/>
                   <a:t>AR-NET </a:t>
                 </a:r>
                 <a:r>
-                  <a:rPr lang="ru-RU" sz="2200" dirty="0" smtClean="0"/>
+                  <a:rPr lang="ru-RU" sz="2200" dirty="0"/>
                   <a:t>с экзогенными факторами </a:t>
                 </a:r>
               </a:p>
@@ -33728,7 +33043,7 @@
                   </a:spcBef>
                 </a:pPr>
                 <a:r>
-                  <a:rPr lang="ru-RU" sz="2200" dirty="0" smtClean="0"/>
+                  <a:rPr lang="ru-RU" sz="2200" dirty="0"/>
                   <a:t>и динамически рассчитываемыми коэффициентами </a:t>
                 </a:r>
                 <a14:m>
@@ -33741,7 +33056,7 @@
                     </m:r>
                   </m:oMath>
                 </a14:m>
-                <a:endParaRPr lang="en-US" sz="2200" dirty="0" smtClean="0"/>
+                <a:endParaRPr lang="en-US" sz="2200" dirty="0"/>
               </a:p>
               <a:p>
                 <a:pPr marL="0" indent="0">
@@ -33784,10 +33099,6 @@
                 <a:pPr marL="0" indent="0">
                   <a:buNone/>
                 </a:pPr>
-                <a:r>
-                  <a:rPr lang="ru-RU" sz="2200" dirty="0"/>
-                  <a:t/>
-                </a:r>
                 <a:br>
                   <a:rPr lang="ru-RU" sz="2200" dirty="0"/>
                 </a:br>
@@ -34125,21 +33436,6 @@
   <p:clrMapOvr>
     <a:masterClrMapping/>
   </p:clrMapOvr>
-  <mc:AlternateContent xmlns:mc="http://schemas.openxmlformats.org/markup-compatibility/2006" xmlns:p14="http://schemas.microsoft.com/office/powerpoint/2010/main">
-    <mc:Choice Requires="p14">
-      <p:transition spd="slow" p14:dur="2000"/>
-    </mc:Choice>
-    <mc:Fallback xmlns="">
-      <p:transition spd="slow"/>
-    </mc:Fallback>
-  </mc:AlternateContent>
-  <p:timing>
-    <p:tnLst>
-      <p:par>
-        <p:cTn id="1" dur="indefinite" restart="never" nodeType="tmRoot"/>
-      </p:par>
-    </p:tnLst>
-  </p:timing>
 </p:sld>
 </file>
 
